--- a/documentos_teoricos/entregable3/req_profesor/informe/entregable3_presentacion.pptx
+++ b/documentos_teoricos/entregable3/req_profesor/informe/entregable3_presentacion.pptx
@@ -4,23 +4,24 @@
   <p:sldMasterIdLst>
     <p:sldMasterId id="2147483648" r:id="rId1"/>
   </p:sldMasterIdLst>
+  <p:notesMasterIdLst>
+    <p:notesMasterId r:id="rId14"/>
+  </p:notesMasterIdLst>
   <p:sldIdLst>
-    <p:sldId id="256" r:id="rId7"/>
-    <p:sldId id="257" r:id="rId9"/>
-    <p:sldId id="258" r:id="rId10"/>
-    <p:sldId id="259" r:id="rId11"/>
-    <p:sldId id="260" r:id="rId12"/>
-    <p:sldId id="261" r:id="rId13"/>
-    <p:sldId id="262" r:id="rId14"/>
-    <p:sldId id="263" r:id="rId15"/>
-    <p:sldId id="264" r:id="rId16"/>
-    <p:sldId id="265" r:id="rId17"/>
-    <p:sldId id="266" r:id="rId18"/>
-    <p:sldId id="267" r:id="rId19"/>
-    <p:sldId id="268" r:id="rId20"/>
-    <p:sldId id="269" r:id="rId21"/>
+    <p:sldId id="256" r:id="rId2"/>
+    <p:sldId id="257" r:id="rId3"/>
+    <p:sldId id="258" r:id="rId4"/>
+    <p:sldId id="259" r:id="rId5"/>
+    <p:sldId id="260" r:id="rId6"/>
+    <p:sldId id="263" r:id="rId7"/>
+    <p:sldId id="264" r:id="rId8"/>
+    <p:sldId id="265" r:id="rId9"/>
+    <p:sldId id="266" r:id="rId10"/>
+    <p:sldId id="267" r:id="rId11"/>
+    <p:sldId id="268" r:id="rId12"/>
+    <p:sldId id="269" r:id="rId13"/>
   </p:sldIdLst>
-  <p:sldSz cx="12191695" cy="6858000" type="screen4x3"/>
+  <p:sldSz cx="12192000" cy="6858000"/>
   <p:notesSz cx="6858000" cy="9144000"/>
   <p:defaultTextStyle>
     <a:defPPr>
@@ -117,11 +118,27 @@
       </a:defRPr>
     </a:lvl9pPr>
   </p:defaultTextStyle>
+  <p:extLst>
+    <p:ext uri="{EFAFB233-063F-42B5-8137-9DF3F51BA10A}">
+      <p15:sldGuideLst xmlns:p15="http://schemas.microsoft.com/office/powerpoint/2012/main">
+        <p15:guide id="1" orient="horz" pos="2160">
+          <p15:clr>
+            <a:srgbClr val="A4A3A4"/>
+          </p15:clr>
+        </p15:guide>
+        <p15:guide id="2" pos="2880">
+          <p15:clr>
+            <a:srgbClr val="A4A3A4"/>
+          </p15:clr>
+        </p15:guide>
+      </p15:sldGuideLst>
+    </p:ext>
+  </p:extLst>
 </p:presentation>
 </file>
 
 <file path=ppt/notesMasters/notesMaster1.xml><?xml version="1.0" encoding="utf-8"?>
-<p:notesMaster xmlns:a="http://schemas.openxmlformats.org/drawingml/2006/main" xmlns:p="http://schemas.openxmlformats.org/presentationml/2006/main" xmlns:r="http://schemas.openxmlformats.org/officeDocument/2006/relationships">
+<p:notesMaster xmlns:a="http://schemas.openxmlformats.org/drawingml/2006/main" xmlns:r="http://schemas.openxmlformats.org/officeDocument/2006/relationships" xmlns:p="http://schemas.openxmlformats.org/presentationml/2006/main">
   <p:cSld>
     <p:bg>
       <p:bgRef idx="1001">
@@ -142,241 +159,16 @@
           <a:chExt cx="0" cy="0"/>
         </a:xfrm>
       </p:grpSpPr>
-      <p:sp>
-        <p:nvSpPr>
-          <p:cNvPr id="2" name="Header Placeholder 1"/>
-          <p:cNvSpPr>
-            <a:spLocks noGrp="1"/>
-          </p:cNvSpPr>
-          <p:nvPr>
-            <p:ph type="hdr" sz="quarter"/>
-          </p:nvPr>
-        </p:nvSpPr>
-        <p:spPr>
-          <a:xfrm>
-            <a:off x="0" y="0"/>
-            <a:ext cx="2971800" cy="457200"/>
-          </a:xfrm>
-          <a:prstGeom prst="rect">
-            <a:avLst/>
-          </a:prstGeom>
-        </p:spPr>
-        <p:txBody>
-          <a:bodyPr vert="horz" lIns="91440" tIns="45720" rIns="91440" bIns="45720" rtlCol="0"/>
-          <a:lstStyle>
-            <a:lvl1pPr algn="l">
-              <a:defRPr sz="1200"/>
-            </a:lvl1pPr>
-          </a:lstStyle>
-          <a:p>
-            <a:endParaRPr lang="en-US"/>
-          </a:p>
-        </p:txBody>
-      </p:sp>
-      <p:sp>
-        <p:nvSpPr>
-          <p:cNvPr id="3" name="Date Placeholder 2"/>
-          <p:cNvSpPr>
-            <a:spLocks noGrp="1"/>
-          </p:cNvSpPr>
-          <p:nvPr>
-            <p:ph type="dt" idx="1"/>
-          </p:nvPr>
-        </p:nvSpPr>
-        <p:spPr>
-          <a:xfrm>
-            <a:off x="3884613" y="0"/>
-            <a:ext cx="2971800" cy="457200"/>
-          </a:xfrm>
-          <a:prstGeom prst="rect">
-            <a:avLst/>
-          </a:prstGeom>
-        </p:spPr>
-        <p:txBody>
-          <a:bodyPr vert="horz" lIns="91440" tIns="45720" rIns="91440" bIns="45720" rtlCol="0"/>
-          <a:lstStyle>
-            <a:lvl1pPr algn="r">
-              <a:defRPr sz="1200"/>
-            </a:lvl1pPr>
-          </a:lstStyle>
-          <a:p>
-            <a:fld id="{0F89C1C7-3DCD-1040-A9CF-14679D8B5DDD}" type="datetimeFigureOut">
-              <a:rPr lang="en-US" smtClean="0"/>
-              <a:t>10/17/16</a:t>
-            </a:fld>
-            <a:endParaRPr lang="en-US"/>
-          </a:p>
-        </p:txBody>
-      </p:sp>
-      <p:sp>
-        <p:nvSpPr>
-          <p:cNvPr id="4" name="Slide Image Placeholder 3"/>
-          <p:cNvSpPr>
-            <a:spLocks noGrp="1" noRot="1" noChangeAspect="1"/>
-          </p:cNvSpPr>
-          <p:nvPr>
-            <p:ph type="sldImg" idx="2"/>
-          </p:nvPr>
-        </p:nvSpPr>
-        <p:spPr>
-          <a:xfrm>
-            <a:off x="1143000" y="685800"/>
-            <a:ext cx="4572000" cy="3429000"/>
-          </a:xfrm>
-          <a:prstGeom prst="rect">
-            <a:avLst/>
-          </a:prstGeom>
-          <a:noFill/>
-          <a:ln w="12700">
-            <a:solidFill>
-              <a:prstClr val="black"/>
-            </a:solidFill>
-          </a:ln>
-        </p:spPr>
-        <p:txBody>
-          <a:bodyPr vert="horz" lIns="91440" tIns="45720" rIns="91440" bIns="45720" rtlCol="0" anchor="ctr"/>
-          <a:lstStyle/>
-          <a:p>
-            <a:endParaRPr lang="en-US"/>
-          </a:p>
-        </p:txBody>
-      </p:sp>
-      <p:sp>
-        <p:nvSpPr>
-          <p:cNvPr id="5" name="Notes Placeholder 4"/>
-          <p:cNvSpPr>
-            <a:spLocks noGrp="1"/>
-          </p:cNvSpPr>
-          <p:nvPr>
-            <p:ph type="body" sz="quarter" idx="3"/>
-          </p:nvPr>
-        </p:nvSpPr>
-        <p:spPr>
-          <a:xfrm>
-            <a:off x="685800" y="4343400"/>
-            <a:ext cx="5486400" cy="4114800"/>
-          </a:xfrm>
-          <a:prstGeom prst="rect">
-            <a:avLst/>
-          </a:prstGeom>
-        </p:spPr>
-        <p:txBody>
-          <a:bodyPr vert="horz" lIns="91440" tIns="45720" rIns="91440" bIns="45720" rtlCol="0"/>
-          <a:lstStyle/>
-          <a:p>
-            <a:pPr lvl="0"/>
-            <a:r>
-              <a:rPr lang="en-US" smtClean="0"/>
-              <a:t>Click to edit Master text styles</a:t>
-            </a:r>
-          </a:p>
-          <a:p>
-            <a:pPr lvl="1"/>
-            <a:r>
-              <a:rPr lang="en-US" smtClean="0"/>
-              <a:t>Second level</a:t>
-            </a:r>
-          </a:p>
-          <a:p>
-            <a:pPr lvl="2"/>
-            <a:r>
-              <a:rPr lang="en-US" smtClean="0"/>
-              <a:t>Third level</a:t>
-            </a:r>
-          </a:p>
-          <a:p>
-            <a:pPr lvl="3"/>
-            <a:r>
-              <a:rPr lang="en-US" smtClean="0"/>
-              <a:t>Fourth level</a:t>
-            </a:r>
-          </a:p>
-          <a:p>
-            <a:pPr lvl="4"/>
-            <a:r>
-              <a:rPr lang="en-US" smtClean="0"/>
-              <a:t>Fifth level</a:t>
-            </a:r>
-            <a:endParaRPr lang="en-US"/>
-          </a:p>
-        </p:txBody>
-      </p:sp>
-      <p:sp>
-        <p:nvSpPr>
-          <p:cNvPr id="6" name="Footer Placeholder 5"/>
-          <p:cNvSpPr>
-            <a:spLocks noGrp="1"/>
-          </p:cNvSpPr>
-          <p:nvPr>
-            <p:ph type="ftr" sz="quarter" idx="4"/>
-          </p:nvPr>
-        </p:nvSpPr>
-        <p:spPr>
-          <a:xfrm>
-            <a:off x="0" y="8685213"/>
-            <a:ext cx="2971800" cy="457200"/>
-          </a:xfrm>
-          <a:prstGeom prst="rect">
-            <a:avLst/>
-          </a:prstGeom>
-        </p:spPr>
-        <p:txBody>
-          <a:bodyPr vert="horz" lIns="91440" tIns="45720" rIns="91440" bIns="45720" rtlCol="0" anchor="b"/>
-          <a:lstStyle>
-            <a:lvl1pPr algn="l">
-              <a:defRPr sz="1200"/>
-            </a:lvl1pPr>
-          </a:lstStyle>
-          <a:p>
-            <a:endParaRPr lang="en-US"/>
-          </a:p>
-        </p:txBody>
-      </p:sp>
-      <p:sp>
-        <p:nvSpPr>
-          <p:cNvPr id="7" name="Slide Number Placeholder 6"/>
-          <p:cNvSpPr>
-            <a:spLocks noGrp="1"/>
-          </p:cNvSpPr>
-          <p:nvPr>
-            <p:ph type="sldNum" sz="quarter" idx="5"/>
-          </p:nvPr>
-        </p:nvSpPr>
-        <p:spPr>
-          <a:xfrm>
-            <a:off x="3884613" y="8685213"/>
-            <a:ext cx="2971800" cy="457200"/>
-          </a:xfrm>
-          <a:prstGeom prst="rect">
-            <a:avLst/>
-          </a:prstGeom>
-        </p:spPr>
-        <p:txBody>
-          <a:bodyPr vert="horz" lIns="91440" tIns="45720" rIns="91440" bIns="45720" rtlCol="0" anchor="b"/>
-          <a:lstStyle>
-            <a:lvl1pPr algn="r">
-              <a:defRPr sz="1200"/>
-            </a:lvl1pPr>
-          </a:lstStyle>
-          <a:p>
-            <a:fld id="{BB5E49A5-4136-284D-997B-48E1D791AD67}" type="slidenum">
-              <a:rPr lang="en-US" smtClean="0"/>
-              <a:t>‹#›</a:t>
-            </a:fld>
-            <a:endParaRPr lang="en-US"/>
-          </a:p>
-        </p:txBody>
-      </p:sp>
     </p:spTree>
     <p:extLst>
       <p:ext uri="{BB962C8B-B14F-4D97-AF65-F5344CB8AC3E}">
-        <p14:creationId xmlns:p14="http://schemas.microsoft.com/office/powerpoint/2010/main" val="2623252185"/>
+        <p14:creationId xmlns:p14="http://schemas.microsoft.com/office/powerpoint/2010/main" val="2180414512"/>
       </p:ext>
     </p:extLst>
   </p:cSld>
   <p:clrMap bg1="lt1" tx1="dk1" bg2="lt2" tx2="dk2" accent1="accent1" accent2="accent2" accent3="accent3" accent4="accent4" accent5="accent5" accent6="accent6" hlink="hlink" folHlink="folHlink"/>
   <p:notesStyle>
-    <a:lvl1pPr marL="0" algn="l" defTabSz="457200" rtl="0" eaLnBrk="1" latinLnBrk="0" hangingPunct="1">
+    <a:lvl1pPr marL="0" algn="l" defTabSz="914400" rtl="0" eaLnBrk="1" latinLnBrk="0" hangingPunct="1">
       <a:defRPr sz="1200" kern="1200">
         <a:solidFill>
           <a:schemeClr val="tx1"/>
@@ -386,7 +178,7 @@
         <a:cs typeface="+mn-cs"/>
       </a:defRPr>
     </a:lvl1pPr>
-    <a:lvl2pPr marL="457200" algn="l" defTabSz="457200" rtl="0" eaLnBrk="1" latinLnBrk="0" hangingPunct="1">
+    <a:lvl2pPr marL="457200" algn="l" defTabSz="914400" rtl="0" eaLnBrk="1" latinLnBrk="0" hangingPunct="1">
       <a:defRPr sz="1200" kern="1200">
         <a:solidFill>
           <a:schemeClr val="tx1"/>
@@ -396,7 +188,7 @@
         <a:cs typeface="+mn-cs"/>
       </a:defRPr>
     </a:lvl2pPr>
-    <a:lvl3pPr marL="914400" algn="l" defTabSz="457200" rtl="0" eaLnBrk="1" latinLnBrk="0" hangingPunct="1">
+    <a:lvl3pPr marL="914400" algn="l" defTabSz="914400" rtl="0" eaLnBrk="1" latinLnBrk="0" hangingPunct="1">
       <a:defRPr sz="1200" kern="1200">
         <a:solidFill>
           <a:schemeClr val="tx1"/>
@@ -406,7 +198,7 @@
         <a:cs typeface="+mn-cs"/>
       </a:defRPr>
     </a:lvl3pPr>
-    <a:lvl4pPr marL="1371600" algn="l" defTabSz="457200" rtl="0" eaLnBrk="1" latinLnBrk="0" hangingPunct="1">
+    <a:lvl4pPr marL="1371600" algn="l" defTabSz="914400" rtl="0" eaLnBrk="1" latinLnBrk="0" hangingPunct="1">
       <a:defRPr sz="1200" kern="1200">
         <a:solidFill>
           <a:schemeClr val="tx1"/>
@@ -416,7 +208,7 @@
         <a:cs typeface="+mn-cs"/>
       </a:defRPr>
     </a:lvl4pPr>
-    <a:lvl5pPr marL="1828800" algn="l" defTabSz="457200" rtl="0" eaLnBrk="1" latinLnBrk="0" hangingPunct="1">
+    <a:lvl5pPr marL="1828800" algn="l" defTabSz="914400" rtl="0" eaLnBrk="1" latinLnBrk="0" hangingPunct="1">
       <a:defRPr sz="1200" kern="1200">
         <a:solidFill>
           <a:schemeClr val="tx1"/>
@@ -426,7 +218,7 @@
         <a:cs typeface="+mn-cs"/>
       </a:defRPr>
     </a:lvl5pPr>
-    <a:lvl6pPr marL="2286000" algn="l" defTabSz="457200" rtl="0" eaLnBrk="1" latinLnBrk="0" hangingPunct="1">
+    <a:lvl6pPr marL="2286000" algn="l" defTabSz="914400" rtl="0" eaLnBrk="1" latinLnBrk="0" hangingPunct="1">
       <a:defRPr sz="1200" kern="1200">
         <a:solidFill>
           <a:schemeClr val="tx1"/>
@@ -436,7 +228,7 @@
         <a:cs typeface="+mn-cs"/>
       </a:defRPr>
     </a:lvl6pPr>
-    <a:lvl7pPr marL="2743200" algn="l" defTabSz="457200" rtl="0" eaLnBrk="1" latinLnBrk="0" hangingPunct="1">
+    <a:lvl7pPr marL="2743200" algn="l" defTabSz="914400" rtl="0" eaLnBrk="1" latinLnBrk="0" hangingPunct="1">
       <a:defRPr sz="1200" kern="1200">
         <a:solidFill>
           <a:schemeClr val="tx1"/>
@@ -446,7 +238,7 @@
         <a:cs typeface="+mn-cs"/>
       </a:defRPr>
     </a:lvl7pPr>
-    <a:lvl8pPr marL="3200400" algn="l" defTabSz="457200" rtl="0" eaLnBrk="1" latinLnBrk="0" hangingPunct="1">
+    <a:lvl8pPr marL="3200400" algn="l" defTabSz="914400" rtl="0" eaLnBrk="1" latinLnBrk="0" hangingPunct="1">
       <a:defRPr sz="1200" kern="1200">
         <a:solidFill>
           <a:schemeClr val="tx1"/>
@@ -456,7 +248,7 @@
         <a:cs typeface="+mn-cs"/>
       </a:defRPr>
     </a:lvl8pPr>
-    <a:lvl9pPr marL="3657600" algn="l" defTabSz="457200" rtl="0" eaLnBrk="1" latinLnBrk="0" hangingPunct="1">
+    <a:lvl9pPr marL="3657600" algn="l" defTabSz="914400" rtl="0" eaLnBrk="1" latinLnBrk="0" hangingPunct="1">
       <a:defRPr sz="1200" kern="1200">
         <a:solidFill>
           <a:schemeClr val="tx1"/>
@@ -471,7 +263,7 @@
 </file>
 
 <file path=ppt/notesSlides/notesSlide1.xml><?xml version="1.0" encoding="utf-8"?>
-<p:notes xmlns:a="http://schemas.openxmlformats.org/drawingml/2006/main" xmlns:p="http://schemas.openxmlformats.org/presentationml/2006/main" xmlns:r="http://schemas.openxmlformats.org/officeDocument/2006/relationships">
+<p:notes xmlns:a="http://schemas.openxmlformats.org/drawingml/2006/main" xmlns:r="http://schemas.openxmlformats.org/officeDocument/2006/relationships" xmlns:p="http://schemas.openxmlformats.org/presentationml/2006/main">
   <p:cSld>
     <p:spTree>
       <p:nvGrpSpPr>
@@ -491,7 +283,7 @@
         <p:nvSpPr>
           <p:cNvPr id="2" name="Slide Image Placeholder 1"/>
           <p:cNvSpPr>
-            <a:spLocks noGrp="1"/>
+            <a:spLocks noGrp="1" noRot="1" noChangeAspect="1"/>
           </p:cNvSpPr>
           <p:nvPr>
             <p:ph type="sldImg" idx="2"/>
@@ -506,7 +298,7 @@
             <a:spLocks noGrp="1"/>
           </p:cNvSpPr>
           <p:nvPr>
-            <p:ph type="body" idx="3" sz="quarter"/>
+            <p:ph type="body" sz="quarter" idx="3"/>
           </p:nvPr>
         </p:nvSpPr>
         <p:spPr/>
@@ -527,7 +319,7 @@
             <a:spLocks noGrp="1"/>
           </p:cNvSpPr>
           <p:nvPr>
-            <p:ph type="sldNum" idx="5" sz="quarter"/>
+            <p:ph type="sldNum" sz="quarter" idx="5"/>
           </p:nvPr>
         </p:nvSpPr>
         <p:spPr/>
@@ -541,7 +333,7 @@
 </file>
 
 <file path=ppt/notesSlides/notesSlide10.xml><?xml version="1.0" encoding="utf-8"?>
-<p:notes xmlns:a="http://schemas.openxmlformats.org/drawingml/2006/main" xmlns:p="http://schemas.openxmlformats.org/presentationml/2006/main" xmlns:r="http://schemas.openxmlformats.org/officeDocument/2006/relationships">
+<p:notes xmlns:a="http://schemas.openxmlformats.org/drawingml/2006/main" xmlns:r="http://schemas.openxmlformats.org/officeDocument/2006/relationships" xmlns:p="http://schemas.openxmlformats.org/presentationml/2006/main">
   <p:cSld>
     <p:spTree>
       <p:nvGrpSpPr>
@@ -561,7 +353,7 @@
         <p:nvSpPr>
           <p:cNvPr id="2" name="Slide Image Placeholder 1"/>
           <p:cNvSpPr>
-            <a:spLocks noGrp="1"/>
+            <a:spLocks noGrp="1" noRot="1" noChangeAspect="1"/>
           </p:cNvSpPr>
           <p:nvPr>
             <p:ph type="sldImg" idx="2"/>
@@ -576,7 +368,7 @@
             <a:spLocks noGrp="1"/>
           </p:cNvSpPr>
           <p:nvPr>
-            <p:ph type="body" idx="3" sz="quarter"/>
+            <p:ph type="body" sz="quarter" idx="3"/>
           </p:nvPr>
         </p:nvSpPr>
         <p:spPr/>
@@ -585,7 +377,7 @@
           <a:lstStyle/>
           <a:p>
             <a:r>
-              <a:t>La segunda parte del modelo físico guarda los parámetros del NRUS versionados, el cronograma de vencimientos y el resultado de cada mes. Ahora mostramos la base real en DBeaver: el archivo del teléfono está cifrado y no se abre; la copia legible muestra las tablas con los datos.</a:t>
+              <a:t>El registro principal: se toma la foto con el encuadre, Gemma 4 lee la factura dentro del teléfono, el usuario revisa los campos (el de baja confianza aparece en ámbar), la app avisa si es duplicada y la guarda.</a:t>
             </a:r>
           </a:p>
         </p:txBody>
@@ -597,7 +389,7 @@
             <a:spLocks noGrp="1"/>
           </p:cNvSpPr>
           <p:nvPr>
-            <p:ph type="sldNum" idx="5" sz="quarter"/>
+            <p:ph type="sldNum" sz="quarter" idx="5"/>
           </p:nvPr>
         </p:nvSpPr>
         <p:spPr/>
@@ -611,7 +403,7 @@
 </file>
 
 <file path=ppt/notesSlides/notesSlide11.xml><?xml version="1.0" encoding="utf-8"?>
-<p:notes xmlns:a="http://schemas.openxmlformats.org/drawingml/2006/main" xmlns:p="http://schemas.openxmlformats.org/presentationml/2006/main" xmlns:r="http://schemas.openxmlformats.org/officeDocument/2006/relationships">
+<p:notes xmlns:a="http://schemas.openxmlformats.org/drawingml/2006/main" xmlns:r="http://schemas.openxmlformats.org/officeDocument/2006/relationships" xmlns:p="http://schemas.openxmlformats.org/presentationml/2006/main">
   <p:cSld>
     <p:spTree>
       <p:nvGrpSpPr>
@@ -631,7 +423,7 @@
         <p:nvSpPr>
           <p:cNvPr id="2" name="Slide Image Placeholder 1"/>
           <p:cNvSpPr>
-            <a:spLocks noGrp="1"/>
+            <a:spLocks noGrp="1" noRot="1" noChangeAspect="1"/>
           </p:cNvSpPr>
           <p:nvPr>
             <p:ph type="sldImg" idx="2"/>
@@ -646,7 +438,7 @@
             <a:spLocks noGrp="1"/>
           </p:cNvSpPr>
           <p:nvPr>
-            <p:ph type="body" idx="3" sz="quarter"/>
+            <p:ph type="body" sz="quarter" idx="3"/>
           </p:nvPr>
         </p:nvSpPr>
         <p:spPr/>
@@ -655,7 +447,7 @@
           <a:lstStyle/>
           <a:p>
             <a:r>
-              <a:t>La app se configura con el RUC del negocio y un PIN, y se abre con PIN o huella. El modelo Gemma 4 se descarga una sola vez después de comprobar la memoria y el espacio; desde ahí lee sin internet.</a:t>
+              <a:t>Con las facturas del mes la app suma las compras; el titular ingresa sus ventas y la app aplica la regla del mayor monto para darle la categoría, la cuota y la fecha de vencimiento según su RUC.</a:t>
             </a:r>
           </a:p>
         </p:txBody>
@@ -667,7 +459,7 @@
             <a:spLocks noGrp="1"/>
           </p:cNvSpPr>
           <p:nvPr>
-            <p:ph type="sldNum" idx="5" sz="quarter"/>
+            <p:ph type="sldNum" sz="quarter" idx="5"/>
           </p:nvPr>
         </p:nvSpPr>
         <p:spPr/>
@@ -681,7 +473,7 @@
 </file>
 
 <file path=ppt/notesSlides/notesSlide12.xml><?xml version="1.0" encoding="utf-8"?>
-<p:notes xmlns:a="http://schemas.openxmlformats.org/drawingml/2006/main" xmlns:p="http://schemas.openxmlformats.org/presentationml/2006/main" xmlns:r="http://schemas.openxmlformats.org/officeDocument/2006/relationships">
+<p:notes xmlns:a="http://schemas.openxmlformats.org/drawingml/2006/main" xmlns:r="http://schemas.openxmlformats.org/officeDocument/2006/relationships" xmlns:p="http://schemas.openxmlformats.org/presentationml/2006/main">
   <p:cSld>
     <p:spTree>
       <p:nvGrpSpPr>
@@ -701,7 +493,7 @@
         <p:nvSpPr>
           <p:cNvPr id="2" name="Slide Image Placeholder 1"/>
           <p:cNvSpPr>
-            <a:spLocks noGrp="1"/>
+            <a:spLocks noGrp="1" noRot="1" noChangeAspect="1"/>
           </p:cNvSpPr>
           <p:nvPr>
             <p:ph type="sldImg" idx="2"/>
@@ -716,7 +508,7 @@
             <a:spLocks noGrp="1"/>
           </p:cNvSpPr>
           <p:nvPr>
-            <p:ph type="body" idx="3" sz="quarter"/>
+            <p:ph type="body" sz="quarter" idx="3"/>
           </p:nvPr>
         </p:nvSpPr>
         <p:spPr/>
@@ -725,7 +517,7 @@
           <a:lstStyle/>
           <a:p>
             <a:r>
-              <a:t>El registro principal: se toma la foto con el encuadre, Gemma 4 lee la factura dentro del teléfono, el usuario revisa los campos (el de baja confianza aparece en ámbar), la app avisa si es duplicada y la guarda.</a:t>
+              <a:t>Al final del mes la app genera el reporte en PDF, cierra el mes y lo guarda en el historial. Si no hay memoria para el modelo, se registra a mano. Los datos se exportan a un ZIP con CSV para revisarlos en una PC.</a:t>
             </a:r>
           </a:p>
         </p:txBody>
@@ -737,7 +529,7 @@
             <a:spLocks noGrp="1"/>
           </p:cNvSpPr>
           <p:nvPr>
-            <p:ph type="sldNum" idx="5" sz="quarter"/>
+            <p:ph type="sldNum" sz="quarter" idx="5"/>
           </p:nvPr>
         </p:nvSpPr>
         <p:spPr/>
@@ -750,8 +542,8 @@
 </p:notes>
 </file>
 
-<file path=ppt/notesSlides/notesSlide13.xml><?xml version="1.0" encoding="utf-8"?>
-<p:notes xmlns:a="http://schemas.openxmlformats.org/drawingml/2006/main" xmlns:p="http://schemas.openxmlformats.org/presentationml/2006/main" xmlns:r="http://schemas.openxmlformats.org/officeDocument/2006/relationships">
+<file path=ppt/notesSlides/notesSlide2.xml><?xml version="1.0" encoding="utf-8"?>
+<p:notes xmlns:a="http://schemas.openxmlformats.org/drawingml/2006/main" xmlns:r="http://schemas.openxmlformats.org/officeDocument/2006/relationships" xmlns:p="http://schemas.openxmlformats.org/presentationml/2006/main">
   <p:cSld>
     <p:spTree>
       <p:nvGrpSpPr>
@@ -771,7 +563,7 @@
         <p:nvSpPr>
           <p:cNvPr id="2" name="Slide Image Placeholder 1"/>
           <p:cNvSpPr>
-            <a:spLocks noGrp="1"/>
+            <a:spLocks noGrp="1" noRot="1" noChangeAspect="1"/>
           </p:cNvSpPr>
           <p:nvPr>
             <p:ph type="sldImg" idx="2"/>
@@ -786,7 +578,7 @@
             <a:spLocks noGrp="1"/>
           </p:cNvSpPr>
           <p:nvPr>
-            <p:ph type="body" idx="3" sz="quarter"/>
+            <p:ph type="body" sz="quarter" idx="3"/>
           </p:nvPr>
         </p:nvSpPr>
         <p:spPr/>
@@ -795,7 +587,7 @@
           <a:lstStyle/>
           <a:p>
             <a:r>
-              <a:t>Con las facturas del mes la app suma las compras; el titular ingresa sus ventas y la app aplica la regla del mayor monto para darle la categoría, la cuota y la fecha de vencimiento según su RUC.</a:t>
+              <a:t>Acta del proyecto en su versión básica. El objetivo es el que pidió el docente y coincide con el título. El alcance cubre desde la captura de la factura hasta el reporte y la exportación; la declaración ante la SUNAT queda fuera. El entrenamiento del modelo se hace en una PC del equipo y la app corre sin servidor.</a:t>
             </a:r>
           </a:p>
         </p:txBody>
@@ -807,7 +599,7 @@
             <a:spLocks noGrp="1"/>
           </p:cNvSpPr>
           <p:nvPr>
-            <p:ph type="sldNum" idx="5" sz="quarter"/>
+            <p:ph type="sldNum" sz="quarter" idx="5"/>
           </p:nvPr>
         </p:nvSpPr>
         <p:spPr/>
@@ -820,8 +612,8 @@
 </p:notes>
 </file>
 
-<file path=ppt/notesSlides/notesSlide14.xml><?xml version="1.0" encoding="utf-8"?>
-<p:notes xmlns:a="http://schemas.openxmlformats.org/drawingml/2006/main" xmlns:p="http://schemas.openxmlformats.org/presentationml/2006/main" xmlns:r="http://schemas.openxmlformats.org/officeDocument/2006/relationships">
+<file path=ppt/notesSlides/notesSlide3.xml><?xml version="1.0" encoding="utf-8"?>
+<p:notes xmlns:a="http://schemas.openxmlformats.org/drawingml/2006/main" xmlns:r="http://schemas.openxmlformats.org/officeDocument/2006/relationships" xmlns:p="http://schemas.openxmlformats.org/presentationml/2006/main">
   <p:cSld>
     <p:spTree>
       <p:nvGrpSpPr>
@@ -841,7 +633,7 @@
         <p:nvSpPr>
           <p:cNvPr id="2" name="Slide Image Placeholder 1"/>
           <p:cNvSpPr>
-            <a:spLocks noGrp="1"/>
+            <a:spLocks noGrp="1" noRot="1" noChangeAspect="1"/>
           </p:cNvSpPr>
           <p:nvPr>
             <p:ph type="sldImg" idx="2"/>
@@ -856,7 +648,7 @@
             <a:spLocks noGrp="1"/>
           </p:cNvSpPr>
           <p:nvPr>
-            <p:ph type="body" idx="3" sz="quarter"/>
+            <p:ph type="body" sz="quarter" idx="3"/>
           </p:nvPr>
         </p:nvSpPr>
         <p:spPr/>
@@ -865,7 +657,7 @@
           <a:lstStyle/>
           <a:p>
             <a:r>
-              <a:t>Al final del mes la app genera el reporte en PDF, cierra el mes y lo guarda en el historial. Si no hay memoria para el modelo, se registra a mano. Los datos se exportan a un ZIP con CSV para revisarlos en una PC.</a:t>
+              <a:t>Cronograma al corte de hoy, semana 12. Análisis, diseño, el front-end de las 20 pantallas y la base de datos están completos. El reporte PDF y la exportación se adelantaron. Siguen en curso el ajuste fino del modelo y su integración en el teléfono, y empezaron las pruebas.</a:t>
             </a:r>
           </a:p>
         </p:txBody>
@@ -877,7 +669,7 @@
             <a:spLocks noGrp="1"/>
           </p:cNvSpPr>
           <p:nvPr>
-            <p:ph type="sldNum" idx="5" sz="quarter"/>
+            <p:ph type="sldNum" sz="quarter" idx="5"/>
           </p:nvPr>
         </p:nvSpPr>
         <p:spPr/>
@@ -890,8 +682,8 @@
 </p:notes>
 </file>
 
-<file path=ppt/notesSlides/notesSlide2.xml><?xml version="1.0" encoding="utf-8"?>
-<p:notes xmlns:a="http://schemas.openxmlformats.org/drawingml/2006/main" xmlns:p="http://schemas.openxmlformats.org/presentationml/2006/main" xmlns:r="http://schemas.openxmlformats.org/officeDocument/2006/relationships">
+<file path=ppt/notesSlides/notesSlide4.xml><?xml version="1.0" encoding="utf-8"?>
+<p:notes xmlns:a="http://schemas.openxmlformats.org/drawingml/2006/main" xmlns:r="http://schemas.openxmlformats.org/officeDocument/2006/relationships" xmlns:p="http://schemas.openxmlformats.org/presentationml/2006/main">
   <p:cSld>
     <p:spTree>
       <p:nvGrpSpPr>
@@ -911,7 +703,7 @@
         <p:nvSpPr>
           <p:cNvPr id="2" name="Slide Image Placeholder 1"/>
           <p:cNvSpPr>
-            <a:spLocks noGrp="1"/>
+            <a:spLocks noGrp="1" noRot="1" noChangeAspect="1"/>
           </p:cNvSpPr>
           <p:nvPr>
             <p:ph type="sldImg" idx="2"/>
@@ -926,7 +718,7 @@
             <a:spLocks noGrp="1"/>
           </p:cNvSpPr>
           <p:nvPr>
-            <p:ph type="body" idx="3" sz="quarter"/>
+            <p:ph type="body" sz="quarter" idx="3"/>
           </p:nvPr>
         </p:nvSpPr>
         <p:spPr/>
@@ -935,7 +727,7 @@
           <a:lstStyle/>
           <a:p>
             <a:r>
-              <a:t>Acta del proyecto en su versión básica. El objetivo es el que pidió el docente y coincide con el título. El alcance cubre desde la captura de la factura hasta el reporte y la exportación; la declaración ante la SUNAT queda fuera. El entrenamiento del modelo se hace en una PC del equipo y la app corre sin servidor.</a:t>
+              <a:t>El proceso propuesto cubre el ciclo completo del mes: la factura se registra al recibirla, la app acumula el total, determina la categoría y la cuota y avisa el vencimiento; al cierre, el titular comparte el reporte con su contador.</a:t>
             </a:r>
           </a:p>
         </p:txBody>
@@ -947,7 +739,7 @@
             <a:spLocks noGrp="1"/>
           </p:cNvSpPr>
           <p:nvPr>
-            <p:ph type="sldNum" idx="5" sz="quarter"/>
+            <p:ph type="sldNum" sz="quarter" idx="5"/>
           </p:nvPr>
         </p:nvSpPr>
         <p:spPr/>
@@ -960,8 +752,8 @@
 </p:notes>
 </file>
 
-<file path=ppt/notesSlides/notesSlide3.xml><?xml version="1.0" encoding="utf-8"?>
-<p:notes xmlns:a="http://schemas.openxmlformats.org/drawingml/2006/main" xmlns:p="http://schemas.openxmlformats.org/presentationml/2006/main" xmlns:r="http://schemas.openxmlformats.org/officeDocument/2006/relationships">
+<file path=ppt/notesSlides/notesSlide5.xml><?xml version="1.0" encoding="utf-8"?>
+<p:notes xmlns:a="http://schemas.openxmlformats.org/drawingml/2006/main" xmlns:r="http://schemas.openxmlformats.org/officeDocument/2006/relationships" xmlns:p="http://schemas.openxmlformats.org/presentationml/2006/main">
   <p:cSld>
     <p:spTree>
       <p:nvGrpSpPr>
@@ -981,7 +773,7 @@
         <p:nvSpPr>
           <p:cNvPr id="2" name="Slide Image Placeholder 1"/>
           <p:cNvSpPr>
-            <a:spLocks noGrp="1"/>
+            <a:spLocks noGrp="1" noRot="1" noChangeAspect="1"/>
           </p:cNvSpPr>
           <p:nvPr>
             <p:ph type="sldImg" idx="2"/>
@@ -996,7 +788,7 @@
             <a:spLocks noGrp="1"/>
           </p:cNvSpPr>
           <p:nvPr>
-            <p:ph type="body" idx="3" sz="quarter"/>
+            <p:ph type="body" sz="quarter" idx="3"/>
           </p:nvPr>
         </p:nvSpPr>
         <p:spPr/>
@@ -1005,7 +797,7 @@
           <a:lstStyle/>
           <a:p>
             <a:r>
-              <a:t>Cronograma al corte de hoy, semana 12. Análisis, diseño, el front-end de las 20 pantallas y la base de datos están completos. El reporte PDF y la exportación se adelantaron. Siguen en curso el ajuste fino del modelo y su integración en el teléfono, y empezaron las pruebas.</a:t>
+              <a:t>Es el caso de uso principal. Tiene sus excepciones: foto ilegible, modelo no instalado o sin memoria (pasa al registro manual), campos de baja confianza y factura duplicada. Todo ocurre dentro del teléfono y el guardado es una sola transacción.</a:t>
             </a:r>
           </a:p>
         </p:txBody>
@@ -1017,7 +809,7 @@
             <a:spLocks noGrp="1"/>
           </p:cNvSpPr>
           <p:nvPr>
-            <p:ph type="sldNum" idx="5" sz="quarter"/>
+            <p:ph type="sldNum" sz="quarter" idx="5"/>
           </p:nvPr>
         </p:nvSpPr>
         <p:spPr/>
@@ -1030,8 +822,8 @@
 </p:notes>
 </file>
 
-<file path=ppt/notesSlides/notesSlide4.xml><?xml version="1.0" encoding="utf-8"?>
-<p:notes xmlns:a="http://schemas.openxmlformats.org/drawingml/2006/main" xmlns:p="http://schemas.openxmlformats.org/presentationml/2006/main" xmlns:r="http://schemas.openxmlformats.org/officeDocument/2006/relationships">
+<file path=ppt/notesSlides/notesSlide6.xml><?xml version="1.0" encoding="utf-8"?>
+<p:notes xmlns:a="http://schemas.openxmlformats.org/drawingml/2006/main" xmlns:r="http://schemas.openxmlformats.org/officeDocument/2006/relationships" xmlns:p="http://schemas.openxmlformats.org/presentationml/2006/main">
   <p:cSld>
     <p:spTree>
       <p:nvGrpSpPr>
@@ -1051,7 +843,7 @@
         <p:nvSpPr>
           <p:cNvPr id="2" name="Slide Image Placeholder 1"/>
           <p:cNvSpPr>
-            <a:spLocks noGrp="1"/>
+            <a:spLocks noGrp="1" noRot="1" noChangeAspect="1"/>
           </p:cNvSpPr>
           <p:nvPr>
             <p:ph type="sldImg" idx="2"/>
@@ -1066,7 +858,7 @@
             <a:spLocks noGrp="1"/>
           </p:cNvSpPr>
           <p:nvPr>
-            <p:ph type="body" idx="3" sz="quarter"/>
+            <p:ph type="body" sz="quarter" idx="3"/>
           </p:nvPr>
         </p:nvSpPr>
         <p:spPr/>
@@ -1075,7 +867,7 @@
           <a:lstStyle/>
           <a:p>
             <a:r>
-              <a:t>El proceso propuesto cubre el ciclo completo del mes: la factura se registra al recibirla, la app acumula el total, determina la categoría y la cuota y avisa el vencimiento; al cierre, el titular comparte el reporte con su contador.</a:t>
+              <a:t>Modelo lógico: 13 entidades en tercera forma normal con sus claves y relaciones. El centro es el periodo (mes), que contiene las facturas y tiene una determinación con la categoría vigente. Los parámetros del NRUS están en tablas versionadas, no en el código.</a:t>
             </a:r>
           </a:p>
         </p:txBody>
@@ -1087,7 +879,7 @@
             <a:spLocks noGrp="1"/>
           </p:cNvSpPr>
           <p:nvPr>
-            <p:ph type="sldNum" idx="5" sz="quarter"/>
+            <p:ph type="sldNum" sz="quarter" idx="5"/>
           </p:nvPr>
         </p:nvSpPr>
         <p:spPr/>
@@ -1100,8 +892,8 @@
 </p:notes>
 </file>
 
-<file path=ppt/notesSlides/notesSlide5.xml><?xml version="1.0" encoding="utf-8"?>
-<p:notes xmlns:a="http://schemas.openxmlformats.org/drawingml/2006/main" xmlns:p="http://schemas.openxmlformats.org/presentationml/2006/main" xmlns:r="http://schemas.openxmlformats.org/officeDocument/2006/relationships">
+<file path=ppt/notesSlides/notesSlide7.xml><?xml version="1.0" encoding="utf-8"?>
+<p:notes xmlns:a="http://schemas.openxmlformats.org/drawingml/2006/main" xmlns:r="http://schemas.openxmlformats.org/officeDocument/2006/relationships" xmlns:p="http://schemas.openxmlformats.org/presentationml/2006/main">
   <p:cSld>
     <p:spTree>
       <p:nvGrpSpPr>
@@ -1121,7 +913,7 @@
         <p:nvSpPr>
           <p:cNvPr id="2" name="Slide Image Placeholder 1"/>
           <p:cNvSpPr>
-            <a:spLocks noGrp="1"/>
+            <a:spLocks noGrp="1" noRot="1" noChangeAspect="1"/>
           </p:cNvSpPr>
           <p:nvPr>
             <p:ph type="sldImg" idx="2"/>
@@ -1136,7 +928,7 @@
             <a:spLocks noGrp="1"/>
           </p:cNvSpPr>
           <p:nvPr>
-            <p:ph type="body" idx="3" sz="quarter"/>
+            <p:ph type="body" sz="quarter" idx="3"/>
           </p:nvPr>
         </p:nvSpPr>
         <p:spPr/>
@@ -1145,7 +937,7 @@
           <a:lstStyle/>
           <a:p>
             <a:r>
-              <a:t>Es el caso de uso principal. Tiene sus excepciones: foto ilegible, modelo no instalado o sin memoria (pasa al registro manual), campos de baja confianza y factura duplicada. Todo ocurre dentro del teléfono y el guardado es una sola transacción.</a:t>
+              <a:t>Modelo físico tal como lo crea Room en SQLite: tipos, NOT NULL, claves foráneas e índices. Los montos se guardan en céntimos como INTEGER para no perder precisión; en Java son BigDecimal. Las fotos no van en la base: se guarda la ruta del archivo cifrado.</a:t>
             </a:r>
           </a:p>
         </p:txBody>
@@ -1157,7 +949,7 @@
             <a:spLocks noGrp="1"/>
           </p:cNvSpPr>
           <p:nvPr>
-            <p:ph type="sldNum" idx="5" sz="quarter"/>
+            <p:ph type="sldNum" sz="quarter" idx="5"/>
           </p:nvPr>
         </p:nvSpPr>
         <p:spPr/>
@@ -1170,8 +962,8 @@
 </p:notes>
 </file>
 
-<file path=ppt/notesSlides/notesSlide6.xml><?xml version="1.0" encoding="utf-8"?>
-<p:notes xmlns:a="http://schemas.openxmlformats.org/drawingml/2006/main" xmlns:p="http://schemas.openxmlformats.org/presentationml/2006/main" xmlns:r="http://schemas.openxmlformats.org/officeDocument/2006/relationships">
+<file path=ppt/notesSlides/notesSlide8.xml><?xml version="1.0" encoding="utf-8"?>
+<p:notes xmlns:a="http://schemas.openxmlformats.org/drawingml/2006/main" xmlns:r="http://schemas.openxmlformats.org/officeDocument/2006/relationships" xmlns:p="http://schemas.openxmlformats.org/presentationml/2006/main">
   <p:cSld>
     <p:spTree>
       <p:nvGrpSpPr>
@@ -1191,7 +983,7 @@
         <p:nvSpPr>
           <p:cNvPr id="2" name="Slide Image Placeholder 1"/>
           <p:cNvSpPr>
-            <a:spLocks noGrp="1"/>
+            <a:spLocks noGrp="1" noRot="1" noChangeAspect="1"/>
           </p:cNvSpPr>
           <p:nvPr>
             <p:ph type="sldImg" idx="2"/>
@@ -1206,7 +998,7 @@
             <a:spLocks noGrp="1"/>
           </p:cNvSpPr>
           <p:nvPr>
-            <p:ph type="body" idx="3" sz="quarter"/>
+            <p:ph type="body" sz="quarter" idx="3"/>
           </p:nvPr>
         </p:nvSpPr>
         <p:spPr/>
@@ -1215,7 +1007,7 @@
           <a:lstStyle/>
           <a:p>
             <a:r>
-              <a:t>El cierre mensual cubre la parte del NRUS: ventas, categoría, cuota, avisos, vencimiento, reporte y cierre del mes. La publicación del modelo cubre cómo llega el modelo ajustado al teléfono: se evalúa contra el base, se convierte y la app lo descarga una sola vez y verifica su huella.</a:t>
+              <a:t>La segunda parte del modelo físico guarda los parámetros del NRUS versionados, el cronograma de vencimientos y el resultado de cada mes. Ahora mostramos la base real en DBeaver: el archivo del teléfono está cifrado y no se abre; la copia legible muestra las tablas con los datos.</a:t>
             </a:r>
           </a:p>
         </p:txBody>
@@ -1227,7 +1019,7 @@
             <a:spLocks noGrp="1"/>
           </p:cNvSpPr>
           <p:nvPr>
-            <p:ph type="sldNum" idx="5" sz="quarter"/>
+            <p:ph type="sldNum" sz="quarter" idx="5"/>
           </p:nvPr>
         </p:nvSpPr>
         <p:spPr/>
@@ -1240,8 +1032,8 @@
 </p:notes>
 </file>
 
-<file path=ppt/notesSlides/notesSlide7.xml><?xml version="1.0" encoding="utf-8"?>
-<p:notes xmlns:a="http://schemas.openxmlformats.org/drawingml/2006/main" xmlns:p="http://schemas.openxmlformats.org/presentationml/2006/main" xmlns:r="http://schemas.openxmlformats.org/officeDocument/2006/relationships">
+<file path=ppt/notesSlides/notesSlide9.xml><?xml version="1.0" encoding="utf-8"?>
+<p:notes xmlns:a="http://schemas.openxmlformats.org/drawingml/2006/main" xmlns:r="http://schemas.openxmlformats.org/officeDocument/2006/relationships" xmlns:p="http://schemas.openxmlformats.org/presentationml/2006/main">
   <p:cSld>
     <p:spTree>
       <p:nvGrpSpPr>
@@ -1261,7 +1053,7 @@
         <p:nvSpPr>
           <p:cNvPr id="2" name="Slide Image Placeholder 1"/>
           <p:cNvSpPr>
-            <a:spLocks noGrp="1"/>
+            <a:spLocks noGrp="1" noRot="1" noChangeAspect="1"/>
           </p:cNvSpPr>
           <p:nvPr>
             <p:ph type="sldImg" idx="2"/>
@@ -1276,7 +1068,7 @@
             <a:spLocks noGrp="1"/>
           </p:cNvSpPr>
           <p:nvPr>
-            <p:ph type="body" idx="3" sz="quarter"/>
+            <p:ph type="body" sz="quarter" idx="3"/>
           </p:nvPr>
         </p:nvSpPr>
         <p:spPr/>
@@ -1285,7 +1077,7 @@
           <a:lstStyle/>
           <a:p>
             <a:r>
-              <a:t>Esta matriz resume qué proceso cubre cada requerimiento. Los 22 funcionales y los 19 no funcionales quedan cubiertos. El acceso con PIN o huella y la anulación son transversales: no tienen diagrama propio y se ven en las pantallas P01, P02 y P12.</a:t>
+              <a:t>La app se configura con el RUC del negocio y un PIN, y se abre con PIN o huella. El modelo Gemma 4 se descarga una sola vez después de comprobar la memoria y el espacio; desde ahí lee sin internet.</a:t>
             </a:r>
           </a:p>
         </p:txBody>
@@ -1297,147 +1089,7 @@
             <a:spLocks noGrp="1"/>
           </p:cNvSpPr>
           <p:nvPr>
-            <p:ph type="sldNum" idx="5" sz="quarter"/>
-          </p:nvPr>
-        </p:nvSpPr>
-        <p:spPr/>
-      </p:sp>
-    </p:spTree>
-  </p:cSld>
-  <p:clrMapOvr>
-    <a:masterClrMapping/>
-  </p:clrMapOvr>
-</p:notes>
-</file>
-
-<file path=ppt/notesSlides/notesSlide8.xml><?xml version="1.0" encoding="utf-8"?>
-<p:notes xmlns:a="http://schemas.openxmlformats.org/drawingml/2006/main" xmlns:p="http://schemas.openxmlformats.org/presentationml/2006/main" xmlns:r="http://schemas.openxmlformats.org/officeDocument/2006/relationships">
-  <p:cSld>
-    <p:spTree>
-      <p:nvGrpSpPr>
-        <p:cNvPr id="1" name=""/>
-        <p:cNvGrpSpPr/>
-        <p:nvPr/>
-      </p:nvGrpSpPr>
-      <p:grpSpPr>
-        <a:xfrm>
-          <a:off x="0" y="0"/>
-          <a:ext cx="0" cy="0"/>
-          <a:chOff x="0" y="0"/>
-          <a:chExt cx="0" cy="0"/>
-        </a:xfrm>
-      </p:grpSpPr>
-      <p:sp>
-        <p:nvSpPr>
-          <p:cNvPr id="2" name="Slide Image Placeholder 1"/>
-          <p:cNvSpPr>
-            <a:spLocks noGrp="1"/>
-          </p:cNvSpPr>
-          <p:nvPr>
-            <p:ph type="sldImg" idx="2"/>
-          </p:nvPr>
-        </p:nvSpPr>
-        <p:spPr/>
-      </p:sp>
-      <p:sp>
-        <p:nvSpPr>
-          <p:cNvPr id="3" name="Notes Placeholder 2"/>
-          <p:cNvSpPr>
-            <a:spLocks noGrp="1"/>
-          </p:cNvSpPr>
-          <p:nvPr>
-            <p:ph type="body" idx="3" sz="quarter"/>
-          </p:nvPr>
-        </p:nvSpPr>
-        <p:spPr/>
-        <p:txBody>
-          <a:bodyPr/>
-          <a:lstStyle/>
-          <a:p>
-            <a:r>
-              <a:t>Modelo lógico: 13 entidades en tercera forma normal con sus claves y relaciones. El centro es el periodo (mes), que contiene las facturas y tiene una determinación con la categoría vigente. Los parámetros del NRUS están en tablas versionadas, no en el código.</a:t>
-            </a:r>
-          </a:p>
-        </p:txBody>
-      </p:sp>
-      <p:sp>
-        <p:nvSpPr>
-          <p:cNvPr id="4" name="Slide Number Placeholder 3"/>
-          <p:cNvSpPr>
-            <a:spLocks noGrp="1"/>
-          </p:cNvSpPr>
-          <p:nvPr>
-            <p:ph type="sldNum" idx="5" sz="quarter"/>
-          </p:nvPr>
-        </p:nvSpPr>
-        <p:spPr/>
-      </p:sp>
-    </p:spTree>
-  </p:cSld>
-  <p:clrMapOvr>
-    <a:masterClrMapping/>
-  </p:clrMapOvr>
-</p:notes>
-</file>
-
-<file path=ppt/notesSlides/notesSlide9.xml><?xml version="1.0" encoding="utf-8"?>
-<p:notes xmlns:a="http://schemas.openxmlformats.org/drawingml/2006/main" xmlns:p="http://schemas.openxmlformats.org/presentationml/2006/main" xmlns:r="http://schemas.openxmlformats.org/officeDocument/2006/relationships">
-  <p:cSld>
-    <p:spTree>
-      <p:nvGrpSpPr>
-        <p:cNvPr id="1" name=""/>
-        <p:cNvGrpSpPr/>
-        <p:nvPr/>
-      </p:nvGrpSpPr>
-      <p:grpSpPr>
-        <a:xfrm>
-          <a:off x="0" y="0"/>
-          <a:ext cx="0" cy="0"/>
-          <a:chOff x="0" y="0"/>
-          <a:chExt cx="0" cy="0"/>
-        </a:xfrm>
-      </p:grpSpPr>
-      <p:sp>
-        <p:nvSpPr>
-          <p:cNvPr id="2" name="Slide Image Placeholder 1"/>
-          <p:cNvSpPr>
-            <a:spLocks noGrp="1"/>
-          </p:cNvSpPr>
-          <p:nvPr>
-            <p:ph type="sldImg" idx="2"/>
-          </p:nvPr>
-        </p:nvSpPr>
-        <p:spPr/>
-      </p:sp>
-      <p:sp>
-        <p:nvSpPr>
-          <p:cNvPr id="3" name="Notes Placeholder 2"/>
-          <p:cNvSpPr>
-            <a:spLocks noGrp="1"/>
-          </p:cNvSpPr>
-          <p:nvPr>
-            <p:ph type="body" idx="3" sz="quarter"/>
-          </p:nvPr>
-        </p:nvSpPr>
-        <p:spPr/>
-        <p:txBody>
-          <a:bodyPr/>
-          <a:lstStyle/>
-          <a:p>
-            <a:r>
-              <a:t>Modelo físico tal como lo crea Room en SQLite: tipos, NOT NULL, claves foráneas e índices. Los montos se guardan en céntimos como INTEGER para no perder precisión; en Java son BigDecimal. Las fotos no van en la base: se guarda la ruta del archivo cifrado.</a:t>
-            </a:r>
-          </a:p>
-        </p:txBody>
-      </p:sp>
-      <p:sp>
-        <p:nvSpPr>
-          <p:cNvPr id="4" name="Slide Number Placeholder 3"/>
-          <p:cNvSpPr>
-            <a:spLocks noGrp="1"/>
-          </p:cNvSpPr>
-          <p:nvPr>
-            <p:ph type="sldNum" idx="5" sz="quarter"/>
+            <p:ph type="sldNum" sz="quarter" idx="5"/>
           </p:nvPr>
         </p:nvSpPr>
         <p:spPr/>
@@ -1488,10 +1140,9 @@
           <a:lstStyle/>
           <a:p>
             <a:r>
-              <a:rPr lang="en-US" smtClean="0"/>
+              <a:rPr lang="en-US"/>
               <a:t>Click to edit Master title style</a:t>
             </a:r>
-            <a:endParaRPr lang="en-US"/>
           </a:p>
         </p:txBody>
       </p:sp>
@@ -1607,10 +1258,9 @@
           </a:lstStyle>
           <a:p>
             <a:r>
-              <a:rPr lang="en-US" smtClean="0"/>
+              <a:rPr lang="en-US"/>
               <a:t>Click to edit Master subtitle style</a:t>
             </a:r>
-            <a:endParaRPr lang="en-US"/>
           </a:p>
         </p:txBody>
       </p:sp>
@@ -1631,7 +1281,7 @@
           <a:p>
             <a:fld id="{5BCAD085-E8A6-8845-BD4E-CB4CCA059FC4}" type="datetimeFigureOut">
               <a:rPr lang="en-US" smtClean="0"/>
-              <a:t>1/27/13</a:t>
+              <a:t>10/27/2026</a:t>
             </a:fld>
             <a:endParaRPr lang="en-US"/>
           </a:p>
@@ -1673,7 +1323,7 @@
           <a:p>
             <a:fld id="{C1FF6DA9-008F-8B48-92A6-B652298478BF}" type="slidenum">
               <a:rPr lang="en-US" smtClean="0"/>
-              <a:t>‹#›</a:t>
+              <a:t>‹Nº›</a:t>
             </a:fld>
             <a:endParaRPr lang="en-US"/>
           </a:p>
@@ -1725,10 +1375,9 @@
           <a:lstStyle/>
           <a:p>
             <a:r>
-              <a:rPr lang="en-US" smtClean="0"/>
+              <a:rPr lang="en-US"/>
               <a:t>Click to edit Master title style</a:t>
             </a:r>
-            <a:endParaRPr lang="en-US"/>
           </a:p>
         </p:txBody>
       </p:sp>
@@ -1749,38 +1398,37 @@
           <a:p>
             <a:pPr lvl="0"/>
             <a:r>
-              <a:rPr lang="en-US" smtClean="0"/>
+              <a:rPr lang="en-US"/>
               <a:t>Click to edit Master text styles</a:t>
             </a:r>
           </a:p>
           <a:p>
             <a:pPr lvl="1"/>
             <a:r>
-              <a:rPr lang="en-US" smtClean="0"/>
+              <a:rPr lang="en-US"/>
               <a:t>Second level</a:t>
             </a:r>
           </a:p>
           <a:p>
             <a:pPr lvl="2"/>
             <a:r>
-              <a:rPr lang="en-US" smtClean="0"/>
+              <a:rPr lang="en-US"/>
               <a:t>Third level</a:t>
             </a:r>
           </a:p>
           <a:p>
             <a:pPr lvl="3"/>
             <a:r>
-              <a:rPr lang="en-US" smtClean="0"/>
+              <a:rPr lang="en-US"/>
               <a:t>Fourth level</a:t>
             </a:r>
           </a:p>
           <a:p>
             <a:pPr lvl="4"/>
             <a:r>
-              <a:rPr lang="en-US" smtClean="0"/>
+              <a:rPr lang="en-US"/>
               <a:t>Fifth level</a:t>
             </a:r>
-            <a:endParaRPr lang="en-US"/>
           </a:p>
         </p:txBody>
       </p:sp>
@@ -1801,7 +1449,7 @@
           <a:p>
             <a:fld id="{5BCAD085-E8A6-8845-BD4E-CB4CCA059FC4}" type="datetimeFigureOut">
               <a:rPr lang="en-US" smtClean="0"/>
-              <a:t>1/27/13</a:t>
+              <a:t>10/27/2026</a:t>
             </a:fld>
             <a:endParaRPr lang="en-US"/>
           </a:p>
@@ -1843,7 +1491,7 @@
           <a:p>
             <a:fld id="{C1FF6DA9-008F-8B48-92A6-B652298478BF}" type="slidenum">
               <a:rPr lang="en-US" smtClean="0"/>
-              <a:t>‹#›</a:t>
+              <a:t>‹Nº›</a:t>
             </a:fld>
             <a:endParaRPr lang="en-US"/>
           </a:p>
@@ -1900,10 +1548,9 @@
           <a:lstStyle/>
           <a:p>
             <a:r>
-              <a:rPr lang="en-US" smtClean="0"/>
+              <a:rPr lang="en-US"/>
               <a:t>Click to edit Master title style</a:t>
             </a:r>
-            <a:endParaRPr lang="en-US"/>
           </a:p>
         </p:txBody>
       </p:sp>
@@ -1929,38 +1576,37 @@
           <a:p>
             <a:pPr lvl="0"/>
             <a:r>
-              <a:rPr lang="en-US" smtClean="0"/>
+              <a:rPr lang="en-US"/>
               <a:t>Click to edit Master text styles</a:t>
             </a:r>
           </a:p>
           <a:p>
             <a:pPr lvl="1"/>
             <a:r>
-              <a:rPr lang="en-US" smtClean="0"/>
+              <a:rPr lang="en-US"/>
               <a:t>Second level</a:t>
             </a:r>
           </a:p>
           <a:p>
             <a:pPr lvl="2"/>
             <a:r>
-              <a:rPr lang="en-US" smtClean="0"/>
+              <a:rPr lang="en-US"/>
               <a:t>Third level</a:t>
             </a:r>
           </a:p>
           <a:p>
             <a:pPr lvl="3"/>
             <a:r>
-              <a:rPr lang="en-US" smtClean="0"/>
+              <a:rPr lang="en-US"/>
               <a:t>Fourth level</a:t>
             </a:r>
           </a:p>
           <a:p>
             <a:pPr lvl="4"/>
             <a:r>
-              <a:rPr lang="en-US" smtClean="0"/>
+              <a:rPr lang="en-US"/>
               <a:t>Fifth level</a:t>
             </a:r>
-            <a:endParaRPr lang="en-US"/>
           </a:p>
         </p:txBody>
       </p:sp>
@@ -1981,7 +1627,7 @@
           <a:p>
             <a:fld id="{5BCAD085-E8A6-8845-BD4E-CB4CCA059FC4}" type="datetimeFigureOut">
               <a:rPr lang="en-US" smtClean="0"/>
-              <a:t>1/27/13</a:t>
+              <a:t>10/27/2026</a:t>
             </a:fld>
             <a:endParaRPr lang="en-US"/>
           </a:p>
@@ -2023,7 +1669,7 @@
           <a:p>
             <a:fld id="{C1FF6DA9-008F-8B48-92A6-B652298478BF}" type="slidenum">
               <a:rPr lang="en-US" smtClean="0"/>
-              <a:t>‹#›</a:t>
+              <a:t>‹Nº›</a:t>
             </a:fld>
             <a:endParaRPr lang="en-US"/>
           </a:p>
@@ -2075,10 +1721,9 @@
           <a:lstStyle/>
           <a:p>
             <a:r>
-              <a:rPr lang="en-US" smtClean="0"/>
+              <a:rPr lang="en-US"/>
               <a:t>Click to edit Master title style</a:t>
             </a:r>
-            <a:endParaRPr lang="en-US"/>
           </a:p>
         </p:txBody>
       </p:sp>
@@ -2099,38 +1744,37 @@
           <a:p>
             <a:pPr lvl="0"/>
             <a:r>
-              <a:rPr lang="en-US" smtClean="0"/>
+              <a:rPr lang="en-US"/>
               <a:t>Click to edit Master text styles</a:t>
             </a:r>
           </a:p>
           <a:p>
             <a:pPr lvl="1"/>
             <a:r>
-              <a:rPr lang="en-US" smtClean="0"/>
+              <a:rPr lang="en-US"/>
               <a:t>Second level</a:t>
             </a:r>
           </a:p>
           <a:p>
             <a:pPr lvl="2"/>
             <a:r>
-              <a:rPr lang="en-US" smtClean="0"/>
+              <a:rPr lang="en-US"/>
               <a:t>Third level</a:t>
             </a:r>
           </a:p>
           <a:p>
             <a:pPr lvl="3"/>
             <a:r>
-              <a:rPr lang="en-US" smtClean="0"/>
+              <a:rPr lang="en-US"/>
               <a:t>Fourth level</a:t>
             </a:r>
           </a:p>
           <a:p>
             <a:pPr lvl="4"/>
             <a:r>
-              <a:rPr lang="en-US" smtClean="0"/>
+              <a:rPr lang="en-US"/>
               <a:t>Fifth level</a:t>
             </a:r>
-            <a:endParaRPr lang="en-US"/>
           </a:p>
         </p:txBody>
       </p:sp>
@@ -2151,7 +1795,7 @@
           <a:p>
             <a:fld id="{5BCAD085-E8A6-8845-BD4E-CB4CCA059FC4}" type="datetimeFigureOut">
               <a:rPr lang="en-US" smtClean="0"/>
-              <a:t>1/27/13</a:t>
+              <a:t>10/27/2026</a:t>
             </a:fld>
             <a:endParaRPr lang="en-US"/>
           </a:p>
@@ -2193,7 +1837,7 @@
           <a:p>
             <a:fld id="{C1FF6DA9-008F-8B48-92A6-B652298478BF}" type="slidenum">
               <a:rPr lang="en-US" smtClean="0"/>
-              <a:t>‹#›</a:t>
+              <a:t>‹Nº›</a:t>
             </a:fld>
             <a:endParaRPr lang="en-US"/>
           </a:p>
@@ -2254,10 +1898,9 @@
           </a:lstStyle>
           <a:p>
             <a:r>
-              <a:rPr lang="en-US" smtClean="0"/>
+              <a:rPr lang="en-US"/>
               <a:t>Click to edit Master title style</a:t>
             </a:r>
-            <a:endParaRPr lang="en-US"/>
           </a:p>
         </p:txBody>
       </p:sp>
@@ -2374,7 +2017,7 @@
           <a:p>
             <a:pPr lvl="0"/>
             <a:r>
-              <a:rPr lang="en-US" smtClean="0"/>
+              <a:rPr lang="en-US"/>
               <a:t>Click to edit Master text styles</a:t>
             </a:r>
           </a:p>
@@ -2397,7 +2040,7 @@
           <a:p>
             <a:fld id="{5BCAD085-E8A6-8845-BD4E-CB4CCA059FC4}" type="datetimeFigureOut">
               <a:rPr lang="en-US" smtClean="0"/>
-              <a:t>1/27/13</a:t>
+              <a:t>10/27/2026</a:t>
             </a:fld>
             <a:endParaRPr lang="en-US"/>
           </a:p>
@@ -2439,7 +2082,7 @@
           <a:p>
             <a:fld id="{C1FF6DA9-008F-8B48-92A6-B652298478BF}" type="slidenum">
               <a:rPr lang="en-US" smtClean="0"/>
-              <a:t>‹#›</a:t>
+              <a:t>‹Nº›</a:t>
             </a:fld>
             <a:endParaRPr lang="en-US"/>
           </a:p>
@@ -2491,10 +2134,9 @@
           <a:lstStyle/>
           <a:p>
             <a:r>
-              <a:rPr lang="en-US" smtClean="0"/>
+              <a:rPr lang="en-US"/>
               <a:t>Click to edit Master title style</a:t>
             </a:r>
-            <a:endParaRPr lang="en-US"/>
           </a:p>
         </p:txBody>
       </p:sp>
@@ -2548,38 +2190,37 @@
           <a:p>
             <a:pPr lvl="0"/>
             <a:r>
-              <a:rPr lang="en-US" smtClean="0"/>
+              <a:rPr lang="en-US"/>
               <a:t>Click to edit Master text styles</a:t>
             </a:r>
           </a:p>
           <a:p>
             <a:pPr lvl="1"/>
             <a:r>
-              <a:rPr lang="en-US" smtClean="0"/>
+              <a:rPr lang="en-US"/>
               <a:t>Second level</a:t>
             </a:r>
           </a:p>
           <a:p>
             <a:pPr lvl="2"/>
             <a:r>
-              <a:rPr lang="en-US" smtClean="0"/>
+              <a:rPr lang="en-US"/>
               <a:t>Third level</a:t>
             </a:r>
           </a:p>
           <a:p>
             <a:pPr lvl="3"/>
             <a:r>
-              <a:rPr lang="en-US" smtClean="0"/>
+              <a:rPr lang="en-US"/>
               <a:t>Fourth level</a:t>
             </a:r>
           </a:p>
           <a:p>
             <a:pPr lvl="4"/>
             <a:r>
-              <a:rPr lang="en-US" smtClean="0"/>
+              <a:rPr lang="en-US"/>
               <a:t>Fifth level</a:t>
             </a:r>
-            <a:endParaRPr lang="en-US"/>
           </a:p>
         </p:txBody>
       </p:sp>
@@ -2633,38 +2274,37 @@
           <a:p>
             <a:pPr lvl="0"/>
             <a:r>
-              <a:rPr lang="en-US" smtClean="0"/>
+              <a:rPr lang="en-US"/>
               <a:t>Click to edit Master text styles</a:t>
             </a:r>
           </a:p>
           <a:p>
             <a:pPr lvl="1"/>
             <a:r>
-              <a:rPr lang="en-US" smtClean="0"/>
+              <a:rPr lang="en-US"/>
               <a:t>Second level</a:t>
             </a:r>
           </a:p>
           <a:p>
             <a:pPr lvl="2"/>
             <a:r>
-              <a:rPr lang="en-US" smtClean="0"/>
+              <a:rPr lang="en-US"/>
               <a:t>Third level</a:t>
             </a:r>
           </a:p>
           <a:p>
             <a:pPr lvl="3"/>
             <a:r>
-              <a:rPr lang="en-US" smtClean="0"/>
+              <a:rPr lang="en-US"/>
               <a:t>Fourth level</a:t>
             </a:r>
           </a:p>
           <a:p>
             <a:pPr lvl="4"/>
             <a:r>
-              <a:rPr lang="en-US" smtClean="0"/>
+              <a:rPr lang="en-US"/>
               <a:t>Fifth level</a:t>
             </a:r>
-            <a:endParaRPr lang="en-US"/>
           </a:p>
         </p:txBody>
       </p:sp>
@@ -2685,7 +2325,7 @@
           <a:p>
             <a:fld id="{5BCAD085-E8A6-8845-BD4E-CB4CCA059FC4}" type="datetimeFigureOut">
               <a:rPr lang="en-US" smtClean="0"/>
-              <a:t>1/27/13</a:t>
+              <a:t>10/27/2026</a:t>
             </a:fld>
             <a:endParaRPr lang="en-US"/>
           </a:p>
@@ -2727,7 +2367,7 @@
           <a:p>
             <a:fld id="{C1FF6DA9-008F-8B48-92A6-B652298478BF}" type="slidenum">
               <a:rPr lang="en-US" smtClean="0"/>
-              <a:t>‹#›</a:t>
+              <a:t>‹Nº›</a:t>
             </a:fld>
             <a:endParaRPr lang="en-US"/>
           </a:p>
@@ -2783,10 +2423,9 @@
           </a:lstStyle>
           <a:p>
             <a:r>
-              <a:rPr lang="en-US" smtClean="0"/>
+              <a:rPr lang="en-US"/>
               <a:t>Click to edit Master title style</a:t>
             </a:r>
-            <a:endParaRPr lang="en-US"/>
           </a:p>
         </p:txBody>
       </p:sp>
@@ -2849,7 +2488,7 @@
           <a:p>
             <a:pPr lvl="0"/>
             <a:r>
-              <a:rPr lang="en-US" smtClean="0"/>
+              <a:rPr lang="en-US"/>
               <a:t>Click to edit Master text styles</a:t>
             </a:r>
           </a:p>
@@ -2905,38 +2544,37 @@
           <a:p>
             <a:pPr lvl="0"/>
             <a:r>
-              <a:rPr lang="en-US" smtClean="0"/>
+              <a:rPr lang="en-US"/>
               <a:t>Click to edit Master text styles</a:t>
             </a:r>
           </a:p>
           <a:p>
             <a:pPr lvl="1"/>
             <a:r>
-              <a:rPr lang="en-US" smtClean="0"/>
+              <a:rPr lang="en-US"/>
               <a:t>Second level</a:t>
             </a:r>
           </a:p>
           <a:p>
             <a:pPr lvl="2"/>
             <a:r>
-              <a:rPr lang="en-US" smtClean="0"/>
+              <a:rPr lang="en-US"/>
               <a:t>Third level</a:t>
             </a:r>
           </a:p>
           <a:p>
             <a:pPr lvl="3"/>
             <a:r>
-              <a:rPr lang="en-US" smtClean="0"/>
+              <a:rPr lang="en-US"/>
               <a:t>Fourth level</a:t>
             </a:r>
           </a:p>
           <a:p>
             <a:pPr lvl="4"/>
             <a:r>
-              <a:rPr lang="en-US" smtClean="0"/>
+              <a:rPr lang="en-US"/>
               <a:t>Fifth level</a:t>
             </a:r>
-            <a:endParaRPr lang="en-US"/>
           </a:p>
         </p:txBody>
       </p:sp>
@@ -2999,7 +2637,7 @@
           <a:p>
             <a:pPr lvl="0"/>
             <a:r>
-              <a:rPr lang="en-US" smtClean="0"/>
+              <a:rPr lang="en-US"/>
               <a:t>Click to edit Master text styles</a:t>
             </a:r>
           </a:p>
@@ -3055,38 +2693,37 @@
           <a:p>
             <a:pPr lvl="0"/>
             <a:r>
-              <a:rPr lang="en-US" smtClean="0"/>
+              <a:rPr lang="en-US"/>
               <a:t>Click to edit Master text styles</a:t>
             </a:r>
           </a:p>
           <a:p>
             <a:pPr lvl="1"/>
             <a:r>
-              <a:rPr lang="en-US" smtClean="0"/>
+              <a:rPr lang="en-US"/>
               <a:t>Second level</a:t>
             </a:r>
           </a:p>
           <a:p>
             <a:pPr lvl="2"/>
             <a:r>
-              <a:rPr lang="en-US" smtClean="0"/>
+              <a:rPr lang="en-US"/>
               <a:t>Third level</a:t>
             </a:r>
           </a:p>
           <a:p>
             <a:pPr lvl="3"/>
             <a:r>
-              <a:rPr lang="en-US" smtClean="0"/>
+              <a:rPr lang="en-US"/>
               <a:t>Fourth level</a:t>
             </a:r>
           </a:p>
           <a:p>
             <a:pPr lvl="4"/>
             <a:r>
-              <a:rPr lang="en-US" smtClean="0"/>
+              <a:rPr lang="en-US"/>
               <a:t>Fifth level</a:t>
             </a:r>
-            <a:endParaRPr lang="en-US"/>
           </a:p>
         </p:txBody>
       </p:sp>
@@ -3107,7 +2744,7 @@
           <a:p>
             <a:fld id="{5BCAD085-E8A6-8845-BD4E-CB4CCA059FC4}" type="datetimeFigureOut">
               <a:rPr lang="en-US" smtClean="0"/>
-              <a:t>1/27/13</a:t>
+              <a:t>10/27/2026</a:t>
             </a:fld>
             <a:endParaRPr lang="en-US"/>
           </a:p>
@@ -3149,7 +2786,7 @@
           <a:p>
             <a:fld id="{C1FF6DA9-008F-8B48-92A6-B652298478BF}" type="slidenum">
               <a:rPr lang="en-US" smtClean="0"/>
-              <a:t>‹#›</a:t>
+              <a:t>‹Nº›</a:t>
             </a:fld>
             <a:endParaRPr lang="en-US"/>
           </a:p>
@@ -3201,10 +2838,9 @@
           <a:lstStyle/>
           <a:p>
             <a:r>
-              <a:rPr lang="en-US" smtClean="0"/>
+              <a:rPr lang="en-US"/>
               <a:t>Click to edit Master title style</a:t>
             </a:r>
-            <a:endParaRPr lang="en-US"/>
           </a:p>
         </p:txBody>
       </p:sp>
@@ -3225,7 +2861,7 @@
           <a:p>
             <a:fld id="{5BCAD085-E8A6-8845-BD4E-CB4CCA059FC4}" type="datetimeFigureOut">
               <a:rPr lang="en-US" smtClean="0"/>
-              <a:t>1/27/13</a:t>
+              <a:t>10/27/2026</a:t>
             </a:fld>
             <a:endParaRPr lang="en-US"/>
           </a:p>
@@ -3267,7 +2903,7 @@
           <a:p>
             <a:fld id="{C1FF6DA9-008F-8B48-92A6-B652298478BF}" type="slidenum">
               <a:rPr lang="en-US" smtClean="0"/>
-              <a:t>‹#›</a:t>
+              <a:t>‹Nº›</a:t>
             </a:fld>
             <a:endParaRPr lang="en-US"/>
           </a:p>
@@ -3320,7 +2956,7 @@
           <a:p>
             <a:fld id="{5BCAD085-E8A6-8845-BD4E-CB4CCA059FC4}" type="datetimeFigureOut">
               <a:rPr lang="en-US" smtClean="0"/>
-              <a:t>1/27/13</a:t>
+              <a:t>10/27/2026</a:t>
             </a:fld>
             <a:endParaRPr lang="en-US"/>
           </a:p>
@@ -3362,7 +2998,7 @@
           <a:p>
             <a:fld id="{C1FF6DA9-008F-8B48-92A6-B652298478BF}" type="slidenum">
               <a:rPr lang="en-US" smtClean="0"/>
-              <a:t>‹#›</a:t>
+              <a:t>‹Nº›</a:t>
             </a:fld>
             <a:endParaRPr lang="en-US"/>
           </a:p>
@@ -3423,10 +3059,9 @@
           </a:lstStyle>
           <a:p>
             <a:r>
-              <a:rPr lang="en-US" smtClean="0"/>
+              <a:rPr lang="en-US"/>
               <a:t>Click to edit Master title style</a:t>
             </a:r>
-            <a:endParaRPr lang="en-US"/>
           </a:p>
         </p:txBody>
       </p:sp>
@@ -3480,38 +3115,37 @@
           <a:p>
             <a:pPr lvl="0"/>
             <a:r>
-              <a:rPr lang="en-US" smtClean="0"/>
+              <a:rPr lang="en-US"/>
               <a:t>Click to edit Master text styles</a:t>
             </a:r>
           </a:p>
           <a:p>
             <a:pPr lvl="1"/>
             <a:r>
-              <a:rPr lang="en-US" smtClean="0"/>
+              <a:rPr lang="en-US"/>
               <a:t>Second level</a:t>
             </a:r>
           </a:p>
           <a:p>
             <a:pPr lvl="2"/>
             <a:r>
-              <a:rPr lang="en-US" smtClean="0"/>
+              <a:rPr lang="en-US"/>
               <a:t>Third level</a:t>
             </a:r>
           </a:p>
           <a:p>
             <a:pPr lvl="3"/>
             <a:r>
-              <a:rPr lang="en-US" smtClean="0"/>
+              <a:rPr lang="en-US"/>
               <a:t>Fourth level</a:t>
             </a:r>
           </a:p>
           <a:p>
             <a:pPr lvl="4"/>
             <a:r>
-              <a:rPr lang="en-US" smtClean="0"/>
+              <a:rPr lang="en-US"/>
               <a:t>Fifth level</a:t>
             </a:r>
-            <a:endParaRPr lang="en-US"/>
           </a:p>
         </p:txBody>
       </p:sp>
@@ -3574,7 +3208,7 @@
           <a:p>
             <a:pPr lvl="0"/>
             <a:r>
-              <a:rPr lang="en-US" smtClean="0"/>
+              <a:rPr lang="en-US"/>
               <a:t>Click to edit Master text styles</a:t>
             </a:r>
           </a:p>
@@ -3597,7 +3231,7 @@
           <a:p>
             <a:fld id="{5BCAD085-E8A6-8845-BD4E-CB4CCA059FC4}" type="datetimeFigureOut">
               <a:rPr lang="en-US" smtClean="0"/>
-              <a:t>1/27/13</a:t>
+              <a:t>10/27/2026</a:t>
             </a:fld>
             <a:endParaRPr lang="en-US"/>
           </a:p>
@@ -3639,7 +3273,7 @@
           <a:p>
             <a:fld id="{C1FF6DA9-008F-8B48-92A6-B652298478BF}" type="slidenum">
               <a:rPr lang="en-US" smtClean="0"/>
-              <a:t>‹#›</a:t>
+              <a:t>‹Nº›</a:t>
             </a:fld>
             <a:endParaRPr lang="en-US"/>
           </a:p>
@@ -3700,10 +3334,9 @@
           </a:lstStyle>
           <a:p>
             <a:r>
-              <a:rPr lang="en-US" smtClean="0"/>
+              <a:rPr lang="en-US"/>
               <a:t>Click to edit Master title style</a:t>
             </a:r>
-            <a:endParaRPr lang="en-US"/>
           </a:p>
         </p:txBody>
       </p:sp>
@@ -3827,7 +3460,7 @@
           <a:p>
             <a:pPr lvl="0"/>
             <a:r>
-              <a:rPr lang="en-US" smtClean="0"/>
+              <a:rPr lang="en-US"/>
               <a:t>Click to edit Master text styles</a:t>
             </a:r>
           </a:p>
@@ -3850,7 +3483,7 @@
           <a:p>
             <a:fld id="{5BCAD085-E8A6-8845-BD4E-CB4CCA059FC4}" type="datetimeFigureOut">
               <a:rPr lang="en-US" smtClean="0"/>
-              <a:t>1/27/13</a:t>
+              <a:t>10/27/2026</a:t>
             </a:fld>
             <a:endParaRPr lang="en-US"/>
           </a:p>
@@ -3892,7 +3525,7 @@
           <a:p>
             <a:fld id="{C1FF6DA9-008F-8B48-92A6-B652298478BF}" type="slidenum">
               <a:rPr lang="en-US" smtClean="0"/>
-              <a:t>‹#›</a:t>
+              <a:t>‹Nº›</a:t>
             </a:fld>
             <a:endParaRPr lang="en-US"/>
           </a:p>
@@ -3959,10 +3592,9 @@
           <a:lstStyle/>
           <a:p>
             <a:r>
-              <a:rPr lang="en-US" smtClean="0"/>
+              <a:rPr lang="en-US"/>
               <a:t>Click to edit Master title style</a:t>
             </a:r>
-            <a:endParaRPr lang="en-US"/>
           </a:p>
         </p:txBody>
       </p:sp>
@@ -3993,38 +3625,37 @@
           <a:p>
             <a:pPr lvl="0"/>
             <a:r>
-              <a:rPr lang="en-US" smtClean="0"/>
+              <a:rPr lang="en-US"/>
               <a:t>Click to edit Master text styles</a:t>
             </a:r>
           </a:p>
           <a:p>
             <a:pPr lvl="1"/>
             <a:r>
-              <a:rPr lang="en-US" smtClean="0"/>
+              <a:rPr lang="en-US"/>
               <a:t>Second level</a:t>
             </a:r>
           </a:p>
           <a:p>
             <a:pPr lvl="2"/>
             <a:r>
-              <a:rPr lang="en-US" smtClean="0"/>
+              <a:rPr lang="en-US"/>
               <a:t>Third level</a:t>
             </a:r>
           </a:p>
           <a:p>
             <a:pPr lvl="3"/>
             <a:r>
-              <a:rPr lang="en-US" smtClean="0"/>
+              <a:rPr lang="en-US"/>
               <a:t>Fourth level</a:t>
             </a:r>
           </a:p>
           <a:p>
             <a:pPr lvl="4"/>
             <a:r>
-              <a:rPr lang="en-US" smtClean="0"/>
+              <a:rPr lang="en-US"/>
               <a:t>Fifth level</a:t>
             </a:r>
-            <a:endParaRPr lang="en-US"/>
           </a:p>
         </p:txBody>
       </p:sp>
@@ -4063,7 +3694,7 @@
           <a:p>
             <a:fld id="{5BCAD085-E8A6-8845-BD4E-CB4CCA059FC4}" type="datetimeFigureOut">
               <a:rPr lang="en-US" smtClean="0"/>
-              <a:t>1/27/13</a:t>
+              <a:t>10/27/2026</a:t>
             </a:fld>
             <a:endParaRPr lang="en-US"/>
           </a:p>
@@ -4141,7 +3772,7 @@
           <a:p>
             <a:fld id="{C1FF6DA9-008F-8B48-92A6-B652298478BF}" type="slidenum">
               <a:rPr lang="en-US" smtClean="0"/>
-              <a:t>‹#›</a:t>
+              <a:t>‹Nº›</a:t>
             </a:fld>
             <a:endParaRPr lang="en-US"/>
           </a:p>
@@ -4422,7 +4053,7 @@
 </file>
 
 <file path=ppt/slides/slide1.xml><?xml version="1.0" encoding="utf-8"?>
-<p:sld xmlns:a="http://schemas.openxmlformats.org/drawingml/2006/main" xmlns:p="http://schemas.openxmlformats.org/presentationml/2006/main" xmlns:r="http://schemas.openxmlformats.org/officeDocument/2006/relationships">
+<p:sld xmlns:a="http://schemas.openxmlformats.org/drawingml/2006/main" xmlns:r="http://schemas.openxmlformats.org/officeDocument/2006/relationships" xmlns:p="http://schemas.openxmlformats.org/presentationml/2006/main">
   <p:cSld>
     <p:spTree>
       <p:nvGrpSpPr>
@@ -4430,7 +4061,14 @@
         <p:cNvGrpSpPr/>
         <p:nvPr/>
       </p:nvGrpSpPr>
-      <p:grpSpPr/>
+      <p:grpSpPr>
+        <a:xfrm>
+          <a:off x="0" y="0"/>
+          <a:ext cx="0" cy="0"/>
+          <a:chOff x="0" y="0"/>
+          <a:chExt cx="0" cy="0"/>
+        </a:xfrm>
+      </p:grpSpPr>
       <p:sp>
         <p:nvSpPr>
           <p:cNvPr id="2" name="Rectangle 1"/>
@@ -4472,6 +4110,7 @@
           <a:lstStyle/>
           <a:p>
             <a:pPr algn="ctr"/>
+            <a:endParaRPr/>
           </a:p>
         </p:txBody>
       </p:sp>
@@ -4516,6 +4155,7 @@
           <a:lstStyle/>
           <a:p>
             <a:pPr algn="ctr"/>
+            <a:endParaRPr/>
           </a:p>
         </p:txBody>
       </p:sp>
@@ -4528,7 +4168,7 @@
           <p:nvPr/>
         </p:nvPicPr>
         <p:blipFill>
-          <a:blip r:embed="rId2"/>
+          <a:blip r:embed="rId3"/>
           <a:stretch>
             <a:fillRect/>
           </a:stretch>
@@ -4560,7 +4200,7 @@
           <a:noFill/>
         </p:spPr>
         <p:txBody>
-          <a:bodyPr wrap="square" lIns="45720" rIns="45720" tIns="18288" bIns="18288" anchor="t">
+          <a:bodyPr wrap="square" lIns="45720" tIns="18288" rIns="45720" bIns="18288" anchor="t">
             <a:spAutoFit/>
           </a:bodyPr>
           <a:lstStyle/>
@@ -4595,7 +4235,7 @@
           <a:noFill/>
         </p:spPr>
         <p:txBody>
-          <a:bodyPr wrap="square" lIns="45720" rIns="45720" tIns="18288" bIns="18288" anchor="t">
+          <a:bodyPr wrap="square" lIns="45720" tIns="18288" rIns="45720" bIns="18288" anchor="t">
             <a:spAutoFit/>
           </a:bodyPr>
           <a:lstStyle/>
@@ -4654,6 +4294,7 @@
           <a:lstStyle/>
           <a:p>
             <a:pPr algn="ctr"/>
+            <a:endParaRPr/>
           </a:p>
         </p:txBody>
       </p:sp>
@@ -4674,7 +4315,7 @@
           <a:noFill/>
         </p:spPr>
         <p:txBody>
-          <a:bodyPr wrap="square" lIns="45720" rIns="45720" tIns="18288" bIns="18288" anchor="t">
+          <a:bodyPr wrap="square" lIns="45720" tIns="18288" rIns="45720" bIns="18288" anchor="t">
             <a:spAutoFit/>
           </a:bodyPr>
           <a:lstStyle/>
@@ -4709,7 +4350,7 @@
           <a:noFill/>
         </p:spPr>
         <p:txBody>
-          <a:bodyPr wrap="square" lIns="45720" rIns="45720" tIns="18288" bIns="18288" anchor="t">
+          <a:bodyPr wrap="square" lIns="45720" tIns="18288" rIns="45720" bIns="18288" anchor="t">
             <a:spAutoFit/>
           </a:bodyPr>
           <a:lstStyle/>
@@ -4744,7 +4385,7 @@
           <a:noFill/>
         </p:spPr>
         <p:txBody>
-          <a:bodyPr wrap="square" lIns="45720" rIns="45720" tIns="18288" bIns="18288" anchor="t">
+          <a:bodyPr wrap="square" lIns="45720" tIns="18288" rIns="45720" bIns="18288" anchor="t">
             <a:spAutoFit/>
           </a:bodyPr>
           <a:lstStyle/>
@@ -4815,7 +4456,7 @@
           <a:noFill/>
         </p:spPr>
         <p:txBody>
-          <a:bodyPr wrap="square" lIns="45720" rIns="45720" tIns="18288" bIns="18288" anchor="t">
+          <a:bodyPr wrap="square" lIns="45720" tIns="18288" rIns="45720" bIns="18288" anchor="t">
             <a:spAutoFit/>
           </a:bodyPr>
           <a:lstStyle/>
@@ -4842,7 +4483,7 @@
 </file>
 
 <file path=ppt/slides/slide10.xml><?xml version="1.0" encoding="utf-8"?>
-<p:sld xmlns:a="http://schemas.openxmlformats.org/drawingml/2006/main" xmlns:p="http://schemas.openxmlformats.org/presentationml/2006/main" xmlns:r="http://schemas.openxmlformats.org/officeDocument/2006/relationships">
+<p:sld xmlns:a="http://schemas.openxmlformats.org/drawingml/2006/main" xmlns:r="http://schemas.openxmlformats.org/officeDocument/2006/relationships" xmlns:p="http://schemas.openxmlformats.org/presentationml/2006/main">
   <p:cSld>
     <p:spTree>
       <p:nvGrpSpPr>
@@ -4850,7 +4491,14 @@
         <p:cNvGrpSpPr/>
         <p:nvPr/>
       </p:nvGrpSpPr>
-      <p:grpSpPr/>
+      <p:grpSpPr>
+        <a:xfrm>
+          <a:off x="0" y="0"/>
+          <a:ext cx="0" cy="0"/>
+          <a:chOff x="0" y="0"/>
+          <a:chExt cx="0" cy="0"/>
+        </a:xfrm>
+      </p:grpSpPr>
       <p:sp>
         <p:nvSpPr>
           <p:cNvPr id="2" name="TextBox 1"/>
@@ -4868,7 +4516,7 @@
           <a:noFill/>
         </p:spPr>
         <p:txBody>
-          <a:bodyPr wrap="square" lIns="45720" rIns="45720" tIns="18288" bIns="18288" anchor="t">
+          <a:bodyPr wrap="square" lIns="45720" tIns="18288" rIns="45720" bIns="18288" anchor="t">
             <a:spAutoFit/>
           </a:bodyPr>
           <a:lstStyle/>
@@ -4881,7 +4529,7 @@
                 </a:solidFill>
                 <a:latin typeface="Calibri"/>
               </a:rPr>
-              <a:t>BASE DE DATOS</a:t>
+              <a:t>LA APP EN EL TELÉFONO</a:t>
             </a:r>
           </a:p>
         </p:txBody>
@@ -4903,7 +4551,7 @@
           <a:noFill/>
         </p:spPr>
         <p:txBody>
-          <a:bodyPr wrap="square" lIns="45720" rIns="45720" tIns="18288" bIns="18288" anchor="t">
+          <a:bodyPr wrap="square" lIns="45720" tIns="18288" rIns="45720" bIns="18288" anchor="t">
             <a:spAutoFit/>
           </a:bodyPr>
           <a:lstStyle/>
@@ -4916,7 +4564,7 @@
                 </a:solidFill>
                 <a:latin typeface="Calibri"/>
               </a:rPr>
-              <a:t>Modelo físico (2/2): parámetros y determinación del NRUS</a:t>
+              <a:t>Registro de una factura con Gemma 4</a:t>
             </a:r>
           </a:p>
         </p:txBody>
@@ -4962,6 +4610,7 @@
           <a:lstStyle/>
           <a:p>
             <a:pPr algn="ctr"/>
+            <a:endParaRPr/>
           </a:p>
         </p:txBody>
       </p:sp>
@@ -4974,7 +4623,7 @@
           <p:nvPr/>
         </p:nvPicPr>
         <p:blipFill>
-          <a:blip r:embed="rId2"/>
+          <a:blip r:embed="rId3"/>
           <a:stretch>
             <a:fillRect/>
           </a:stretch>
@@ -5030,6 +4679,7 @@
           <a:lstStyle/>
           <a:p>
             <a:pPr algn="ctr"/>
+            <a:endParaRPr/>
           </a:p>
         </p:txBody>
       </p:sp>
@@ -5050,7 +4700,7 @@
           <a:noFill/>
         </p:spPr>
         <p:txBody>
-          <a:bodyPr wrap="square" lIns="45720" rIns="45720" tIns="18288" bIns="18288" anchor="ctr">
+          <a:bodyPr wrap="square" lIns="45720" tIns="18288" rIns="45720" bIns="18288" anchor="ctr">
             <a:spAutoFit/>
           </a:bodyPr>
           <a:lstStyle/>
@@ -5085,7 +4735,7 @@
           <a:noFill/>
         </p:spPr>
         <p:txBody>
-          <a:bodyPr wrap="square" lIns="45720" rIns="45720" tIns="18288" bIns="18288" anchor="ctr">
+          <a:bodyPr wrap="square" lIns="45720" tIns="18288" rIns="45720" bIns="18288" anchor="ctr">
             <a:spAutoFit/>
           </a:bodyPr>
           <a:lstStyle/>
@@ -5098,14 +4748,61 @@
                 </a:solidFill>
                 <a:latin typeface="Calibri"/>
               </a:rPr>
-              <a:t>10</a:t>
-            </a:r>
+              <a:t>12</a:t>
+            </a:r>
+          </a:p>
+        </p:txBody>
+      </p:sp>
+      <p:sp>
+        <p:nvSpPr>
+          <p:cNvPr id="9" name="Rectangle 8"/>
+          <p:cNvSpPr/>
+          <p:nvPr/>
+        </p:nvSpPr>
+        <p:spPr>
+          <a:xfrm>
+            <a:off x="576072" y="1317243"/>
+            <a:ext cx="2084832" cy="4543552"/>
+          </a:xfrm>
+          <a:prstGeom prst="rect">
+            <a:avLst/>
+          </a:prstGeom>
+          <a:solidFill>
+            <a:srgbClr val="FFFFFF"/>
+          </a:solidFill>
+          <a:ln w="12700">
+            <a:solidFill>
+              <a:srgbClr val="404040"/>
+            </a:solidFill>
+          </a:ln>
+          <a:effectLst/>
+        </p:spPr>
+        <p:style>
+          <a:lnRef idx="1">
+            <a:schemeClr val="accent1"/>
+          </a:lnRef>
+          <a:fillRef idx="3">
+            <a:schemeClr val="accent1"/>
+          </a:fillRef>
+          <a:effectRef idx="2">
+            <a:schemeClr val="accent1"/>
+          </a:effectRef>
+          <a:fontRef idx="minor">
+            <a:schemeClr val="lt1"/>
+          </a:fontRef>
+        </p:style>
+        <p:txBody>
+          <a:bodyPr rtlCol="0" anchor="ctr"/>
+          <a:lstStyle/>
+          <a:p>
+            <a:pPr algn="ctr"/>
+            <a:endParaRPr/>
           </a:p>
         </p:txBody>
       </p:sp>
       <p:pic>
         <p:nvPicPr>
-          <p:cNvPr id="9" name="Picture 8" descr="image.png"/>
+          <p:cNvPr id="10" name="Picture 9" descr="image.png"/>
           <p:cNvPicPr>
             <a:picLocks noChangeAspect="1"/>
           </p:cNvPicPr>
@@ -5119,8 +4816,8 @@
         </p:blipFill>
         <p:spPr>
           <a:xfrm>
-            <a:off x="411480" y="2354312"/>
-            <a:ext cx="7863840" cy="2926615"/>
+            <a:off x="612648" y="1353819"/>
+            <a:ext cx="2011680" cy="4470400"/>
           </a:xfrm>
           <a:prstGeom prst="rect">
             <a:avLst/>
@@ -5129,14 +4826,49 @@
       </p:pic>
       <p:sp>
         <p:nvSpPr>
-          <p:cNvPr id="10" name="Rectangle 9"/>
+          <p:cNvPr id="11" name="TextBox 10"/>
+          <p:cNvSpPr txBox="1"/>
+          <p:nvPr/>
+        </p:nvSpPr>
+        <p:spPr>
+          <a:xfrm>
+            <a:off x="502920" y="5943600"/>
+            <a:ext cx="2231136" cy="457200"/>
+          </a:xfrm>
+          <a:prstGeom prst="rect">
+            <a:avLst/>
+          </a:prstGeom>
+          <a:noFill/>
+        </p:spPr>
+        <p:txBody>
+          <a:bodyPr wrap="square" lIns="45720" tIns="18288" rIns="45720" bIns="18288" anchor="t">
+            <a:spAutoFit/>
+          </a:bodyPr>
+          <a:lstStyle/>
+          <a:p>
+            <a:pPr algn="ctr"/>
+            <a:r>
+              <a:rPr sz="1200" b="1" i="0">
+                <a:solidFill>
+                  <a:srgbClr val="1F4E79"/>
+                </a:solidFill>
+                <a:latin typeface="Calibri"/>
+              </a:rPr>
+              <a:t>P06 Cámara</a:t>
+            </a:r>
+          </a:p>
+        </p:txBody>
+      </p:sp>
+      <p:sp>
+        <p:nvSpPr>
+          <p:cNvPr id="12" name="Rectangle 11"/>
           <p:cNvSpPr/>
           <p:nvPr/>
         </p:nvSpPr>
         <p:spPr>
           <a:xfrm>
-            <a:off x="8503920" y="1325880"/>
-            <a:ext cx="3246120" cy="2240280"/>
+            <a:off x="2807208" y="1317243"/>
+            <a:ext cx="2084832" cy="4543552"/>
           </a:xfrm>
           <a:prstGeom prst="rect">
             <a:avLst/>
@@ -5146,7 +4878,7 @@
           </a:solidFill>
           <a:ln w="12700">
             <a:solidFill>
-              <a:srgbClr val="C9D3DD"/>
+              <a:srgbClr val="404040"/>
             </a:solidFill>
           </a:ln>
           <a:effectLst/>
@@ -5170,28 +4902,90 @@
           <a:lstStyle/>
           <a:p>
             <a:pPr algn="ctr"/>
-          </a:p>
-        </p:txBody>
-      </p:sp>
-      <p:sp>
-        <p:nvSpPr>
-          <p:cNvPr id="11" name="Rectangle 10"/>
+            <a:endParaRPr/>
+          </a:p>
+        </p:txBody>
+      </p:sp>
+      <p:pic>
+        <p:nvPicPr>
+          <p:cNvPr id="13" name="Picture 12" descr="image.png"/>
+          <p:cNvPicPr>
+            <a:picLocks noChangeAspect="1"/>
+          </p:cNvPicPr>
+          <p:nvPr/>
+        </p:nvPicPr>
+        <p:blipFill>
+          <a:blip r:embed="rId5"/>
+          <a:stretch>
+            <a:fillRect/>
+          </a:stretch>
+        </p:blipFill>
+        <p:spPr>
+          <a:xfrm>
+            <a:off x="2843784" y="1353819"/>
+            <a:ext cx="2011680" cy="4470400"/>
+          </a:xfrm>
+          <a:prstGeom prst="rect">
+            <a:avLst/>
+          </a:prstGeom>
+        </p:spPr>
+      </p:pic>
+      <p:sp>
+        <p:nvSpPr>
+          <p:cNvPr id="14" name="TextBox 13"/>
+          <p:cNvSpPr txBox="1"/>
+          <p:nvPr/>
+        </p:nvSpPr>
+        <p:spPr>
+          <a:xfrm>
+            <a:off x="2734056" y="5943600"/>
+            <a:ext cx="2231136" cy="457200"/>
+          </a:xfrm>
+          <a:prstGeom prst="rect">
+            <a:avLst/>
+          </a:prstGeom>
+          <a:noFill/>
+        </p:spPr>
+        <p:txBody>
+          <a:bodyPr wrap="square" lIns="45720" tIns="18288" rIns="45720" bIns="18288" anchor="t">
+            <a:spAutoFit/>
+          </a:bodyPr>
+          <a:lstStyle/>
+          <a:p>
+            <a:pPr algn="ctr"/>
+            <a:r>
+              <a:rPr sz="1200" b="1" i="0">
+                <a:solidFill>
+                  <a:srgbClr val="1F4E79"/>
+                </a:solidFill>
+                <a:latin typeface="Calibri"/>
+              </a:rPr>
+              <a:t>P07 Lectura</a:t>
+            </a:r>
+          </a:p>
+        </p:txBody>
+      </p:sp>
+      <p:sp>
+        <p:nvSpPr>
+          <p:cNvPr id="15" name="Rectangle 14"/>
           <p:cNvSpPr/>
           <p:nvPr/>
         </p:nvSpPr>
         <p:spPr>
           <a:xfrm>
-            <a:off x="8503920" y="1325880"/>
-            <a:ext cx="3246120" cy="64008"/>
+            <a:off x="5038344" y="1317243"/>
+            <a:ext cx="2084832" cy="4543552"/>
           </a:xfrm>
           <a:prstGeom prst="rect">
             <a:avLst/>
           </a:prstGeom>
           <a:solidFill>
-            <a:srgbClr val="1E7B4F"/>
+            <a:srgbClr val="FFFFFF"/>
           </a:solidFill>
-          <a:ln>
-            <a:noFill/>
+          <a:ln w="12700">
+            <a:solidFill>
+              <a:srgbClr val="404040"/>
+            </a:solidFill>
           </a:ln>
           <a:effectLst/>
         </p:spPr>
@@ -5214,19 +5008,44 @@
           <a:lstStyle/>
           <a:p>
             <a:pPr algn="ctr"/>
-          </a:p>
-        </p:txBody>
-      </p:sp>
-      <p:sp>
-        <p:nvSpPr>
-          <p:cNvPr id="12" name="TextBox 11"/>
+            <a:endParaRPr/>
+          </a:p>
+        </p:txBody>
+      </p:sp>
+      <p:pic>
+        <p:nvPicPr>
+          <p:cNvPr id="16" name="Picture 15" descr="image.png"/>
+          <p:cNvPicPr>
+            <a:picLocks noChangeAspect="1"/>
+          </p:cNvPicPr>
+          <p:nvPr/>
+        </p:nvPicPr>
+        <p:blipFill>
+          <a:blip r:embed="rId6"/>
+          <a:stretch>
+            <a:fillRect/>
+          </a:stretch>
+        </p:blipFill>
+        <p:spPr>
+          <a:xfrm>
+            <a:off x="5074920" y="1353819"/>
+            <a:ext cx="2011680" cy="4470400"/>
+          </a:xfrm>
+          <a:prstGeom prst="rect">
+            <a:avLst/>
+          </a:prstGeom>
+        </p:spPr>
+      </p:pic>
+      <p:sp>
+        <p:nvSpPr>
+          <p:cNvPr id="17" name="TextBox 16"/>
           <p:cNvSpPr txBox="1"/>
           <p:nvPr/>
         </p:nvSpPr>
         <p:spPr>
           <a:xfrm>
-            <a:off x="8641080" y="1463039"/>
-            <a:ext cx="2971800" cy="320040"/>
+            <a:off x="4965192" y="5943600"/>
+            <a:ext cx="2231136" cy="457200"/>
           </a:xfrm>
           <a:prstGeom prst="rect">
             <a:avLst/>
@@ -5234,108 +5053,34 @@
           <a:noFill/>
         </p:spPr>
         <p:txBody>
-          <a:bodyPr wrap="square" lIns="45720" rIns="45720" tIns="18288" bIns="18288" anchor="t">
+          <a:bodyPr wrap="square" lIns="45720" tIns="18288" rIns="45720" bIns="18288" anchor="t">
             <a:spAutoFit/>
           </a:bodyPr>
           <a:lstStyle/>
           <a:p>
-            <a:pPr algn="l"/>
-            <a:r>
-              <a:rPr sz="1300" b="1" i="0">
-                <a:solidFill>
-                  <a:srgbClr val="1E7B4F"/>
+            <a:pPr algn="ctr"/>
+            <a:r>
+              <a:rPr sz="1200" b="1" i="0">
+                <a:solidFill>
+                  <a:srgbClr val="1F4E79"/>
                 </a:solidFill>
                 <a:latin typeface="Calibri"/>
               </a:rPr>
-              <a:t>Revisión en DBeaver</a:t>
-            </a:r>
-          </a:p>
-        </p:txBody>
-      </p:sp>
-      <p:sp>
-        <p:nvSpPr>
-          <p:cNvPr id="13" name="TextBox 12"/>
-          <p:cNvSpPr txBox="1"/>
-          <p:nvPr/>
-        </p:nvSpPr>
-        <p:spPr>
-          <a:xfrm>
-            <a:off x="8641080" y="1783080"/>
-            <a:ext cx="2971800" cy="1691640"/>
-          </a:xfrm>
-          <a:prstGeom prst="rect">
-            <a:avLst/>
-          </a:prstGeom>
-          <a:noFill/>
-        </p:spPr>
-        <p:txBody>
-          <a:bodyPr wrap="square" lIns="45720" rIns="45720">
-            <a:spAutoFit/>
-          </a:bodyPr>
-          <a:lstStyle/>
-          <a:p>
-            <a:pPr marL="182880" indent="-182880">
-              <a:spcAft>
-                <a:spcPts val="400"/>
-              </a:spcAft>
-              <a:buChar char="•"/>
-            </a:pPr>
-            <a:r>
-              <a:rPr sz="1150" b="0">
-                <a:solidFill>
-                  <a:srgbClr val="262626"/>
-                </a:solidFill>
-                <a:latin typeface="Calibri"/>
-              </a:rPr>
-              <a:t>facturas_cifrada.db: el archivo del teléfono; sin la clave no abre</a:t>
-            </a:r>
-          </a:p>
-          <a:p>
-            <a:pPr marL="182880" indent="-182880">
-              <a:spcAft>
-                <a:spcPts val="400"/>
-              </a:spcAft>
-              <a:buChar char="•"/>
-            </a:pPr>
-            <a:r>
-              <a:rPr sz="1150" b="0">
-                <a:solidFill>
-                  <a:srgbClr val="262626"/>
-                </a:solidFill>
-                <a:latin typeface="Calibri"/>
-              </a:rPr>
-              <a:t>facturas_legible.db: copia exportada dentro de la app</a:t>
-            </a:r>
-          </a:p>
-          <a:p>
-            <a:pPr marL="182880" indent="-182880">
-              <a:spcAft>
-                <a:spcPts val="400"/>
-              </a:spcAft>
-              <a:buChar char="•"/>
-            </a:pPr>
-            <a:r>
-              <a:rPr sz="1150" b="0">
-                <a:solidFill>
-                  <a:srgbClr val="262626"/>
-                </a:solidFill>
-                <a:latin typeface="Calibri"/>
-              </a:rPr>
-              <a:t>Se genera con copiar_base.ps1</a:t>
-            </a:r>
-          </a:p>
-        </p:txBody>
-      </p:sp>
-      <p:sp>
-        <p:nvSpPr>
-          <p:cNvPr id="14" name="Rectangle 13"/>
+              <a:t>P08 Verificación</a:t>
+            </a:r>
+          </a:p>
+        </p:txBody>
+      </p:sp>
+      <p:sp>
+        <p:nvSpPr>
+          <p:cNvPr id="18" name="Rectangle 17"/>
           <p:cNvSpPr/>
           <p:nvPr/>
         </p:nvSpPr>
         <p:spPr>
           <a:xfrm>
-            <a:off x="8503920" y="3749039"/>
-            <a:ext cx="3246120" cy="2606040"/>
+            <a:off x="7269480" y="1317243"/>
+            <a:ext cx="2084832" cy="4543552"/>
           </a:xfrm>
           <a:prstGeom prst="rect">
             <a:avLst/>
@@ -5345,7 +5090,7 @@
           </a:solidFill>
           <a:ln w="12700">
             <a:solidFill>
-              <a:srgbClr val="C9D3DD"/>
+              <a:srgbClr val="404040"/>
             </a:solidFill>
           </a:ln>
           <a:effectLst/>
@@ -5369,28 +5114,90 @@
           <a:lstStyle/>
           <a:p>
             <a:pPr algn="ctr"/>
-          </a:p>
-        </p:txBody>
-      </p:sp>
-      <p:sp>
-        <p:nvSpPr>
-          <p:cNvPr id="15" name="Rectangle 14"/>
+            <a:endParaRPr/>
+          </a:p>
+        </p:txBody>
+      </p:sp>
+      <p:pic>
+        <p:nvPicPr>
+          <p:cNvPr id="19" name="Picture 18" descr="image.png"/>
+          <p:cNvPicPr>
+            <a:picLocks noChangeAspect="1"/>
+          </p:cNvPicPr>
+          <p:nvPr/>
+        </p:nvPicPr>
+        <p:blipFill>
+          <a:blip r:embed="rId7"/>
+          <a:stretch>
+            <a:fillRect/>
+          </a:stretch>
+        </p:blipFill>
+        <p:spPr>
+          <a:xfrm>
+            <a:off x="7306056" y="1353819"/>
+            <a:ext cx="2011680" cy="4470400"/>
+          </a:xfrm>
+          <a:prstGeom prst="rect">
+            <a:avLst/>
+          </a:prstGeom>
+        </p:spPr>
+      </p:pic>
+      <p:sp>
+        <p:nvSpPr>
+          <p:cNvPr id="20" name="TextBox 19"/>
+          <p:cNvSpPr txBox="1"/>
+          <p:nvPr/>
+        </p:nvSpPr>
+        <p:spPr>
+          <a:xfrm>
+            <a:off x="7196328" y="5943600"/>
+            <a:ext cx="2231136" cy="457200"/>
+          </a:xfrm>
+          <a:prstGeom prst="rect">
+            <a:avLst/>
+          </a:prstGeom>
+          <a:noFill/>
+        </p:spPr>
+        <p:txBody>
+          <a:bodyPr wrap="square" lIns="45720" tIns="18288" rIns="45720" bIns="18288" anchor="t">
+            <a:spAutoFit/>
+          </a:bodyPr>
+          <a:lstStyle/>
+          <a:p>
+            <a:pPr algn="ctr"/>
+            <a:r>
+              <a:rPr sz="1200" b="1" i="0">
+                <a:solidFill>
+                  <a:srgbClr val="1F4E79"/>
+                </a:solidFill>
+                <a:latin typeface="Calibri"/>
+              </a:rPr>
+              <a:t>P09 Duplicado</a:t>
+            </a:r>
+          </a:p>
+        </p:txBody>
+      </p:sp>
+      <p:sp>
+        <p:nvSpPr>
+          <p:cNvPr id="21" name="Rectangle 20"/>
           <p:cNvSpPr/>
           <p:nvPr/>
         </p:nvSpPr>
         <p:spPr>
           <a:xfrm>
-            <a:off x="8503920" y="3749039"/>
-            <a:ext cx="3246120" cy="64008"/>
+            <a:off x="9500616" y="1317243"/>
+            <a:ext cx="2084832" cy="4543552"/>
           </a:xfrm>
           <a:prstGeom prst="rect">
             <a:avLst/>
           </a:prstGeom>
           <a:solidFill>
-            <a:srgbClr val="1F4E79"/>
+            <a:srgbClr val="FFFFFF"/>
           </a:solidFill>
-          <a:ln>
-            <a:noFill/>
+          <a:ln w="12700">
+            <a:solidFill>
+              <a:srgbClr val="404040"/>
+            </a:solidFill>
           </a:ln>
           <a:effectLst/>
         </p:spPr>
@@ -5413,19 +5220,44 @@
           <a:lstStyle/>
           <a:p>
             <a:pPr algn="ctr"/>
-          </a:p>
-        </p:txBody>
-      </p:sp>
-      <p:sp>
-        <p:nvSpPr>
-          <p:cNvPr id="16" name="TextBox 15"/>
+            <a:endParaRPr/>
+          </a:p>
+        </p:txBody>
+      </p:sp>
+      <p:pic>
+        <p:nvPicPr>
+          <p:cNvPr id="22" name="Picture 21" descr="image.png"/>
+          <p:cNvPicPr>
+            <a:picLocks noChangeAspect="1"/>
+          </p:cNvPicPr>
+          <p:nvPr/>
+        </p:nvPicPr>
+        <p:blipFill>
+          <a:blip r:embed="rId8"/>
+          <a:stretch>
+            <a:fillRect/>
+          </a:stretch>
+        </p:blipFill>
+        <p:spPr>
+          <a:xfrm>
+            <a:off x="9537192" y="1353819"/>
+            <a:ext cx="2011680" cy="4470400"/>
+          </a:xfrm>
+          <a:prstGeom prst="rect">
+            <a:avLst/>
+          </a:prstGeom>
+        </p:spPr>
+      </p:pic>
+      <p:sp>
+        <p:nvSpPr>
+          <p:cNvPr id="23" name="TextBox 22"/>
           <p:cNvSpPr txBox="1"/>
           <p:nvPr/>
         </p:nvSpPr>
         <p:spPr>
           <a:xfrm>
-            <a:off x="8641080" y="3886200"/>
-            <a:ext cx="2971800" cy="320040"/>
+            <a:off x="9427464" y="5943600"/>
+            <a:ext cx="2231136" cy="457200"/>
           </a:xfrm>
           <a:prstGeom prst="rect">
             <a:avLst/>
@@ -5433,128 +5265,20 @@
           <a:noFill/>
         </p:spPr>
         <p:txBody>
-          <a:bodyPr wrap="square" lIns="45720" rIns="45720" tIns="18288" bIns="18288" anchor="t">
+          <a:bodyPr wrap="square" lIns="45720" tIns="18288" rIns="45720" bIns="18288" anchor="t">
             <a:spAutoFit/>
           </a:bodyPr>
           <a:lstStyle/>
           <a:p>
-            <a:pPr algn="l"/>
-            <a:r>
-              <a:rPr sz="1300" b="1" i="0">
+            <a:pPr algn="ctr"/>
+            <a:r>
+              <a:rPr sz="1200" b="1" i="0">
                 <a:solidFill>
                   <a:srgbClr val="1F4E79"/>
                 </a:solidFill>
                 <a:latin typeface="Calibri"/>
               </a:rPr>
-              <a:t>Seguridad</a:t>
-            </a:r>
-          </a:p>
-        </p:txBody>
-      </p:sp>
-      <p:sp>
-        <p:nvSpPr>
-          <p:cNvPr id="17" name="TextBox 16"/>
-          <p:cNvSpPr txBox="1"/>
-          <p:nvPr/>
-        </p:nvSpPr>
-        <p:spPr>
-          <a:xfrm>
-            <a:off x="8641080" y="4206240"/>
-            <a:ext cx="2971800" cy="2057400"/>
-          </a:xfrm>
-          <a:prstGeom prst="rect">
-            <a:avLst/>
-          </a:prstGeom>
-          <a:noFill/>
-        </p:spPr>
-        <p:txBody>
-          <a:bodyPr wrap="square" lIns="45720" rIns="45720">
-            <a:spAutoFit/>
-          </a:bodyPr>
-          <a:lstStyle/>
-          <a:p>
-            <a:pPr marL="182880" indent="-182880">
-              <a:spcAft>
-                <a:spcPts val="400"/>
-              </a:spcAft>
-              <a:buChar char="•"/>
-            </a:pPr>
-            <a:r>
-              <a:rPr sz="1150" b="0">
-                <a:solidFill>
-                  <a:srgbClr val="262626"/>
-                </a:solidFill>
-                <a:latin typeface="Calibri"/>
-              </a:rPr>
-              <a:t>Base cifrada con SQLCipher</a:t>
-            </a:r>
-          </a:p>
-          <a:p>
-            <a:pPr marL="182880" indent="-182880">
-              <a:spcAft>
-                <a:spcPts val="400"/>
-              </a:spcAft>
-              <a:buChar char="•"/>
-            </a:pPr>
-            <a:r>
-              <a:rPr sz="1150" b="0">
-                <a:solidFill>
-                  <a:srgbClr val="262626"/>
-                </a:solidFill>
-                <a:latin typeface="Calibri"/>
-              </a:rPr>
-              <a:t>Clave en el Android Keystore</a:t>
-            </a:r>
-          </a:p>
-          <a:p>
-            <a:pPr marL="182880" indent="-182880">
-              <a:spcAft>
-                <a:spcPts val="400"/>
-              </a:spcAft>
-              <a:buChar char="•"/>
-            </a:pPr>
-            <a:r>
-              <a:rPr sz="1150" b="0">
-                <a:solidFill>
-                  <a:srgbClr val="262626"/>
-                </a:solidFill>
-                <a:latin typeface="Calibri"/>
-              </a:rPr>
-              <a:t>Fotos cifradas con AES-GCM</a:t>
-            </a:r>
-          </a:p>
-          <a:p>
-            <a:pPr marL="182880" indent="-182880">
-              <a:spcAft>
-                <a:spcPts val="400"/>
-              </a:spcAft>
-              <a:buChar char="•"/>
-            </a:pPr>
-            <a:r>
-              <a:rPr sz="1150" b="0">
-                <a:solidFill>
-                  <a:srgbClr val="262626"/>
-                </a:solidFill>
-                <a:latin typeface="Calibri"/>
-              </a:rPr>
-              <a:t>Sin copias automáticas a la nube</a:t>
-            </a:r>
-          </a:p>
-          <a:p>
-            <a:pPr marL="182880" indent="-182880">
-              <a:spcAft>
-                <a:spcPts val="400"/>
-              </a:spcAft>
-              <a:buChar char="•"/>
-            </a:pPr>
-            <a:r>
-              <a:rPr sz="1150" b="0">
-                <a:solidFill>
-                  <a:srgbClr val="262626"/>
-                </a:solidFill>
-                <a:latin typeface="Calibri"/>
-              </a:rPr>
-              <a:t>Acceso con PIN o huella</a:t>
+              <a:t>P10 Guardada</a:t>
             </a:r>
           </a:p>
         </p:txBody>
@@ -5568,7 +5292,7 @@
 </file>
 
 <file path=ppt/slides/slide11.xml><?xml version="1.0" encoding="utf-8"?>
-<p:sld xmlns:a="http://schemas.openxmlformats.org/drawingml/2006/main" xmlns:p="http://schemas.openxmlformats.org/presentationml/2006/main" xmlns:r="http://schemas.openxmlformats.org/officeDocument/2006/relationships">
+<p:sld xmlns:a="http://schemas.openxmlformats.org/drawingml/2006/main" xmlns:r="http://schemas.openxmlformats.org/officeDocument/2006/relationships" xmlns:p="http://schemas.openxmlformats.org/presentationml/2006/main">
   <p:cSld>
     <p:spTree>
       <p:nvGrpSpPr>
@@ -5576,7 +5300,14 @@
         <p:cNvGrpSpPr/>
         <p:nvPr/>
       </p:nvGrpSpPr>
-      <p:grpSpPr/>
+      <p:grpSpPr>
+        <a:xfrm>
+          <a:off x="0" y="0"/>
+          <a:ext cx="0" cy="0"/>
+          <a:chOff x="0" y="0"/>
+          <a:chExt cx="0" cy="0"/>
+        </a:xfrm>
+      </p:grpSpPr>
       <p:sp>
         <p:nvSpPr>
           <p:cNvPr id="2" name="TextBox 1"/>
@@ -5594,7 +5325,7 @@
           <a:noFill/>
         </p:spPr>
         <p:txBody>
-          <a:bodyPr wrap="square" lIns="45720" rIns="45720" tIns="18288" bIns="18288" anchor="t">
+          <a:bodyPr wrap="square" lIns="45720" tIns="18288" rIns="45720" bIns="18288" anchor="t">
             <a:spAutoFit/>
           </a:bodyPr>
           <a:lstStyle/>
@@ -5629,7 +5360,7 @@
           <a:noFill/>
         </p:spPr>
         <p:txBody>
-          <a:bodyPr wrap="square" lIns="45720" rIns="45720" tIns="18288" bIns="18288" anchor="t">
+          <a:bodyPr wrap="square" lIns="45720" tIns="18288" rIns="45720" bIns="18288" anchor="t">
             <a:spAutoFit/>
           </a:bodyPr>
           <a:lstStyle/>
@@ -5642,7 +5373,7 @@
                 </a:solidFill>
                 <a:latin typeface="Calibri"/>
               </a:rPr>
-              <a:t>Acceso y preparación del lector</a:t>
+              <a:t>Control de facturas y determinación del NRUS</a:t>
             </a:r>
           </a:p>
         </p:txBody>
@@ -5688,6 +5419,7 @@
           <a:lstStyle/>
           <a:p>
             <a:pPr algn="ctr"/>
+            <a:endParaRPr/>
           </a:p>
         </p:txBody>
       </p:sp>
@@ -5700,7 +5432,7 @@
           <p:nvPr/>
         </p:nvPicPr>
         <p:blipFill>
-          <a:blip r:embed="rId2"/>
+          <a:blip r:embed="rId3"/>
           <a:stretch>
             <a:fillRect/>
           </a:stretch>
@@ -5756,6 +5488,7 @@
           <a:lstStyle/>
           <a:p>
             <a:pPr algn="ctr"/>
+            <a:endParaRPr/>
           </a:p>
         </p:txBody>
       </p:sp>
@@ -5776,7 +5509,7 @@
           <a:noFill/>
         </p:spPr>
         <p:txBody>
-          <a:bodyPr wrap="square" lIns="45720" rIns="45720" tIns="18288" bIns="18288" anchor="ctr">
+          <a:bodyPr wrap="square" lIns="45720" tIns="18288" rIns="45720" bIns="18288" anchor="ctr">
             <a:spAutoFit/>
           </a:bodyPr>
           <a:lstStyle/>
@@ -5811,7 +5544,7 @@
           <a:noFill/>
         </p:spPr>
         <p:txBody>
-          <a:bodyPr wrap="square" lIns="45720" rIns="45720" tIns="18288" bIns="18288" anchor="ctr">
+          <a:bodyPr wrap="square" lIns="45720" tIns="18288" rIns="45720" bIns="18288" anchor="ctr">
             <a:spAutoFit/>
           </a:bodyPr>
           <a:lstStyle/>
@@ -5824,7 +5557,7 @@
                 </a:solidFill>
                 <a:latin typeface="Calibri"/>
               </a:rPr>
-              <a:t>11</a:t>
+              <a:t>13</a:t>
             </a:r>
           </a:p>
         </p:txBody>
@@ -5837,8 +5570,8 @@
         </p:nvSpPr>
         <p:spPr>
           <a:xfrm>
-            <a:off x="842390" y="1289304"/>
-            <a:ext cx="2109978" cy="4599432"/>
+            <a:off x="576072" y="1317243"/>
+            <a:ext cx="2084832" cy="4543552"/>
           </a:xfrm>
           <a:prstGeom prst="rect">
             <a:avLst/>
@@ -5872,6 +5605,7 @@
           <a:lstStyle/>
           <a:p>
             <a:pPr algn="ctr"/>
+            <a:endParaRPr/>
           </a:p>
         </p:txBody>
       </p:sp>
@@ -5891,8 +5625,8 @@
         </p:blipFill>
         <p:spPr>
           <a:xfrm>
-            <a:off x="878966" y="1325880"/>
-            <a:ext cx="2036826" cy="4526280"/>
+            <a:off x="612648" y="1353819"/>
+            <a:ext cx="2011680" cy="4470400"/>
           </a:xfrm>
           <a:prstGeom prst="rect">
             <a:avLst/>
@@ -5908,7 +5642,7 @@
         <p:spPr>
           <a:xfrm>
             <a:off x="502920" y="5943600"/>
-            <a:ext cx="2788920" cy="457200"/>
+            <a:ext cx="2231136" cy="457200"/>
           </a:xfrm>
           <a:prstGeom prst="rect">
             <a:avLst/>
@@ -5916,7 +5650,7 @@
           <a:noFill/>
         </p:spPr>
         <p:txBody>
-          <a:bodyPr wrap="square" lIns="45720" rIns="45720" tIns="18288" bIns="18288" anchor="t">
+          <a:bodyPr wrap="square" lIns="45720" tIns="18288" rIns="45720" bIns="18288" anchor="t">
             <a:spAutoFit/>
           </a:bodyPr>
           <a:lstStyle/>
@@ -5929,7 +5663,7 @@
                 </a:solidFill>
                 <a:latin typeface="Calibri"/>
               </a:rPr>
-              <a:t>P01 Configuración</a:t>
+              <a:t>P11 Facturas</a:t>
             </a:r>
           </a:p>
         </p:txBody>
@@ -5942,8 +5676,8 @@
         </p:nvSpPr>
         <p:spPr>
           <a:xfrm>
-            <a:off x="3631310" y="1289304"/>
-            <a:ext cx="2109978" cy="4599432"/>
+            <a:off x="2807208" y="1317243"/>
+            <a:ext cx="2084832" cy="4543552"/>
           </a:xfrm>
           <a:prstGeom prst="rect">
             <a:avLst/>
@@ -5977,6 +5711,7 @@
           <a:lstStyle/>
           <a:p>
             <a:pPr algn="ctr"/>
+            <a:endParaRPr/>
           </a:p>
         </p:txBody>
       </p:sp>
@@ -5996,8 +5731,8 @@
         </p:blipFill>
         <p:spPr>
           <a:xfrm>
-            <a:off x="3667886" y="1325880"/>
-            <a:ext cx="2036826" cy="4526280"/>
+            <a:off x="2843784" y="1353819"/>
+            <a:ext cx="2011680" cy="4470400"/>
           </a:xfrm>
           <a:prstGeom prst="rect">
             <a:avLst/>
@@ -6012,8 +5747,8 @@
         </p:nvSpPr>
         <p:spPr>
           <a:xfrm>
-            <a:off x="3291839" y="5943600"/>
-            <a:ext cx="2788920" cy="457200"/>
+            <a:off x="2734056" y="5943600"/>
+            <a:ext cx="2231136" cy="457200"/>
           </a:xfrm>
           <a:prstGeom prst="rect">
             <a:avLst/>
@@ -6021,7 +5756,7 @@
           <a:noFill/>
         </p:spPr>
         <p:txBody>
-          <a:bodyPr wrap="square" lIns="45720" rIns="45720" tIns="18288" bIns="18288" anchor="t">
+          <a:bodyPr wrap="square" lIns="45720" tIns="18288" rIns="45720" bIns="18288" anchor="t">
             <a:spAutoFit/>
           </a:bodyPr>
           <a:lstStyle/>
@@ -6034,7 +5769,7 @@
                 </a:solidFill>
                 <a:latin typeface="Calibri"/>
               </a:rPr>
-              <a:t>P02 Acceso</a:t>
+              <a:t>P12 Anulación</a:t>
             </a:r>
           </a:p>
         </p:txBody>
@@ -6047,8 +5782,8 @@
         </p:nvSpPr>
         <p:spPr>
           <a:xfrm>
-            <a:off x="6420230" y="1289304"/>
-            <a:ext cx="2109978" cy="4599432"/>
+            <a:off x="5038344" y="1317243"/>
+            <a:ext cx="2084832" cy="4543552"/>
           </a:xfrm>
           <a:prstGeom prst="rect">
             <a:avLst/>
@@ -6082,6 +5817,7 @@
           <a:lstStyle/>
           <a:p>
             <a:pPr algn="ctr"/>
+            <a:endParaRPr/>
           </a:p>
         </p:txBody>
       </p:sp>
@@ -6101,8 +5837,8 @@
         </p:blipFill>
         <p:spPr>
           <a:xfrm>
-            <a:off x="6456806" y="1325880"/>
-            <a:ext cx="2036826" cy="4526280"/>
+            <a:off x="5074920" y="1353819"/>
+            <a:ext cx="2011680" cy="4470400"/>
           </a:xfrm>
           <a:prstGeom prst="rect">
             <a:avLst/>
@@ -6117,8 +5853,8 @@
         </p:nvSpPr>
         <p:spPr>
           <a:xfrm>
-            <a:off x="6080759" y="5943600"/>
-            <a:ext cx="2788920" cy="457200"/>
+            <a:off x="4965192" y="5943600"/>
+            <a:ext cx="2231136" cy="457200"/>
           </a:xfrm>
           <a:prstGeom prst="rect">
             <a:avLst/>
@@ -6126,7 +5862,7 @@
           <a:noFill/>
         </p:spPr>
         <p:txBody>
-          <a:bodyPr wrap="square" lIns="45720" rIns="45720" tIns="18288" bIns="18288" anchor="t">
+          <a:bodyPr wrap="square" lIns="45720" tIns="18288" rIns="45720" bIns="18288" anchor="t">
             <a:spAutoFit/>
           </a:bodyPr>
           <a:lstStyle/>
@@ -6139,7 +5875,7 @@
                 </a:solidFill>
                 <a:latin typeface="Calibri"/>
               </a:rPr>
-              <a:t>P03 Modelo instalado</a:t>
+              <a:t>P13 Ventas</a:t>
             </a:r>
           </a:p>
         </p:txBody>
@@ -6152,8 +5888,8 @@
         </p:nvSpPr>
         <p:spPr>
           <a:xfrm>
-            <a:off x="9209151" y="1289304"/>
-            <a:ext cx="2109978" cy="4599432"/>
+            <a:off x="7269480" y="1317243"/>
+            <a:ext cx="2084832" cy="4543552"/>
           </a:xfrm>
           <a:prstGeom prst="rect">
             <a:avLst/>
@@ -6187,6 +5923,7 @@
           <a:lstStyle/>
           <a:p>
             <a:pPr algn="ctr"/>
+            <a:endParaRPr/>
           </a:p>
         </p:txBody>
       </p:sp>
@@ -6206,8 +5943,8 @@
         </p:blipFill>
         <p:spPr>
           <a:xfrm>
-            <a:off x="9245726" y="1325880"/>
-            <a:ext cx="2036826" cy="4526280"/>
+            <a:off x="7306056" y="1353819"/>
+            <a:ext cx="2011680" cy="4470400"/>
           </a:xfrm>
           <a:prstGeom prst="rect">
             <a:avLst/>
@@ -6222,8 +5959,8 @@
         </p:nvSpPr>
         <p:spPr>
           <a:xfrm>
-            <a:off x="8869680" y="5943600"/>
-            <a:ext cx="2788920" cy="457200"/>
+            <a:off x="7196328" y="5943600"/>
+            <a:ext cx="2231136" cy="457200"/>
           </a:xfrm>
           <a:prstGeom prst="rect">
             <a:avLst/>
@@ -6231,7 +5968,7 @@
           <a:noFill/>
         </p:spPr>
         <p:txBody>
-          <a:bodyPr wrap="square" lIns="45720" rIns="45720" tIns="18288" bIns="18288" anchor="t">
+          <a:bodyPr wrap="square" lIns="45720" tIns="18288" rIns="45720" bIns="18288" anchor="t">
             <a:spAutoFit/>
           </a:bodyPr>
           <a:lstStyle/>
@@ -6244,7 +5981,113 @@
                 </a:solidFill>
                 <a:latin typeface="Calibri"/>
               </a:rPr>
-              <a:t>P04 Inicio</a:t>
+              <a:t>P14 Categoría</a:t>
+            </a:r>
+          </a:p>
+        </p:txBody>
+      </p:sp>
+      <p:sp>
+        <p:nvSpPr>
+          <p:cNvPr id="21" name="Rectangle 20"/>
+          <p:cNvSpPr/>
+          <p:nvPr/>
+        </p:nvSpPr>
+        <p:spPr>
+          <a:xfrm>
+            <a:off x="9500616" y="1317243"/>
+            <a:ext cx="2084832" cy="4543552"/>
+          </a:xfrm>
+          <a:prstGeom prst="rect">
+            <a:avLst/>
+          </a:prstGeom>
+          <a:solidFill>
+            <a:srgbClr val="FFFFFF"/>
+          </a:solidFill>
+          <a:ln w="12700">
+            <a:solidFill>
+              <a:srgbClr val="404040"/>
+            </a:solidFill>
+          </a:ln>
+          <a:effectLst/>
+        </p:spPr>
+        <p:style>
+          <a:lnRef idx="1">
+            <a:schemeClr val="accent1"/>
+          </a:lnRef>
+          <a:fillRef idx="3">
+            <a:schemeClr val="accent1"/>
+          </a:fillRef>
+          <a:effectRef idx="2">
+            <a:schemeClr val="accent1"/>
+          </a:effectRef>
+          <a:fontRef idx="minor">
+            <a:schemeClr val="lt1"/>
+          </a:fontRef>
+        </p:style>
+        <p:txBody>
+          <a:bodyPr rtlCol="0" anchor="ctr"/>
+          <a:lstStyle/>
+          <a:p>
+            <a:pPr algn="ctr"/>
+            <a:endParaRPr/>
+          </a:p>
+        </p:txBody>
+      </p:sp>
+      <p:pic>
+        <p:nvPicPr>
+          <p:cNvPr id="22" name="Picture 21" descr="image.png"/>
+          <p:cNvPicPr>
+            <a:picLocks noChangeAspect="1"/>
+          </p:cNvPicPr>
+          <p:nvPr/>
+        </p:nvPicPr>
+        <p:blipFill>
+          <a:blip r:embed="rId8"/>
+          <a:stretch>
+            <a:fillRect/>
+          </a:stretch>
+        </p:blipFill>
+        <p:spPr>
+          <a:xfrm>
+            <a:off x="9537192" y="1353819"/>
+            <a:ext cx="2011680" cy="4470400"/>
+          </a:xfrm>
+          <a:prstGeom prst="rect">
+            <a:avLst/>
+          </a:prstGeom>
+        </p:spPr>
+      </p:pic>
+      <p:sp>
+        <p:nvSpPr>
+          <p:cNvPr id="23" name="TextBox 22"/>
+          <p:cNvSpPr txBox="1"/>
+          <p:nvPr/>
+        </p:nvSpPr>
+        <p:spPr>
+          <a:xfrm>
+            <a:off x="9427464" y="5943600"/>
+            <a:ext cx="2231136" cy="457200"/>
+          </a:xfrm>
+          <a:prstGeom prst="rect">
+            <a:avLst/>
+          </a:prstGeom>
+          <a:noFill/>
+        </p:spPr>
+        <p:txBody>
+          <a:bodyPr wrap="square" lIns="45720" tIns="18288" rIns="45720" bIns="18288" anchor="t">
+            <a:spAutoFit/>
+          </a:bodyPr>
+          <a:lstStyle/>
+          <a:p>
+            <a:pPr algn="ctr"/>
+            <a:r>
+              <a:rPr sz="1200" b="1" i="0">
+                <a:solidFill>
+                  <a:srgbClr val="1F4E79"/>
+                </a:solidFill>
+                <a:latin typeface="Calibri"/>
+              </a:rPr>
+              <a:t>P15 Vencimiento</a:t>
             </a:r>
           </a:p>
         </p:txBody>
@@ -6258,7 +6101,7 @@
 </file>
 
 <file path=ppt/slides/slide12.xml><?xml version="1.0" encoding="utf-8"?>
-<p:sld xmlns:a="http://schemas.openxmlformats.org/drawingml/2006/main" xmlns:p="http://schemas.openxmlformats.org/presentationml/2006/main" xmlns:r="http://schemas.openxmlformats.org/officeDocument/2006/relationships">
+<p:sld xmlns:a="http://schemas.openxmlformats.org/drawingml/2006/main" xmlns:r="http://schemas.openxmlformats.org/officeDocument/2006/relationships" xmlns:p="http://schemas.openxmlformats.org/presentationml/2006/main">
   <p:cSld>
     <p:spTree>
       <p:nvGrpSpPr>
@@ -6266,7 +6109,14 @@
         <p:cNvGrpSpPr/>
         <p:nvPr/>
       </p:nvGrpSpPr>
-      <p:grpSpPr/>
+      <p:grpSpPr>
+        <a:xfrm>
+          <a:off x="0" y="0"/>
+          <a:ext cx="0" cy="0"/>
+          <a:chOff x="0" y="0"/>
+          <a:chExt cx="0" cy="0"/>
+        </a:xfrm>
+      </p:grpSpPr>
       <p:sp>
         <p:nvSpPr>
           <p:cNvPr id="2" name="TextBox 1"/>
@@ -6284,7 +6134,7 @@
           <a:noFill/>
         </p:spPr>
         <p:txBody>
-          <a:bodyPr wrap="square" lIns="45720" rIns="45720" tIns="18288" bIns="18288" anchor="t">
+          <a:bodyPr wrap="square" lIns="45720" tIns="18288" rIns="45720" bIns="18288" anchor="t">
             <a:spAutoFit/>
           </a:bodyPr>
           <a:lstStyle/>
@@ -6319,7 +6169,7 @@
           <a:noFill/>
         </p:spPr>
         <p:txBody>
-          <a:bodyPr wrap="square" lIns="45720" rIns="45720" tIns="18288" bIns="18288" anchor="t">
+          <a:bodyPr wrap="square" lIns="45720" tIns="18288" rIns="45720" bIns="18288" anchor="t">
             <a:spAutoFit/>
           </a:bodyPr>
           <a:lstStyle/>
@@ -6332,7 +6182,7 @@
                 </a:solidFill>
                 <a:latin typeface="Calibri"/>
               </a:rPr>
-              <a:t>Registro de una factura con Gemma 4</a:t>
+              <a:t>Reporte, historial, ajustes y exportación</a:t>
             </a:r>
           </a:p>
         </p:txBody>
@@ -6378,6 +6228,7 @@
           <a:lstStyle/>
           <a:p>
             <a:pPr algn="ctr"/>
+            <a:endParaRPr/>
           </a:p>
         </p:txBody>
       </p:sp>
@@ -6390,7 +6241,7 @@
           <p:nvPr/>
         </p:nvPicPr>
         <p:blipFill>
-          <a:blip r:embed="rId2"/>
+          <a:blip r:embed="rId3"/>
           <a:stretch>
             <a:fillRect/>
           </a:stretch>
@@ -6446,6 +6297,7 @@
           <a:lstStyle/>
           <a:p>
             <a:pPr algn="ctr"/>
+            <a:endParaRPr/>
           </a:p>
         </p:txBody>
       </p:sp>
@@ -6466,7 +6318,7 @@
           <a:noFill/>
         </p:spPr>
         <p:txBody>
-          <a:bodyPr wrap="square" lIns="45720" rIns="45720" tIns="18288" bIns="18288" anchor="ctr">
+          <a:bodyPr wrap="square" lIns="45720" tIns="18288" rIns="45720" bIns="18288" anchor="ctr">
             <a:spAutoFit/>
           </a:bodyPr>
           <a:lstStyle/>
@@ -6501,7 +6353,7 @@
           <a:noFill/>
         </p:spPr>
         <p:txBody>
-          <a:bodyPr wrap="square" lIns="45720" rIns="45720" tIns="18288" bIns="18288" anchor="ctr">
+          <a:bodyPr wrap="square" lIns="45720" tIns="18288" rIns="45720" bIns="18288" anchor="ctr">
             <a:spAutoFit/>
           </a:bodyPr>
           <a:lstStyle/>
@@ -6514,7 +6366,7 @@
                 </a:solidFill>
                 <a:latin typeface="Calibri"/>
               </a:rPr>
-              <a:t>12</a:t>
+              <a:t>14</a:t>
             </a:r>
           </a:p>
         </p:txBody>
@@ -6562,6 +6414,7 @@
           <a:lstStyle/>
           <a:p>
             <a:pPr algn="ctr"/>
+            <a:endParaRPr/>
           </a:p>
         </p:txBody>
       </p:sp>
@@ -6606,7 +6459,7 @@
           <a:noFill/>
         </p:spPr>
         <p:txBody>
-          <a:bodyPr wrap="square" lIns="45720" rIns="45720" tIns="18288" bIns="18288" anchor="t">
+          <a:bodyPr wrap="square" lIns="45720" tIns="18288" rIns="45720" bIns="18288" anchor="t">
             <a:spAutoFit/>
           </a:bodyPr>
           <a:lstStyle/>
@@ -6619,7 +6472,7 @@
                 </a:solidFill>
                 <a:latin typeface="Calibri"/>
               </a:rPr>
-              <a:t>P06 Cámara</a:t>
+              <a:t>P16 Reporte</a:t>
             </a:r>
           </a:p>
         </p:txBody>
@@ -6667,6 +6520,7 @@
           <a:lstStyle/>
           <a:p>
             <a:pPr algn="ctr"/>
+            <a:endParaRPr/>
           </a:p>
         </p:txBody>
       </p:sp>
@@ -6711,7 +6565,7 @@
           <a:noFill/>
         </p:spPr>
         <p:txBody>
-          <a:bodyPr wrap="square" lIns="45720" rIns="45720" tIns="18288" bIns="18288" anchor="t">
+          <a:bodyPr wrap="square" lIns="45720" tIns="18288" rIns="45720" bIns="18288" anchor="t">
             <a:spAutoFit/>
           </a:bodyPr>
           <a:lstStyle/>
@@ -6724,7 +6578,7 @@
                 </a:solidFill>
                 <a:latin typeface="Calibri"/>
               </a:rPr>
-              <a:t>P07 Lectura</a:t>
+              <a:t>P17 Cierre</a:t>
             </a:r>
           </a:p>
         </p:txBody>
@@ -6772,6 +6626,7 @@
           <a:lstStyle/>
           <a:p>
             <a:pPr algn="ctr"/>
+            <a:endParaRPr/>
           </a:p>
         </p:txBody>
       </p:sp>
@@ -6816,7 +6671,7 @@
           <a:noFill/>
         </p:spPr>
         <p:txBody>
-          <a:bodyPr wrap="square" lIns="45720" rIns="45720" tIns="18288" bIns="18288" anchor="t">
+          <a:bodyPr wrap="square" lIns="45720" tIns="18288" rIns="45720" bIns="18288" anchor="t">
             <a:spAutoFit/>
           </a:bodyPr>
           <a:lstStyle/>
@@ -6829,7 +6684,7 @@
                 </a:solidFill>
                 <a:latin typeface="Calibri"/>
               </a:rPr>
-              <a:t>P08 Verificación</a:t>
+              <a:t>P18 Ajustes</a:t>
             </a:r>
           </a:p>
         </p:txBody>
@@ -6877,6 +6732,7 @@
           <a:lstStyle/>
           <a:p>
             <a:pPr algn="ctr"/>
+            <a:endParaRPr/>
           </a:p>
         </p:txBody>
       </p:sp>
@@ -6921,7 +6777,7 @@
           <a:noFill/>
         </p:spPr>
         <p:txBody>
-          <a:bodyPr wrap="square" lIns="45720" rIns="45720" tIns="18288" bIns="18288" anchor="t">
+          <a:bodyPr wrap="square" lIns="45720" tIns="18288" rIns="45720" bIns="18288" anchor="t">
             <a:spAutoFit/>
           </a:bodyPr>
           <a:lstStyle/>
@@ -6934,7 +6790,7 @@
                 </a:solidFill>
                 <a:latin typeface="Calibri"/>
               </a:rPr>
-              <a:t>P09 Duplicado</a:t>
+              <a:t>P19 Registro manual</a:t>
             </a:r>
           </a:p>
         </p:txBody>
@@ -6982,6 +6838,7 @@
           <a:lstStyle/>
           <a:p>
             <a:pPr algn="ctr"/>
+            <a:endParaRPr/>
           </a:p>
         </p:txBody>
       </p:sp>
@@ -7026,1597 +6883,7 @@
           <a:noFill/>
         </p:spPr>
         <p:txBody>
-          <a:bodyPr wrap="square" lIns="45720" rIns="45720" tIns="18288" bIns="18288" anchor="t">
-            <a:spAutoFit/>
-          </a:bodyPr>
-          <a:lstStyle/>
-          <a:p>
-            <a:pPr algn="ctr"/>
-            <a:r>
-              <a:rPr sz="1200" b="1" i="0">
-                <a:solidFill>
-                  <a:srgbClr val="1F4E79"/>
-                </a:solidFill>
-                <a:latin typeface="Calibri"/>
-              </a:rPr>
-              <a:t>P10 Guardada</a:t>
-            </a:r>
-          </a:p>
-        </p:txBody>
-      </p:sp>
-    </p:spTree>
-  </p:cSld>
-  <p:clrMapOvr>
-    <a:masterClrMapping/>
-  </p:clrMapOvr>
-</p:sld>
-</file>
-
-<file path=ppt/slides/slide13.xml><?xml version="1.0" encoding="utf-8"?>
-<p:sld xmlns:a="http://schemas.openxmlformats.org/drawingml/2006/main" xmlns:p="http://schemas.openxmlformats.org/presentationml/2006/main" xmlns:r="http://schemas.openxmlformats.org/officeDocument/2006/relationships">
-  <p:cSld>
-    <p:spTree>
-      <p:nvGrpSpPr>
-        <p:cNvPr id="1" name=""/>
-        <p:cNvGrpSpPr/>
-        <p:nvPr/>
-      </p:nvGrpSpPr>
-      <p:grpSpPr/>
-      <p:sp>
-        <p:nvSpPr>
-          <p:cNvPr id="2" name="TextBox 1"/>
-          <p:cNvSpPr txBox="1"/>
-          <p:nvPr/>
-        </p:nvSpPr>
-        <p:spPr>
-          <a:xfrm>
-            <a:off x="502920" y="201168"/>
-            <a:ext cx="7315200" cy="274320"/>
-          </a:xfrm>
-          <a:prstGeom prst="rect">
-            <a:avLst/>
-          </a:prstGeom>
-          <a:noFill/>
-        </p:spPr>
-        <p:txBody>
-          <a:bodyPr wrap="square" lIns="45720" rIns="45720" tIns="18288" bIns="18288" anchor="t">
-            <a:spAutoFit/>
-          </a:bodyPr>
-          <a:lstStyle/>
-          <a:p>
-            <a:pPr algn="l"/>
-            <a:r>
-              <a:rPr sz="1100" b="1" i="0">
-                <a:solidFill>
-                  <a:srgbClr val="C00000"/>
-                </a:solidFill>
-                <a:latin typeface="Calibri"/>
-              </a:rPr>
-              <a:t>LA APP EN EL TELÉFONO</a:t>
-            </a:r>
-          </a:p>
-        </p:txBody>
-      </p:sp>
-      <p:sp>
-        <p:nvSpPr>
-          <p:cNvPr id="3" name="TextBox 2"/>
-          <p:cNvSpPr txBox="1"/>
-          <p:nvPr/>
-        </p:nvSpPr>
-        <p:spPr>
-          <a:xfrm>
-            <a:off x="502920" y="457200"/>
-            <a:ext cx="9692640" cy="594360"/>
-          </a:xfrm>
-          <a:prstGeom prst="rect">
-            <a:avLst/>
-          </a:prstGeom>
-          <a:noFill/>
-        </p:spPr>
-        <p:txBody>
-          <a:bodyPr wrap="square" lIns="45720" rIns="45720" tIns="18288" bIns="18288" anchor="t">
-            <a:spAutoFit/>
-          </a:bodyPr>
-          <a:lstStyle/>
-          <a:p>
-            <a:pPr algn="l"/>
-            <a:r>
-              <a:rPr sz="2600" b="1" i="0">
-                <a:solidFill>
-                  <a:srgbClr val="1F4E79"/>
-                </a:solidFill>
-                <a:latin typeface="Calibri"/>
-              </a:rPr>
-              <a:t>Control de facturas y determinación del NRUS</a:t>
-            </a:r>
-          </a:p>
-        </p:txBody>
-      </p:sp>
-      <p:sp>
-        <p:nvSpPr>
-          <p:cNvPr id="4" name="Rectangle 3"/>
-          <p:cNvSpPr/>
-          <p:nvPr/>
-        </p:nvSpPr>
-        <p:spPr>
-          <a:xfrm>
-            <a:off x="502920" y="1051560"/>
-            <a:ext cx="1371600" cy="45720"/>
-          </a:xfrm>
-          <a:prstGeom prst="rect">
-            <a:avLst/>
-          </a:prstGeom>
-          <a:solidFill>
-            <a:srgbClr val="C00000"/>
-          </a:solidFill>
-          <a:ln>
-            <a:noFill/>
-          </a:ln>
-          <a:effectLst/>
-        </p:spPr>
-        <p:style>
-          <a:lnRef idx="1">
-            <a:schemeClr val="accent1"/>
-          </a:lnRef>
-          <a:fillRef idx="3">
-            <a:schemeClr val="accent1"/>
-          </a:fillRef>
-          <a:effectRef idx="2">
-            <a:schemeClr val="accent1"/>
-          </a:effectRef>
-          <a:fontRef idx="minor">
-            <a:schemeClr val="lt1"/>
-          </a:fontRef>
-        </p:style>
-        <p:txBody>
-          <a:bodyPr rtlCol="0" anchor="ctr"/>
-          <a:lstStyle/>
-          <a:p>
-            <a:pPr algn="ctr"/>
-          </a:p>
-        </p:txBody>
-      </p:sp>
-      <p:pic>
-        <p:nvPicPr>
-          <p:cNvPr id="5" name="Picture 4" descr="logo_utp.png"/>
-          <p:cNvPicPr>
-            <a:picLocks noChangeAspect="1"/>
-          </p:cNvPicPr>
-          <p:nvPr/>
-        </p:nvPicPr>
-        <p:blipFill>
-          <a:blip r:embed="rId2"/>
-          <a:stretch>
-            <a:fillRect/>
-          </a:stretch>
-        </p:blipFill>
-        <p:spPr>
-          <a:xfrm>
-            <a:off x="10607040" y="228600"/>
-            <a:ext cx="1188720" cy="316382"/>
-          </a:xfrm>
-          <a:prstGeom prst="rect">
-            <a:avLst/>
-          </a:prstGeom>
-        </p:spPr>
-      </p:pic>
-      <p:sp>
-        <p:nvSpPr>
-          <p:cNvPr id="6" name="Rectangle 5"/>
-          <p:cNvSpPr/>
-          <p:nvPr/>
-        </p:nvSpPr>
-        <p:spPr>
-          <a:xfrm>
-            <a:off x="0" y="6492240"/>
-            <a:ext cx="12191695" cy="365760"/>
-          </a:xfrm>
-          <a:prstGeom prst="rect">
-            <a:avLst/>
-          </a:prstGeom>
-          <a:solidFill>
-            <a:srgbClr val="C00000"/>
-          </a:solidFill>
-          <a:ln>
-            <a:noFill/>
-          </a:ln>
-          <a:effectLst/>
-        </p:spPr>
-        <p:style>
-          <a:lnRef idx="1">
-            <a:schemeClr val="accent1"/>
-          </a:lnRef>
-          <a:fillRef idx="3">
-            <a:schemeClr val="accent1"/>
-          </a:fillRef>
-          <a:effectRef idx="2">
-            <a:schemeClr val="accent1"/>
-          </a:effectRef>
-          <a:fontRef idx="minor">
-            <a:schemeClr val="lt1"/>
-          </a:fontRef>
-        </p:style>
-        <p:txBody>
-          <a:bodyPr rtlCol="0" anchor="ctr"/>
-          <a:lstStyle/>
-          <a:p>
-            <a:pPr algn="ctr"/>
-          </a:p>
-        </p:txBody>
-      </p:sp>
-      <p:sp>
-        <p:nvSpPr>
-          <p:cNvPr id="7" name="TextBox 6"/>
-          <p:cNvSpPr txBox="1"/>
-          <p:nvPr/>
-        </p:nvSpPr>
-        <p:spPr>
-          <a:xfrm>
-            <a:off x="365760" y="6492240"/>
-            <a:ext cx="7315200" cy="365760"/>
-          </a:xfrm>
-          <a:prstGeom prst="rect">
-            <a:avLst/>
-          </a:prstGeom>
-          <a:noFill/>
-        </p:spPr>
-        <p:txBody>
-          <a:bodyPr wrap="square" lIns="45720" rIns="45720" tIns="18288" bIns="18288" anchor="ctr">
-            <a:spAutoFit/>
-          </a:bodyPr>
-          <a:lstStyle/>
-          <a:p>
-            <a:pPr algn="l"/>
-            <a:r>
-              <a:rPr sz="1100" b="0" i="0">
-                <a:solidFill>
-                  <a:srgbClr val="FFFFFF"/>
-                </a:solidFill>
-                <a:latin typeface="Calibri"/>
-              </a:rPr>
-              <a:t>Facturas S20  ·  Avance de Proyecto Final 3</a:t>
-            </a:r>
-          </a:p>
-        </p:txBody>
-      </p:sp>
-      <p:sp>
-        <p:nvSpPr>
-          <p:cNvPr id="8" name="TextBox 7"/>
-          <p:cNvSpPr txBox="1"/>
-          <p:nvPr/>
-        </p:nvSpPr>
-        <p:spPr>
-          <a:xfrm>
-            <a:off x="11247120" y="6492240"/>
-            <a:ext cx="548640" cy="365760"/>
-          </a:xfrm>
-          <a:prstGeom prst="rect">
-            <a:avLst/>
-          </a:prstGeom>
-          <a:noFill/>
-        </p:spPr>
-        <p:txBody>
-          <a:bodyPr wrap="square" lIns="45720" rIns="45720" tIns="18288" bIns="18288" anchor="ctr">
-            <a:spAutoFit/>
-          </a:bodyPr>
-          <a:lstStyle/>
-          <a:p>
-            <a:pPr algn="r"/>
-            <a:r>
-              <a:rPr sz="1100" b="0" i="0">
-                <a:solidFill>
-                  <a:srgbClr val="FFFFFF"/>
-                </a:solidFill>
-                <a:latin typeface="Calibri"/>
-              </a:rPr>
-              <a:t>13</a:t>
-            </a:r>
-          </a:p>
-        </p:txBody>
-      </p:sp>
-      <p:sp>
-        <p:nvSpPr>
-          <p:cNvPr id="9" name="Rectangle 8"/>
-          <p:cNvSpPr/>
-          <p:nvPr/>
-        </p:nvSpPr>
-        <p:spPr>
-          <a:xfrm>
-            <a:off x="576072" y="1317243"/>
-            <a:ext cx="2084832" cy="4543552"/>
-          </a:xfrm>
-          <a:prstGeom prst="rect">
-            <a:avLst/>
-          </a:prstGeom>
-          <a:solidFill>
-            <a:srgbClr val="FFFFFF"/>
-          </a:solidFill>
-          <a:ln w="12700">
-            <a:solidFill>
-              <a:srgbClr val="404040"/>
-            </a:solidFill>
-          </a:ln>
-          <a:effectLst/>
-        </p:spPr>
-        <p:style>
-          <a:lnRef idx="1">
-            <a:schemeClr val="accent1"/>
-          </a:lnRef>
-          <a:fillRef idx="3">
-            <a:schemeClr val="accent1"/>
-          </a:fillRef>
-          <a:effectRef idx="2">
-            <a:schemeClr val="accent1"/>
-          </a:effectRef>
-          <a:fontRef idx="minor">
-            <a:schemeClr val="lt1"/>
-          </a:fontRef>
-        </p:style>
-        <p:txBody>
-          <a:bodyPr rtlCol="0" anchor="ctr"/>
-          <a:lstStyle/>
-          <a:p>
-            <a:pPr algn="ctr"/>
-          </a:p>
-        </p:txBody>
-      </p:sp>
-      <p:pic>
-        <p:nvPicPr>
-          <p:cNvPr id="10" name="Picture 9" descr="image.png"/>
-          <p:cNvPicPr>
-            <a:picLocks noChangeAspect="1"/>
-          </p:cNvPicPr>
-          <p:nvPr/>
-        </p:nvPicPr>
-        <p:blipFill>
-          <a:blip r:embed="rId4"/>
-          <a:stretch>
-            <a:fillRect/>
-          </a:stretch>
-        </p:blipFill>
-        <p:spPr>
-          <a:xfrm>
-            <a:off x="612648" y="1353819"/>
-            <a:ext cx="2011680" cy="4470400"/>
-          </a:xfrm>
-          <a:prstGeom prst="rect">
-            <a:avLst/>
-          </a:prstGeom>
-        </p:spPr>
-      </p:pic>
-      <p:sp>
-        <p:nvSpPr>
-          <p:cNvPr id="11" name="TextBox 10"/>
-          <p:cNvSpPr txBox="1"/>
-          <p:nvPr/>
-        </p:nvSpPr>
-        <p:spPr>
-          <a:xfrm>
-            <a:off x="502920" y="5943600"/>
-            <a:ext cx="2231136" cy="457200"/>
-          </a:xfrm>
-          <a:prstGeom prst="rect">
-            <a:avLst/>
-          </a:prstGeom>
-          <a:noFill/>
-        </p:spPr>
-        <p:txBody>
-          <a:bodyPr wrap="square" lIns="45720" rIns="45720" tIns="18288" bIns="18288" anchor="t">
-            <a:spAutoFit/>
-          </a:bodyPr>
-          <a:lstStyle/>
-          <a:p>
-            <a:pPr algn="ctr"/>
-            <a:r>
-              <a:rPr sz="1200" b="1" i="0">
-                <a:solidFill>
-                  <a:srgbClr val="1F4E79"/>
-                </a:solidFill>
-                <a:latin typeface="Calibri"/>
-              </a:rPr>
-              <a:t>P11 Facturas</a:t>
-            </a:r>
-          </a:p>
-        </p:txBody>
-      </p:sp>
-      <p:sp>
-        <p:nvSpPr>
-          <p:cNvPr id="12" name="Rectangle 11"/>
-          <p:cNvSpPr/>
-          <p:nvPr/>
-        </p:nvSpPr>
-        <p:spPr>
-          <a:xfrm>
-            <a:off x="2807208" y="1317243"/>
-            <a:ext cx="2084832" cy="4543552"/>
-          </a:xfrm>
-          <a:prstGeom prst="rect">
-            <a:avLst/>
-          </a:prstGeom>
-          <a:solidFill>
-            <a:srgbClr val="FFFFFF"/>
-          </a:solidFill>
-          <a:ln w="12700">
-            <a:solidFill>
-              <a:srgbClr val="404040"/>
-            </a:solidFill>
-          </a:ln>
-          <a:effectLst/>
-        </p:spPr>
-        <p:style>
-          <a:lnRef idx="1">
-            <a:schemeClr val="accent1"/>
-          </a:lnRef>
-          <a:fillRef idx="3">
-            <a:schemeClr val="accent1"/>
-          </a:fillRef>
-          <a:effectRef idx="2">
-            <a:schemeClr val="accent1"/>
-          </a:effectRef>
-          <a:fontRef idx="minor">
-            <a:schemeClr val="lt1"/>
-          </a:fontRef>
-        </p:style>
-        <p:txBody>
-          <a:bodyPr rtlCol="0" anchor="ctr"/>
-          <a:lstStyle/>
-          <a:p>
-            <a:pPr algn="ctr"/>
-          </a:p>
-        </p:txBody>
-      </p:sp>
-      <p:pic>
-        <p:nvPicPr>
-          <p:cNvPr id="13" name="Picture 12" descr="image.png"/>
-          <p:cNvPicPr>
-            <a:picLocks noChangeAspect="1"/>
-          </p:cNvPicPr>
-          <p:nvPr/>
-        </p:nvPicPr>
-        <p:blipFill>
-          <a:blip r:embed="rId5"/>
-          <a:stretch>
-            <a:fillRect/>
-          </a:stretch>
-        </p:blipFill>
-        <p:spPr>
-          <a:xfrm>
-            <a:off x="2843784" y="1353819"/>
-            <a:ext cx="2011680" cy="4470400"/>
-          </a:xfrm>
-          <a:prstGeom prst="rect">
-            <a:avLst/>
-          </a:prstGeom>
-        </p:spPr>
-      </p:pic>
-      <p:sp>
-        <p:nvSpPr>
-          <p:cNvPr id="14" name="TextBox 13"/>
-          <p:cNvSpPr txBox="1"/>
-          <p:nvPr/>
-        </p:nvSpPr>
-        <p:spPr>
-          <a:xfrm>
-            <a:off x="2734056" y="5943600"/>
-            <a:ext cx="2231136" cy="457200"/>
-          </a:xfrm>
-          <a:prstGeom prst="rect">
-            <a:avLst/>
-          </a:prstGeom>
-          <a:noFill/>
-        </p:spPr>
-        <p:txBody>
-          <a:bodyPr wrap="square" lIns="45720" rIns="45720" tIns="18288" bIns="18288" anchor="t">
-            <a:spAutoFit/>
-          </a:bodyPr>
-          <a:lstStyle/>
-          <a:p>
-            <a:pPr algn="ctr"/>
-            <a:r>
-              <a:rPr sz="1200" b="1" i="0">
-                <a:solidFill>
-                  <a:srgbClr val="1F4E79"/>
-                </a:solidFill>
-                <a:latin typeface="Calibri"/>
-              </a:rPr>
-              <a:t>P12 Anulación</a:t>
-            </a:r>
-          </a:p>
-        </p:txBody>
-      </p:sp>
-      <p:sp>
-        <p:nvSpPr>
-          <p:cNvPr id="15" name="Rectangle 14"/>
-          <p:cNvSpPr/>
-          <p:nvPr/>
-        </p:nvSpPr>
-        <p:spPr>
-          <a:xfrm>
-            <a:off x="5038344" y="1317243"/>
-            <a:ext cx="2084832" cy="4543552"/>
-          </a:xfrm>
-          <a:prstGeom prst="rect">
-            <a:avLst/>
-          </a:prstGeom>
-          <a:solidFill>
-            <a:srgbClr val="FFFFFF"/>
-          </a:solidFill>
-          <a:ln w="12700">
-            <a:solidFill>
-              <a:srgbClr val="404040"/>
-            </a:solidFill>
-          </a:ln>
-          <a:effectLst/>
-        </p:spPr>
-        <p:style>
-          <a:lnRef idx="1">
-            <a:schemeClr val="accent1"/>
-          </a:lnRef>
-          <a:fillRef idx="3">
-            <a:schemeClr val="accent1"/>
-          </a:fillRef>
-          <a:effectRef idx="2">
-            <a:schemeClr val="accent1"/>
-          </a:effectRef>
-          <a:fontRef idx="minor">
-            <a:schemeClr val="lt1"/>
-          </a:fontRef>
-        </p:style>
-        <p:txBody>
-          <a:bodyPr rtlCol="0" anchor="ctr"/>
-          <a:lstStyle/>
-          <a:p>
-            <a:pPr algn="ctr"/>
-          </a:p>
-        </p:txBody>
-      </p:sp>
-      <p:pic>
-        <p:nvPicPr>
-          <p:cNvPr id="16" name="Picture 15" descr="image.png"/>
-          <p:cNvPicPr>
-            <a:picLocks noChangeAspect="1"/>
-          </p:cNvPicPr>
-          <p:nvPr/>
-        </p:nvPicPr>
-        <p:blipFill>
-          <a:blip r:embed="rId6"/>
-          <a:stretch>
-            <a:fillRect/>
-          </a:stretch>
-        </p:blipFill>
-        <p:spPr>
-          <a:xfrm>
-            <a:off x="5074920" y="1353819"/>
-            <a:ext cx="2011680" cy="4470400"/>
-          </a:xfrm>
-          <a:prstGeom prst="rect">
-            <a:avLst/>
-          </a:prstGeom>
-        </p:spPr>
-      </p:pic>
-      <p:sp>
-        <p:nvSpPr>
-          <p:cNvPr id="17" name="TextBox 16"/>
-          <p:cNvSpPr txBox="1"/>
-          <p:nvPr/>
-        </p:nvSpPr>
-        <p:spPr>
-          <a:xfrm>
-            <a:off x="4965192" y="5943600"/>
-            <a:ext cx="2231136" cy="457200"/>
-          </a:xfrm>
-          <a:prstGeom prst="rect">
-            <a:avLst/>
-          </a:prstGeom>
-          <a:noFill/>
-        </p:spPr>
-        <p:txBody>
-          <a:bodyPr wrap="square" lIns="45720" rIns="45720" tIns="18288" bIns="18288" anchor="t">
-            <a:spAutoFit/>
-          </a:bodyPr>
-          <a:lstStyle/>
-          <a:p>
-            <a:pPr algn="ctr"/>
-            <a:r>
-              <a:rPr sz="1200" b="1" i="0">
-                <a:solidFill>
-                  <a:srgbClr val="1F4E79"/>
-                </a:solidFill>
-                <a:latin typeface="Calibri"/>
-              </a:rPr>
-              <a:t>P13 Ventas</a:t>
-            </a:r>
-          </a:p>
-        </p:txBody>
-      </p:sp>
-      <p:sp>
-        <p:nvSpPr>
-          <p:cNvPr id="18" name="Rectangle 17"/>
-          <p:cNvSpPr/>
-          <p:nvPr/>
-        </p:nvSpPr>
-        <p:spPr>
-          <a:xfrm>
-            <a:off x="7269480" y="1317243"/>
-            <a:ext cx="2084832" cy="4543552"/>
-          </a:xfrm>
-          <a:prstGeom prst="rect">
-            <a:avLst/>
-          </a:prstGeom>
-          <a:solidFill>
-            <a:srgbClr val="FFFFFF"/>
-          </a:solidFill>
-          <a:ln w="12700">
-            <a:solidFill>
-              <a:srgbClr val="404040"/>
-            </a:solidFill>
-          </a:ln>
-          <a:effectLst/>
-        </p:spPr>
-        <p:style>
-          <a:lnRef idx="1">
-            <a:schemeClr val="accent1"/>
-          </a:lnRef>
-          <a:fillRef idx="3">
-            <a:schemeClr val="accent1"/>
-          </a:fillRef>
-          <a:effectRef idx="2">
-            <a:schemeClr val="accent1"/>
-          </a:effectRef>
-          <a:fontRef idx="minor">
-            <a:schemeClr val="lt1"/>
-          </a:fontRef>
-        </p:style>
-        <p:txBody>
-          <a:bodyPr rtlCol="0" anchor="ctr"/>
-          <a:lstStyle/>
-          <a:p>
-            <a:pPr algn="ctr"/>
-          </a:p>
-        </p:txBody>
-      </p:sp>
-      <p:pic>
-        <p:nvPicPr>
-          <p:cNvPr id="19" name="Picture 18" descr="image.png"/>
-          <p:cNvPicPr>
-            <a:picLocks noChangeAspect="1"/>
-          </p:cNvPicPr>
-          <p:nvPr/>
-        </p:nvPicPr>
-        <p:blipFill>
-          <a:blip r:embed="rId7"/>
-          <a:stretch>
-            <a:fillRect/>
-          </a:stretch>
-        </p:blipFill>
-        <p:spPr>
-          <a:xfrm>
-            <a:off x="7306056" y="1353819"/>
-            <a:ext cx="2011680" cy="4470400"/>
-          </a:xfrm>
-          <a:prstGeom prst="rect">
-            <a:avLst/>
-          </a:prstGeom>
-        </p:spPr>
-      </p:pic>
-      <p:sp>
-        <p:nvSpPr>
-          <p:cNvPr id="20" name="TextBox 19"/>
-          <p:cNvSpPr txBox="1"/>
-          <p:nvPr/>
-        </p:nvSpPr>
-        <p:spPr>
-          <a:xfrm>
-            <a:off x="7196328" y="5943600"/>
-            <a:ext cx="2231136" cy="457200"/>
-          </a:xfrm>
-          <a:prstGeom prst="rect">
-            <a:avLst/>
-          </a:prstGeom>
-          <a:noFill/>
-        </p:spPr>
-        <p:txBody>
-          <a:bodyPr wrap="square" lIns="45720" rIns="45720" tIns="18288" bIns="18288" anchor="t">
-            <a:spAutoFit/>
-          </a:bodyPr>
-          <a:lstStyle/>
-          <a:p>
-            <a:pPr algn="ctr"/>
-            <a:r>
-              <a:rPr sz="1200" b="1" i="0">
-                <a:solidFill>
-                  <a:srgbClr val="1F4E79"/>
-                </a:solidFill>
-                <a:latin typeface="Calibri"/>
-              </a:rPr>
-              <a:t>P14 Categoría</a:t>
-            </a:r>
-          </a:p>
-        </p:txBody>
-      </p:sp>
-      <p:sp>
-        <p:nvSpPr>
-          <p:cNvPr id="21" name="Rectangle 20"/>
-          <p:cNvSpPr/>
-          <p:nvPr/>
-        </p:nvSpPr>
-        <p:spPr>
-          <a:xfrm>
-            <a:off x="9500616" y="1317243"/>
-            <a:ext cx="2084832" cy="4543552"/>
-          </a:xfrm>
-          <a:prstGeom prst="rect">
-            <a:avLst/>
-          </a:prstGeom>
-          <a:solidFill>
-            <a:srgbClr val="FFFFFF"/>
-          </a:solidFill>
-          <a:ln w="12700">
-            <a:solidFill>
-              <a:srgbClr val="404040"/>
-            </a:solidFill>
-          </a:ln>
-          <a:effectLst/>
-        </p:spPr>
-        <p:style>
-          <a:lnRef idx="1">
-            <a:schemeClr val="accent1"/>
-          </a:lnRef>
-          <a:fillRef idx="3">
-            <a:schemeClr val="accent1"/>
-          </a:fillRef>
-          <a:effectRef idx="2">
-            <a:schemeClr val="accent1"/>
-          </a:effectRef>
-          <a:fontRef idx="minor">
-            <a:schemeClr val="lt1"/>
-          </a:fontRef>
-        </p:style>
-        <p:txBody>
-          <a:bodyPr rtlCol="0" anchor="ctr"/>
-          <a:lstStyle/>
-          <a:p>
-            <a:pPr algn="ctr"/>
-          </a:p>
-        </p:txBody>
-      </p:sp>
-      <p:pic>
-        <p:nvPicPr>
-          <p:cNvPr id="22" name="Picture 21" descr="image.png"/>
-          <p:cNvPicPr>
-            <a:picLocks noChangeAspect="1"/>
-          </p:cNvPicPr>
-          <p:nvPr/>
-        </p:nvPicPr>
-        <p:blipFill>
-          <a:blip r:embed="rId8"/>
-          <a:stretch>
-            <a:fillRect/>
-          </a:stretch>
-        </p:blipFill>
-        <p:spPr>
-          <a:xfrm>
-            <a:off x="9537192" y="1353819"/>
-            <a:ext cx="2011680" cy="4470400"/>
-          </a:xfrm>
-          <a:prstGeom prst="rect">
-            <a:avLst/>
-          </a:prstGeom>
-        </p:spPr>
-      </p:pic>
-      <p:sp>
-        <p:nvSpPr>
-          <p:cNvPr id="23" name="TextBox 22"/>
-          <p:cNvSpPr txBox="1"/>
-          <p:nvPr/>
-        </p:nvSpPr>
-        <p:spPr>
-          <a:xfrm>
-            <a:off x="9427464" y="5943600"/>
-            <a:ext cx="2231136" cy="457200"/>
-          </a:xfrm>
-          <a:prstGeom prst="rect">
-            <a:avLst/>
-          </a:prstGeom>
-          <a:noFill/>
-        </p:spPr>
-        <p:txBody>
-          <a:bodyPr wrap="square" lIns="45720" rIns="45720" tIns="18288" bIns="18288" anchor="t">
-            <a:spAutoFit/>
-          </a:bodyPr>
-          <a:lstStyle/>
-          <a:p>
-            <a:pPr algn="ctr"/>
-            <a:r>
-              <a:rPr sz="1200" b="1" i="0">
-                <a:solidFill>
-                  <a:srgbClr val="1F4E79"/>
-                </a:solidFill>
-                <a:latin typeface="Calibri"/>
-              </a:rPr>
-              <a:t>P15 Vencimiento</a:t>
-            </a:r>
-          </a:p>
-        </p:txBody>
-      </p:sp>
-    </p:spTree>
-  </p:cSld>
-  <p:clrMapOvr>
-    <a:masterClrMapping/>
-  </p:clrMapOvr>
-</p:sld>
-</file>
-
-<file path=ppt/slides/slide14.xml><?xml version="1.0" encoding="utf-8"?>
-<p:sld xmlns:a="http://schemas.openxmlformats.org/drawingml/2006/main" xmlns:p="http://schemas.openxmlformats.org/presentationml/2006/main" xmlns:r="http://schemas.openxmlformats.org/officeDocument/2006/relationships">
-  <p:cSld>
-    <p:spTree>
-      <p:nvGrpSpPr>
-        <p:cNvPr id="1" name=""/>
-        <p:cNvGrpSpPr/>
-        <p:nvPr/>
-      </p:nvGrpSpPr>
-      <p:grpSpPr/>
-      <p:sp>
-        <p:nvSpPr>
-          <p:cNvPr id="2" name="TextBox 1"/>
-          <p:cNvSpPr txBox="1"/>
-          <p:nvPr/>
-        </p:nvSpPr>
-        <p:spPr>
-          <a:xfrm>
-            <a:off x="502920" y="201168"/>
-            <a:ext cx="7315200" cy="274320"/>
-          </a:xfrm>
-          <a:prstGeom prst="rect">
-            <a:avLst/>
-          </a:prstGeom>
-          <a:noFill/>
-        </p:spPr>
-        <p:txBody>
-          <a:bodyPr wrap="square" lIns="45720" rIns="45720" tIns="18288" bIns="18288" anchor="t">
-            <a:spAutoFit/>
-          </a:bodyPr>
-          <a:lstStyle/>
-          <a:p>
-            <a:pPr algn="l"/>
-            <a:r>
-              <a:rPr sz="1100" b="1" i="0">
-                <a:solidFill>
-                  <a:srgbClr val="C00000"/>
-                </a:solidFill>
-                <a:latin typeface="Calibri"/>
-              </a:rPr>
-              <a:t>LA APP EN EL TELÉFONO</a:t>
-            </a:r>
-          </a:p>
-        </p:txBody>
-      </p:sp>
-      <p:sp>
-        <p:nvSpPr>
-          <p:cNvPr id="3" name="TextBox 2"/>
-          <p:cNvSpPr txBox="1"/>
-          <p:nvPr/>
-        </p:nvSpPr>
-        <p:spPr>
-          <a:xfrm>
-            <a:off x="502920" y="457200"/>
-            <a:ext cx="9692640" cy="594360"/>
-          </a:xfrm>
-          <a:prstGeom prst="rect">
-            <a:avLst/>
-          </a:prstGeom>
-          <a:noFill/>
-        </p:spPr>
-        <p:txBody>
-          <a:bodyPr wrap="square" lIns="45720" rIns="45720" tIns="18288" bIns="18288" anchor="t">
-            <a:spAutoFit/>
-          </a:bodyPr>
-          <a:lstStyle/>
-          <a:p>
-            <a:pPr algn="l"/>
-            <a:r>
-              <a:rPr sz="2600" b="1" i="0">
-                <a:solidFill>
-                  <a:srgbClr val="1F4E79"/>
-                </a:solidFill>
-                <a:latin typeface="Calibri"/>
-              </a:rPr>
-              <a:t>Reporte, historial, ajustes y exportación</a:t>
-            </a:r>
-          </a:p>
-        </p:txBody>
-      </p:sp>
-      <p:sp>
-        <p:nvSpPr>
-          <p:cNvPr id="4" name="Rectangle 3"/>
-          <p:cNvSpPr/>
-          <p:nvPr/>
-        </p:nvSpPr>
-        <p:spPr>
-          <a:xfrm>
-            <a:off x="502920" y="1051560"/>
-            <a:ext cx="1371600" cy="45720"/>
-          </a:xfrm>
-          <a:prstGeom prst="rect">
-            <a:avLst/>
-          </a:prstGeom>
-          <a:solidFill>
-            <a:srgbClr val="C00000"/>
-          </a:solidFill>
-          <a:ln>
-            <a:noFill/>
-          </a:ln>
-          <a:effectLst/>
-        </p:spPr>
-        <p:style>
-          <a:lnRef idx="1">
-            <a:schemeClr val="accent1"/>
-          </a:lnRef>
-          <a:fillRef idx="3">
-            <a:schemeClr val="accent1"/>
-          </a:fillRef>
-          <a:effectRef idx="2">
-            <a:schemeClr val="accent1"/>
-          </a:effectRef>
-          <a:fontRef idx="minor">
-            <a:schemeClr val="lt1"/>
-          </a:fontRef>
-        </p:style>
-        <p:txBody>
-          <a:bodyPr rtlCol="0" anchor="ctr"/>
-          <a:lstStyle/>
-          <a:p>
-            <a:pPr algn="ctr"/>
-          </a:p>
-        </p:txBody>
-      </p:sp>
-      <p:pic>
-        <p:nvPicPr>
-          <p:cNvPr id="5" name="Picture 4" descr="logo_utp.png"/>
-          <p:cNvPicPr>
-            <a:picLocks noChangeAspect="1"/>
-          </p:cNvPicPr>
-          <p:nvPr/>
-        </p:nvPicPr>
-        <p:blipFill>
-          <a:blip r:embed="rId2"/>
-          <a:stretch>
-            <a:fillRect/>
-          </a:stretch>
-        </p:blipFill>
-        <p:spPr>
-          <a:xfrm>
-            <a:off x="10607040" y="228600"/>
-            <a:ext cx="1188720" cy="316382"/>
-          </a:xfrm>
-          <a:prstGeom prst="rect">
-            <a:avLst/>
-          </a:prstGeom>
-        </p:spPr>
-      </p:pic>
-      <p:sp>
-        <p:nvSpPr>
-          <p:cNvPr id="6" name="Rectangle 5"/>
-          <p:cNvSpPr/>
-          <p:nvPr/>
-        </p:nvSpPr>
-        <p:spPr>
-          <a:xfrm>
-            <a:off x="0" y="6492240"/>
-            <a:ext cx="12191695" cy="365760"/>
-          </a:xfrm>
-          <a:prstGeom prst="rect">
-            <a:avLst/>
-          </a:prstGeom>
-          <a:solidFill>
-            <a:srgbClr val="C00000"/>
-          </a:solidFill>
-          <a:ln>
-            <a:noFill/>
-          </a:ln>
-          <a:effectLst/>
-        </p:spPr>
-        <p:style>
-          <a:lnRef idx="1">
-            <a:schemeClr val="accent1"/>
-          </a:lnRef>
-          <a:fillRef idx="3">
-            <a:schemeClr val="accent1"/>
-          </a:fillRef>
-          <a:effectRef idx="2">
-            <a:schemeClr val="accent1"/>
-          </a:effectRef>
-          <a:fontRef idx="minor">
-            <a:schemeClr val="lt1"/>
-          </a:fontRef>
-        </p:style>
-        <p:txBody>
-          <a:bodyPr rtlCol="0" anchor="ctr"/>
-          <a:lstStyle/>
-          <a:p>
-            <a:pPr algn="ctr"/>
-          </a:p>
-        </p:txBody>
-      </p:sp>
-      <p:sp>
-        <p:nvSpPr>
-          <p:cNvPr id="7" name="TextBox 6"/>
-          <p:cNvSpPr txBox="1"/>
-          <p:nvPr/>
-        </p:nvSpPr>
-        <p:spPr>
-          <a:xfrm>
-            <a:off x="365760" y="6492240"/>
-            <a:ext cx="7315200" cy="365760"/>
-          </a:xfrm>
-          <a:prstGeom prst="rect">
-            <a:avLst/>
-          </a:prstGeom>
-          <a:noFill/>
-        </p:spPr>
-        <p:txBody>
-          <a:bodyPr wrap="square" lIns="45720" rIns="45720" tIns="18288" bIns="18288" anchor="ctr">
-            <a:spAutoFit/>
-          </a:bodyPr>
-          <a:lstStyle/>
-          <a:p>
-            <a:pPr algn="l"/>
-            <a:r>
-              <a:rPr sz="1100" b="0" i="0">
-                <a:solidFill>
-                  <a:srgbClr val="FFFFFF"/>
-                </a:solidFill>
-                <a:latin typeface="Calibri"/>
-              </a:rPr>
-              <a:t>Facturas S20  ·  Avance de Proyecto Final 3</a:t>
-            </a:r>
-          </a:p>
-        </p:txBody>
-      </p:sp>
-      <p:sp>
-        <p:nvSpPr>
-          <p:cNvPr id="8" name="TextBox 7"/>
-          <p:cNvSpPr txBox="1"/>
-          <p:nvPr/>
-        </p:nvSpPr>
-        <p:spPr>
-          <a:xfrm>
-            <a:off x="11247120" y="6492240"/>
-            <a:ext cx="548640" cy="365760"/>
-          </a:xfrm>
-          <a:prstGeom prst="rect">
-            <a:avLst/>
-          </a:prstGeom>
-          <a:noFill/>
-        </p:spPr>
-        <p:txBody>
-          <a:bodyPr wrap="square" lIns="45720" rIns="45720" tIns="18288" bIns="18288" anchor="ctr">
-            <a:spAutoFit/>
-          </a:bodyPr>
-          <a:lstStyle/>
-          <a:p>
-            <a:pPr algn="r"/>
-            <a:r>
-              <a:rPr sz="1100" b="0" i="0">
-                <a:solidFill>
-                  <a:srgbClr val="FFFFFF"/>
-                </a:solidFill>
-                <a:latin typeface="Calibri"/>
-              </a:rPr>
-              <a:t>14</a:t>
-            </a:r>
-          </a:p>
-        </p:txBody>
-      </p:sp>
-      <p:sp>
-        <p:nvSpPr>
-          <p:cNvPr id="9" name="Rectangle 8"/>
-          <p:cNvSpPr/>
-          <p:nvPr/>
-        </p:nvSpPr>
-        <p:spPr>
-          <a:xfrm>
-            <a:off x="576072" y="1317243"/>
-            <a:ext cx="2084832" cy="4543552"/>
-          </a:xfrm>
-          <a:prstGeom prst="rect">
-            <a:avLst/>
-          </a:prstGeom>
-          <a:solidFill>
-            <a:srgbClr val="FFFFFF"/>
-          </a:solidFill>
-          <a:ln w="12700">
-            <a:solidFill>
-              <a:srgbClr val="404040"/>
-            </a:solidFill>
-          </a:ln>
-          <a:effectLst/>
-        </p:spPr>
-        <p:style>
-          <a:lnRef idx="1">
-            <a:schemeClr val="accent1"/>
-          </a:lnRef>
-          <a:fillRef idx="3">
-            <a:schemeClr val="accent1"/>
-          </a:fillRef>
-          <a:effectRef idx="2">
-            <a:schemeClr val="accent1"/>
-          </a:effectRef>
-          <a:fontRef idx="minor">
-            <a:schemeClr val="lt1"/>
-          </a:fontRef>
-        </p:style>
-        <p:txBody>
-          <a:bodyPr rtlCol="0" anchor="ctr"/>
-          <a:lstStyle/>
-          <a:p>
-            <a:pPr algn="ctr"/>
-          </a:p>
-        </p:txBody>
-      </p:sp>
-      <p:pic>
-        <p:nvPicPr>
-          <p:cNvPr id="10" name="Picture 9" descr="image.png"/>
-          <p:cNvPicPr>
-            <a:picLocks noChangeAspect="1"/>
-          </p:cNvPicPr>
-          <p:nvPr/>
-        </p:nvPicPr>
-        <p:blipFill>
-          <a:blip r:embed="rId4"/>
-          <a:stretch>
-            <a:fillRect/>
-          </a:stretch>
-        </p:blipFill>
-        <p:spPr>
-          <a:xfrm>
-            <a:off x="612648" y="1353819"/>
-            <a:ext cx="2011680" cy="4470400"/>
-          </a:xfrm>
-          <a:prstGeom prst="rect">
-            <a:avLst/>
-          </a:prstGeom>
-        </p:spPr>
-      </p:pic>
-      <p:sp>
-        <p:nvSpPr>
-          <p:cNvPr id="11" name="TextBox 10"/>
-          <p:cNvSpPr txBox="1"/>
-          <p:nvPr/>
-        </p:nvSpPr>
-        <p:spPr>
-          <a:xfrm>
-            <a:off x="502920" y="5943600"/>
-            <a:ext cx="2231136" cy="457200"/>
-          </a:xfrm>
-          <a:prstGeom prst="rect">
-            <a:avLst/>
-          </a:prstGeom>
-          <a:noFill/>
-        </p:spPr>
-        <p:txBody>
-          <a:bodyPr wrap="square" lIns="45720" rIns="45720" tIns="18288" bIns="18288" anchor="t">
-            <a:spAutoFit/>
-          </a:bodyPr>
-          <a:lstStyle/>
-          <a:p>
-            <a:pPr algn="ctr"/>
-            <a:r>
-              <a:rPr sz="1200" b="1" i="0">
-                <a:solidFill>
-                  <a:srgbClr val="1F4E79"/>
-                </a:solidFill>
-                <a:latin typeface="Calibri"/>
-              </a:rPr>
-              <a:t>P16 Reporte</a:t>
-            </a:r>
-          </a:p>
-        </p:txBody>
-      </p:sp>
-      <p:sp>
-        <p:nvSpPr>
-          <p:cNvPr id="12" name="Rectangle 11"/>
-          <p:cNvSpPr/>
-          <p:nvPr/>
-        </p:nvSpPr>
-        <p:spPr>
-          <a:xfrm>
-            <a:off x="2807208" y="1317243"/>
-            <a:ext cx="2084832" cy="4543552"/>
-          </a:xfrm>
-          <a:prstGeom prst="rect">
-            <a:avLst/>
-          </a:prstGeom>
-          <a:solidFill>
-            <a:srgbClr val="FFFFFF"/>
-          </a:solidFill>
-          <a:ln w="12700">
-            <a:solidFill>
-              <a:srgbClr val="404040"/>
-            </a:solidFill>
-          </a:ln>
-          <a:effectLst/>
-        </p:spPr>
-        <p:style>
-          <a:lnRef idx="1">
-            <a:schemeClr val="accent1"/>
-          </a:lnRef>
-          <a:fillRef idx="3">
-            <a:schemeClr val="accent1"/>
-          </a:fillRef>
-          <a:effectRef idx="2">
-            <a:schemeClr val="accent1"/>
-          </a:effectRef>
-          <a:fontRef idx="minor">
-            <a:schemeClr val="lt1"/>
-          </a:fontRef>
-        </p:style>
-        <p:txBody>
-          <a:bodyPr rtlCol="0" anchor="ctr"/>
-          <a:lstStyle/>
-          <a:p>
-            <a:pPr algn="ctr"/>
-          </a:p>
-        </p:txBody>
-      </p:sp>
-      <p:pic>
-        <p:nvPicPr>
-          <p:cNvPr id="13" name="Picture 12" descr="image.png"/>
-          <p:cNvPicPr>
-            <a:picLocks noChangeAspect="1"/>
-          </p:cNvPicPr>
-          <p:nvPr/>
-        </p:nvPicPr>
-        <p:blipFill>
-          <a:blip r:embed="rId5"/>
-          <a:stretch>
-            <a:fillRect/>
-          </a:stretch>
-        </p:blipFill>
-        <p:spPr>
-          <a:xfrm>
-            <a:off x="2843784" y="1353819"/>
-            <a:ext cx="2011680" cy="4470400"/>
-          </a:xfrm>
-          <a:prstGeom prst="rect">
-            <a:avLst/>
-          </a:prstGeom>
-        </p:spPr>
-      </p:pic>
-      <p:sp>
-        <p:nvSpPr>
-          <p:cNvPr id="14" name="TextBox 13"/>
-          <p:cNvSpPr txBox="1"/>
-          <p:nvPr/>
-        </p:nvSpPr>
-        <p:spPr>
-          <a:xfrm>
-            <a:off x="2734056" y="5943600"/>
-            <a:ext cx="2231136" cy="457200"/>
-          </a:xfrm>
-          <a:prstGeom prst="rect">
-            <a:avLst/>
-          </a:prstGeom>
-          <a:noFill/>
-        </p:spPr>
-        <p:txBody>
-          <a:bodyPr wrap="square" lIns="45720" rIns="45720" tIns="18288" bIns="18288" anchor="t">
-            <a:spAutoFit/>
-          </a:bodyPr>
-          <a:lstStyle/>
-          <a:p>
-            <a:pPr algn="ctr"/>
-            <a:r>
-              <a:rPr sz="1200" b="1" i="0">
-                <a:solidFill>
-                  <a:srgbClr val="1F4E79"/>
-                </a:solidFill>
-                <a:latin typeface="Calibri"/>
-              </a:rPr>
-              <a:t>P17 Cierre</a:t>
-            </a:r>
-          </a:p>
-        </p:txBody>
-      </p:sp>
-      <p:sp>
-        <p:nvSpPr>
-          <p:cNvPr id="15" name="Rectangle 14"/>
-          <p:cNvSpPr/>
-          <p:nvPr/>
-        </p:nvSpPr>
-        <p:spPr>
-          <a:xfrm>
-            <a:off x="5038344" y="1317243"/>
-            <a:ext cx="2084832" cy="4543552"/>
-          </a:xfrm>
-          <a:prstGeom prst="rect">
-            <a:avLst/>
-          </a:prstGeom>
-          <a:solidFill>
-            <a:srgbClr val="FFFFFF"/>
-          </a:solidFill>
-          <a:ln w="12700">
-            <a:solidFill>
-              <a:srgbClr val="404040"/>
-            </a:solidFill>
-          </a:ln>
-          <a:effectLst/>
-        </p:spPr>
-        <p:style>
-          <a:lnRef idx="1">
-            <a:schemeClr val="accent1"/>
-          </a:lnRef>
-          <a:fillRef idx="3">
-            <a:schemeClr val="accent1"/>
-          </a:fillRef>
-          <a:effectRef idx="2">
-            <a:schemeClr val="accent1"/>
-          </a:effectRef>
-          <a:fontRef idx="minor">
-            <a:schemeClr val="lt1"/>
-          </a:fontRef>
-        </p:style>
-        <p:txBody>
-          <a:bodyPr rtlCol="0" anchor="ctr"/>
-          <a:lstStyle/>
-          <a:p>
-            <a:pPr algn="ctr"/>
-          </a:p>
-        </p:txBody>
-      </p:sp>
-      <p:pic>
-        <p:nvPicPr>
-          <p:cNvPr id="16" name="Picture 15" descr="image.png"/>
-          <p:cNvPicPr>
-            <a:picLocks noChangeAspect="1"/>
-          </p:cNvPicPr>
-          <p:nvPr/>
-        </p:nvPicPr>
-        <p:blipFill>
-          <a:blip r:embed="rId6"/>
-          <a:stretch>
-            <a:fillRect/>
-          </a:stretch>
-        </p:blipFill>
-        <p:spPr>
-          <a:xfrm>
-            <a:off x="5074920" y="1353819"/>
-            <a:ext cx="2011680" cy="4470400"/>
-          </a:xfrm>
-          <a:prstGeom prst="rect">
-            <a:avLst/>
-          </a:prstGeom>
-        </p:spPr>
-      </p:pic>
-      <p:sp>
-        <p:nvSpPr>
-          <p:cNvPr id="17" name="TextBox 16"/>
-          <p:cNvSpPr txBox="1"/>
-          <p:nvPr/>
-        </p:nvSpPr>
-        <p:spPr>
-          <a:xfrm>
-            <a:off x="4965192" y="5943600"/>
-            <a:ext cx="2231136" cy="457200"/>
-          </a:xfrm>
-          <a:prstGeom prst="rect">
-            <a:avLst/>
-          </a:prstGeom>
-          <a:noFill/>
-        </p:spPr>
-        <p:txBody>
-          <a:bodyPr wrap="square" lIns="45720" rIns="45720" tIns="18288" bIns="18288" anchor="t">
-            <a:spAutoFit/>
-          </a:bodyPr>
-          <a:lstStyle/>
-          <a:p>
-            <a:pPr algn="ctr"/>
-            <a:r>
-              <a:rPr sz="1200" b="1" i="0">
-                <a:solidFill>
-                  <a:srgbClr val="1F4E79"/>
-                </a:solidFill>
-                <a:latin typeface="Calibri"/>
-              </a:rPr>
-              <a:t>P18 Ajustes</a:t>
-            </a:r>
-          </a:p>
-        </p:txBody>
-      </p:sp>
-      <p:sp>
-        <p:nvSpPr>
-          <p:cNvPr id="18" name="Rectangle 17"/>
-          <p:cNvSpPr/>
-          <p:nvPr/>
-        </p:nvSpPr>
-        <p:spPr>
-          <a:xfrm>
-            <a:off x="7269480" y="1317243"/>
-            <a:ext cx="2084832" cy="4543552"/>
-          </a:xfrm>
-          <a:prstGeom prst="rect">
-            <a:avLst/>
-          </a:prstGeom>
-          <a:solidFill>
-            <a:srgbClr val="FFFFFF"/>
-          </a:solidFill>
-          <a:ln w="12700">
-            <a:solidFill>
-              <a:srgbClr val="404040"/>
-            </a:solidFill>
-          </a:ln>
-          <a:effectLst/>
-        </p:spPr>
-        <p:style>
-          <a:lnRef idx="1">
-            <a:schemeClr val="accent1"/>
-          </a:lnRef>
-          <a:fillRef idx="3">
-            <a:schemeClr val="accent1"/>
-          </a:fillRef>
-          <a:effectRef idx="2">
-            <a:schemeClr val="accent1"/>
-          </a:effectRef>
-          <a:fontRef idx="minor">
-            <a:schemeClr val="lt1"/>
-          </a:fontRef>
-        </p:style>
-        <p:txBody>
-          <a:bodyPr rtlCol="0" anchor="ctr"/>
-          <a:lstStyle/>
-          <a:p>
-            <a:pPr algn="ctr"/>
-          </a:p>
-        </p:txBody>
-      </p:sp>
-      <p:pic>
-        <p:nvPicPr>
-          <p:cNvPr id="19" name="Picture 18" descr="image.png"/>
-          <p:cNvPicPr>
-            <a:picLocks noChangeAspect="1"/>
-          </p:cNvPicPr>
-          <p:nvPr/>
-        </p:nvPicPr>
-        <p:blipFill>
-          <a:blip r:embed="rId7"/>
-          <a:stretch>
-            <a:fillRect/>
-          </a:stretch>
-        </p:blipFill>
-        <p:spPr>
-          <a:xfrm>
-            <a:off x="7306056" y="1353819"/>
-            <a:ext cx="2011680" cy="4470400"/>
-          </a:xfrm>
-          <a:prstGeom prst="rect">
-            <a:avLst/>
-          </a:prstGeom>
-        </p:spPr>
-      </p:pic>
-      <p:sp>
-        <p:nvSpPr>
-          <p:cNvPr id="20" name="TextBox 19"/>
-          <p:cNvSpPr txBox="1"/>
-          <p:nvPr/>
-        </p:nvSpPr>
-        <p:spPr>
-          <a:xfrm>
-            <a:off x="7196328" y="5943600"/>
-            <a:ext cx="2231136" cy="457200"/>
-          </a:xfrm>
-          <a:prstGeom prst="rect">
-            <a:avLst/>
-          </a:prstGeom>
-          <a:noFill/>
-        </p:spPr>
-        <p:txBody>
-          <a:bodyPr wrap="square" lIns="45720" rIns="45720" tIns="18288" bIns="18288" anchor="t">
-            <a:spAutoFit/>
-          </a:bodyPr>
-          <a:lstStyle/>
-          <a:p>
-            <a:pPr algn="ctr"/>
-            <a:r>
-              <a:rPr sz="1200" b="1" i="0">
-                <a:solidFill>
-                  <a:srgbClr val="1F4E79"/>
-                </a:solidFill>
-                <a:latin typeface="Calibri"/>
-              </a:rPr>
-              <a:t>P19 Registro manual</a:t>
-            </a:r>
-          </a:p>
-        </p:txBody>
-      </p:sp>
-      <p:sp>
-        <p:nvSpPr>
-          <p:cNvPr id="21" name="Rectangle 20"/>
-          <p:cNvSpPr/>
-          <p:nvPr/>
-        </p:nvSpPr>
-        <p:spPr>
-          <a:xfrm>
-            <a:off x="9500616" y="1317243"/>
-            <a:ext cx="2084832" cy="4543552"/>
-          </a:xfrm>
-          <a:prstGeom prst="rect">
-            <a:avLst/>
-          </a:prstGeom>
-          <a:solidFill>
-            <a:srgbClr val="FFFFFF"/>
-          </a:solidFill>
-          <a:ln w="12700">
-            <a:solidFill>
-              <a:srgbClr val="404040"/>
-            </a:solidFill>
-          </a:ln>
-          <a:effectLst/>
-        </p:spPr>
-        <p:style>
-          <a:lnRef idx="1">
-            <a:schemeClr val="accent1"/>
-          </a:lnRef>
-          <a:fillRef idx="3">
-            <a:schemeClr val="accent1"/>
-          </a:fillRef>
-          <a:effectRef idx="2">
-            <a:schemeClr val="accent1"/>
-          </a:effectRef>
-          <a:fontRef idx="minor">
-            <a:schemeClr val="lt1"/>
-          </a:fontRef>
-        </p:style>
-        <p:txBody>
-          <a:bodyPr rtlCol="0" anchor="ctr"/>
-          <a:lstStyle/>
-          <a:p>
-            <a:pPr algn="ctr"/>
-          </a:p>
-        </p:txBody>
-      </p:sp>
-      <p:pic>
-        <p:nvPicPr>
-          <p:cNvPr id="22" name="Picture 21" descr="image.png"/>
-          <p:cNvPicPr>
-            <a:picLocks noChangeAspect="1"/>
-          </p:cNvPicPr>
-          <p:nvPr/>
-        </p:nvPicPr>
-        <p:blipFill>
-          <a:blip r:embed="rId8"/>
-          <a:stretch>
-            <a:fillRect/>
-          </a:stretch>
-        </p:blipFill>
-        <p:spPr>
-          <a:xfrm>
-            <a:off x="9537192" y="1353819"/>
-            <a:ext cx="2011680" cy="4470400"/>
-          </a:xfrm>
-          <a:prstGeom prst="rect">
-            <a:avLst/>
-          </a:prstGeom>
-        </p:spPr>
-      </p:pic>
-      <p:sp>
-        <p:nvSpPr>
-          <p:cNvPr id="23" name="TextBox 22"/>
-          <p:cNvSpPr txBox="1"/>
-          <p:nvPr/>
-        </p:nvSpPr>
-        <p:spPr>
-          <a:xfrm>
-            <a:off x="9427464" y="5943600"/>
-            <a:ext cx="2231136" cy="457200"/>
-          </a:xfrm>
-          <a:prstGeom prst="rect">
-            <a:avLst/>
-          </a:prstGeom>
-          <a:noFill/>
-        </p:spPr>
-        <p:txBody>
-          <a:bodyPr wrap="square" lIns="45720" rIns="45720" tIns="18288" bIns="18288" anchor="t">
+          <a:bodyPr wrap="square" lIns="45720" tIns="18288" rIns="45720" bIns="18288" anchor="t">
             <a:spAutoFit/>
           </a:bodyPr>
           <a:lstStyle/>
@@ -8643,7 +6910,7 @@
 </file>
 
 <file path=ppt/slides/slide2.xml><?xml version="1.0" encoding="utf-8"?>
-<p:sld xmlns:a="http://schemas.openxmlformats.org/drawingml/2006/main" xmlns:p="http://schemas.openxmlformats.org/presentationml/2006/main" xmlns:r="http://schemas.openxmlformats.org/officeDocument/2006/relationships">
+<p:sld xmlns:a="http://schemas.openxmlformats.org/drawingml/2006/main" xmlns:r="http://schemas.openxmlformats.org/officeDocument/2006/relationships" xmlns:p="http://schemas.openxmlformats.org/presentationml/2006/main">
   <p:cSld>
     <p:spTree>
       <p:nvGrpSpPr>
@@ -8651,7 +6918,14 @@
         <p:cNvGrpSpPr/>
         <p:nvPr/>
       </p:nvGrpSpPr>
-      <p:grpSpPr/>
+      <p:grpSpPr>
+        <a:xfrm>
+          <a:off x="0" y="0"/>
+          <a:ext cx="0" cy="0"/>
+          <a:chOff x="0" y="0"/>
+          <a:chExt cx="0" cy="0"/>
+        </a:xfrm>
+      </p:grpSpPr>
       <p:sp>
         <p:nvSpPr>
           <p:cNvPr id="2" name="TextBox 1"/>
@@ -8669,7 +6943,7 @@
           <a:noFill/>
         </p:spPr>
         <p:txBody>
-          <a:bodyPr wrap="square" lIns="45720" rIns="45720" tIns="18288" bIns="18288" anchor="t">
+          <a:bodyPr wrap="square" lIns="45720" tIns="18288" rIns="45720" bIns="18288" anchor="t">
             <a:spAutoFit/>
           </a:bodyPr>
           <a:lstStyle/>
@@ -8704,7 +6978,7 @@
           <a:noFill/>
         </p:spPr>
         <p:txBody>
-          <a:bodyPr wrap="square" lIns="45720" rIns="45720" tIns="18288" bIns="18288" anchor="t">
+          <a:bodyPr wrap="square" lIns="45720" tIns="18288" rIns="45720" bIns="18288" anchor="t">
             <a:spAutoFit/>
           </a:bodyPr>
           <a:lstStyle/>
@@ -8763,6 +7037,7 @@
           <a:lstStyle/>
           <a:p>
             <a:pPr algn="ctr"/>
+            <a:endParaRPr/>
           </a:p>
         </p:txBody>
       </p:sp>
@@ -8775,7 +7050,7 @@
           <p:nvPr/>
         </p:nvPicPr>
         <p:blipFill>
-          <a:blip r:embed="rId2"/>
+          <a:blip r:embed="rId3"/>
           <a:stretch>
             <a:fillRect/>
           </a:stretch>
@@ -8831,6 +7106,7 @@
           <a:lstStyle/>
           <a:p>
             <a:pPr algn="ctr"/>
+            <a:endParaRPr/>
           </a:p>
         </p:txBody>
       </p:sp>
@@ -8851,7 +7127,7 @@
           <a:noFill/>
         </p:spPr>
         <p:txBody>
-          <a:bodyPr wrap="square" lIns="45720" rIns="45720" tIns="18288" bIns="18288" anchor="ctr">
+          <a:bodyPr wrap="square" lIns="45720" tIns="18288" rIns="45720" bIns="18288" anchor="ctr">
             <a:spAutoFit/>
           </a:bodyPr>
           <a:lstStyle/>
@@ -8886,7 +7162,7 @@
           <a:noFill/>
         </p:spPr>
         <p:txBody>
-          <a:bodyPr wrap="square" lIns="45720" rIns="45720" tIns="18288" bIns="18288" anchor="ctr">
+          <a:bodyPr wrap="square" lIns="45720" tIns="18288" rIns="45720" bIns="18288" anchor="ctr">
             <a:spAutoFit/>
           </a:bodyPr>
           <a:lstStyle/>
@@ -8923,8 +7199,20 @@
                 <a:tableStyleId>{5C22544A-7EE6-4342-B048-85BDC9FD1C3A}</a:tableStyleId>
               </a:tblPr>
               <a:tblGrid>
-                <a:gridCol w="2011680"/>
-                <a:gridCol w="9144000"/>
+                <a:gridCol w="2011680">
+                  <a:extLst>
+                    <a:ext uri="{9D8B030D-6E8A-4147-A177-3AD203B41FA5}">
+                      <a16:colId xmlns:a16="http://schemas.microsoft.com/office/drawing/2014/main" val="20000"/>
+                    </a:ext>
+                  </a:extLst>
+                </a:gridCol>
+                <a:gridCol w="9144000">
+                  <a:extLst>
+                    <a:ext uri="{9D8B030D-6E8A-4147-A177-3AD203B41FA5}">
+                      <a16:colId xmlns:a16="http://schemas.microsoft.com/office/drawing/2014/main" val="20001"/>
+                    </a:ext>
+                  </a:extLst>
+                </a:gridCol>
               </a:tblGrid>
               <a:tr h="438912">
                 <a:tc>
@@ -8973,6 +7261,11 @@
                     </a:solidFill>
                   </a:tcPr>
                 </a:tc>
+                <a:extLst>
+                  <a:ext uri="{0D108BD9-81ED-4DB2-BD59-A6C34878D82A}">
+                    <a16:rowId xmlns:a16="http://schemas.microsoft.com/office/drawing/2014/main" val="10000"/>
+                  </a:ext>
+                </a:extLst>
               </a:tr>
               <a:tr h="438912">
                 <a:tc>
@@ -9020,6 +7313,11 @@
                     </a:solidFill>
                   </a:tcPr>
                 </a:tc>
+                <a:extLst>
+                  <a:ext uri="{0D108BD9-81ED-4DB2-BD59-A6C34878D82A}">
+                    <a16:rowId xmlns:a16="http://schemas.microsoft.com/office/drawing/2014/main" val="10001"/>
+                  </a:ext>
+                </a:extLst>
               </a:tr>
               <a:tr h="438912">
                 <a:tc>
@@ -9067,6 +7365,11 @@
                     </a:solidFill>
                   </a:tcPr>
                 </a:tc>
+                <a:extLst>
+                  <a:ext uri="{0D108BD9-81ED-4DB2-BD59-A6C34878D82A}">
+                    <a16:rowId xmlns:a16="http://schemas.microsoft.com/office/drawing/2014/main" val="10002"/>
+                  </a:ext>
+                </a:extLst>
               </a:tr>
               <a:tr h="438912">
                 <a:tc>
@@ -9114,6 +7417,11 @@
                     </a:solidFill>
                   </a:tcPr>
                 </a:tc>
+                <a:extLst>
+                  <a:ext uri="{0D108BD9-81ED-4DB2-BD59-A6C34878D82A}">
+                    <a16:rowId xmlns:a16="http://schemas.microsoft.com/office/drawing/2014/main" val="10003"/>
+                  </a:ext>
+                </a:extLst>
               </a:tr>
               <a:tr h="438912">
                 <a:tc>
@@ -9161,6 +7469,11 @@
                     </a:solidFill>
                   </a:tcPr>
                 </a:tc>
+                <a:extLst>
+                  <a:ext uri="{0D108BD9-81ED-4DB2-BD59-A6C34878D82A}">
+                    <a16:rowId xmlns:a16="http://schemas.microsoft.com/office/drawing/2014/main" val="10004"/>
+                  </a:ext>
+                </a:extLst>
               </a:tr>
               <a:tr h="438912">
                 <a:tc>
@@ -9208,6 +7521,11 @@
                     </a:solidFill>
                   </a:tcPr>
                 </a:tc>
+                <a:extLst>
+                  <a:ext uri="{0D108BD9-81ED-4DB2-BD59-A6C34878D82A}">
+                    <a16:rowId xmlns:a16="http://schemas.microsoft.com/office/drawing/2014/main" val="10005"/>
+                  </a:ext>
+                </a:extLst>
               </a:tr>
               <a:tr h="438912">
                 <a:tc>
@@ -9255,6 +7573,11 @@
                     </a:solidFill>
                   </a:tcPr>
                 </a:tc>
+                <a:extLst>
+                  <a:ext uri="{0D108BD9-81ED-4DB2-BD59-A6C34878D82A}">
+                    <a16:rowId xmlns:a16="http://schemas.microsoft.com/office/drawing/2014/main" val="10006"/>
+                  </a:ext>
+                </a:extLst>
               </a:tr>
               <a:tr h="438912">
                 <a:tc>
@@ -9302,6 +7625,11 @@
                     </a:solidFill>
                   </a:tcPr>
                 </a:tc>
+                <a:extLst>
+                  <a:ext uri="{0D108BD9-81ED-4DB2-BD59-A6C34878D82A}">
+                    <a16:rowId xmlns:a16="http://schemas.microsoft.com/office/drawing/2014/main" val="10007"/>
+                  </a:ext>
+                </a:extLst>
               </a:tr>
               <a:tr h="438912">
                 <a:tc>
@@ -9333,14 +7661,173 @@
                     <a:p>
                       <a:pPr algn="l"/>
                       <a:r>
-                        <a:rPr sz="1200" b="0">
+                        <a:rPr sz="1200" b="0" dirty="0">
                           <a:solidFill>
                             <a:srgbClr val="262626"/>
                           </a:solidFill>
                           <a:latin typeface="Calibri"/>
                         </a:rPr>
-                        <a:t>Total y categoría iguales al cálculo de control; exactitud ≥ 90 % por campo; lectura ≤ 20 s en el teléfono de referencia</a:t>
+                        <a:t>Total y </a:t>
                       </a:r>
+                      <a:r>
+                        <a:rPr sz="1200" b="0" dirty="0" err="1">
+                          <a:solidFill>
+                            <a:srgbClr val="262626"/>
+                          </a:solidFill>
+                          <a:latin typeface="Calibri"/>
+                        </a:rPr>
+                        <a:t>categoría</a:t>
+                      </a:r>
+                      <a:r>
+                        <a:rPr sz="1200" b="0" dirty="0">
+                          <a:solidFill>
+                            <a:srgbClr val="262626"/>
+                          </a:solidFill>
+                          <a:latin typeface="Calibri"/>
+                        </a:rPr>
+                        <a:t> </a:t>
+                      </a:r>
+                      <a:r>
+                        <a:rPr sz="1200" b="0" dirty="0" err="1">
+                          <a:solidFill>
+                            <a:srgbClr val="262626"/>
+                          </a:solidFill>
+                          <a:latin typeface="Calibri"/>
+                        </a:rPr>
+                        <a:t>iguales</a:t>
+                      </a:r>
+                      <a:r>
+                        <a:rPr sz="1200" b="0" dirty="0">
+                          <a:solidFill>
+                            <a:srgbClr val="262626"/>
+                          </a:solidFill>
+                          <a:latin typeface="Calibri"/>
+                        </a:rPr>
+                        <a:t> al </a:t>
+                      </a:r>
+                      <a:r>
+                        <a:rPr sz="1200" b="0" dirty="0" err="1">
+                          <a:solidFill>
+                            <a:srgbClr val="262626"/>
+                          </a:solidFill>
+                          <a:latin typeface="Calibri"/>
+                        </a:rPr>
+                        <a:t>cálculo</a:t>
+                      </a:r>
+                      <a:r>
+                        <a:rPr sz="1200" b="0" dirty="0">
+                          <a:solidFill>
+                            <a:srgbClr val="262626"/>
+                          </a:solidFill>
+                          <a:latin typeface="Calibri"/>
+                        </a:rPr>
+                        <a:t> de control; </a:t>
+                      </a:r>
+                      <a:r>
+                        <a:rPr sz="1200" b="0" dirty="0" err="1">
+                          <a:solidFill>
+                            <a:srgbClr val="262626"/>
+                          </a:solidFill>
+                          <a:latin typeface="Calibri"/>
+                        </a:rPr>
+                        <a:t>exactitud</a:t>
+                      </a:r>
+                      <a:r>
+                        <a:rPr sz="1200" b="0" dirty="0">
+                          <a:solidFill>
+                            <a:srgbClr val="262626"/>
+                          </a:solidFill>
+                          <a:latin typeface="Calibri"/>
+                        </a:rPr>
+                        <a:t> ≥ 90 % </a:t>
+                      </a:r>
+                      <a:r>
+                        <a:rPr sz="1200" b="0" dirty="0" err="1">
+                          <a:solidFill>
+                            <a:srgbClr val="262626"/>
+                          </a:solidFill>
+                          <a:latin typeface="Calibri"/>
+                        </a:rPr>
+                        <a:t>por</a:t>
+                      </a:r>
+                      <a:r>
+                        <a:rPr sz="1200" b="0" dirty="0">
+                          <a:solidFill>
+                            <a:srgbClr val="262626"/>
+                          </a:solidFill>
+                          <a:latin typeface="Calibri"/>
+                        </a:rPr>
+                        <a:t> campo; </a:t>
+                      </a:r>
+                      <a:r>
+                        <a:rPr sz="1200" b="0" dirty="0" err="1">
+                          <a:solidFill>
+                            <a:srgbClr val="262626"/>
+                          </a:solidFill>
+                          <a:latin typeface="Calibri"/>
+                        </a:rPr>
+                        <a:t>lectura</a:t>
+                      </a:r>
+                      <a:r>
+                        <a:rPr sz="1200" b="0" dirty="0">
+                          <a:solidFill>
+                            <a:srgbClr val="262626"/>
+                          </a:solidFill>
+                          <a:latin typeface="Calibri"/>
+                        </a:rPr>
+                        <a:t> ≤ 20 s </a:t>
+                      </a:r>
+                      <a:r>
+                        <a:rPr sz="1200" b="0" dirty="0" err="1">
+                          <a:solidFill>
+                            <a:srgbClr val="262626"/>
+                          </a:solidFill>
+                          <a:latin typeface="Calibri"/>
+                        </a:rPr>
+                        <a:t>en</a:t>
+                      </a:r>
+                      <a:r>
+                        <a:rPr sz="1200" b="0" dirty="0">
+                          <a:solidFill>
+                            <a:srgbClr val="262626"/>
+                          </a:solidFill>
+                          <a:latin typeface="Calibri"/>
+                        </a:rPr>
+                        <a:t> el </a:t>
+                      </a:r>
+                      <a:r>
+                        <a:rPr sz="1200" b="0" dirty="0" err="1">
+                          <a:solidFill>
+                            <a:srgbClr val="262626"/>
+                          </a:solidFill>
+                          <a:latin typeface="Calibri"/>
+                        </a:rPr>
+                        <a:t>teléfono</a:t>
+                      </a:r>
+                      <a:r>
+                        <a:rPr sz="1200" b="0" dirty="0">
+                          <a:solidFill>
+                            <a:srgbClr val="262626"/>
+                          </a:solidFill>
+                          <a:latin typeface="Calibri"/>
+                        </a:rPr>
+                        <a:t> de </a:t>
+                      </a:r>
+                      <a:r>
+                        <a:rPr sz="1200" b="0" dirty="0" err="1">
+                          <a:solidFill>
+                            <a:srgbClr val="262626"/>
+                          </a:solidFill>
+                          <a:latin typeface="Calibri"/>
+                        </a:rPr>
+                        <a:t>referencia</a:t>
+                      </a:r>
+                      <a:endParaRPr sz="1200" b="0" dirty="0">
+                        <a:solidFill>
+                          <a:srgbClr val="262626"/>
+                        </a:solidFill>
+                        <a:latin typeface="Calibri"/>
+                      </a:endParaRPr>
                     </a:p>
                   </a:txBody>
                   <a:tcPr marL="54864" marR="54864" marT="18288" marB="18288" anchor="ctr">
@@ -9349,6 +7836,11 @@
                     </a:solidFill>
                   </a:tcPr>
                 </a:tc>
+                <a:extLst>
+                  <a:ext uri="{0D108BD9-81ED-4DB2-BD59-A6C34878D82A}">
+                    <a16:rowId xmlns:a16="http://schemas.microsoft.com/office/drawing/2014/main" val="10008"/>
+                  </a:ext>
+                </a:extLst>
               </a:tr>
               <a:tr h="438912">
                 <a:tc>
@@ -9380,14 +7872,137 @@
                     <a:p>
                       <a:pPr algn="l"/>
                       <a:r>
-                        <a:rPr sz="1200" b="0">
+                        <a:rPr sz="1200" b="0" dirty="0">
                           <a:solidFill>
                             <a:srgbClr val="262626"/>
                           </a:solidFill>
                           <a:latin typeface="Calibri"/>
                         </a:rPr>
-                        <a:t>18 semanas · S/ 0 en licencias · al menos 50 % del código en Java · sin servidor</a:t>
+                        <a:t>18 </a:t>
                       </a:r>
+                      <a:r>
+                        <a:rPr sz="1200" b="0" dirty="0" err="1">
+                          <a:solidFill>
+                            <a:srgbClr val="262626"/>
+                          </a:solidFill>
+                          <a:latin typeface="Calibri"/>
+                        </a:rPr>
+                        <a:t>semanas</a:t>
+                      </a:r>
+                      <a:r>
+                        <a:rPr sz="1200" b="0" dirty="0">
+                          <a:solidFill>
+                            <a:srgbClr val="262626"/>
+                          </a:solidFill>
+                          <a:latin typeface="Calibri"/>
+                        </a:rPr>
+                        <a:t> · S/ 0 </a:t>
+                      </a:r>
+                      <a:r>
+                        <a:rPr sz="1200" b="0" dirty="0" err="1">
+                          <a:solidFill>
+                            <a:srgbClr val="262626"/>
+                          </a:solidFill>
+                          <a:latin typeface="Calibri"/>
+                        </a:rPr>
+                        <a:t>en</a:t>
+                      </a:r>
+                      <a:r>
+                        <a:rPr sz="1200" b="0" dirty="0">
+                          <a:solidFill>
+                            <a:srgbClr val="262626"/>
+                          </a:solidFill>
+                          <a:latin typeface="Calibri"/>
+                        </a:rPr>
+                        <a:t> </a:t>
+                      </a:r>
+                      <a:r>
+                        <a:rPr sz="1200" b="0" dirty="0" err="1">
+                          <a:solidFill>
+                            <a:srgbClr val="262626"/>
+                          </a:solidFill>
+                          <a:latin typeface="Calibri"/>
+                        </a:rPr>
+                        <a:t>licencias</a:t>
+                      </a:r>
+                      <a:r>
+                        <a:rPr sz="1200" b="0" dirty="0">
+                          <a:solidFill>
+                            <a:srgbClr val="262626"/>
+                          </a:solidFill>
+                          <a:latin typeface="Calibri"/>
+                        </a:rPr>
+                        <a:t> · al </a:t>
+                      </a:r>
+                      <a:r>
+                        <a:rPr sz="1200" b="0" dirty="0" err="1">
+                          <a:solidFill>
+                            <a:srgbClr val="262626"/>
+                          </a:solidFill>
+                          <a:latin typeface="Calibri"/>
+                        </a:rPr>
+                        <a:t>menos</a:t>
+                      </a:r>
+                      <a:r>
+                        <a:rPr sz="1200" b="0" dirty="0">
+                          <a:solidFill>
+                            <a:srgbClr val="262626"/>
+                          </a:solidFill>
+                          <a:latin typeface="Calibri"/>
+                        </a:rPr>
+                        <a:t> 50 % del </a:t>
+                      </a:r>
+                      <a:r>
+                        <a:rPr sz="1200" b="0" dirty="0" err="1">
+                          <a:solidFill>
+                            <a:srgbClr val="262626"/>
+                          </a:solidFill>
+                          <a:latin typeface="Calibri"/>
+                        </a:rPr>
+                        <a:t>código</a:t>
+                      </a:r>
+                      <a:r>
+                        <a:rPr sz="1200" b="0" dirty="0">
+                          <a:solidFill>
+                            <a:srgbClr val="262626"/>
+                          </a:solidFill>
+                          <a:latin typeface="Calibri"/>
+                        </a:rPr>
+                        <a:t> </a:t>
+                      </a:r>
+                      <a:r>
+                        <a:rPr sz="1200" b="0" dirty="0" err="1">
+                          <a:solidFill>
+                            <a:srgbClr val="262626"/>
+                          </a:solidFill>
+                          <a:latin typeface="Calibri"/>
+                        </a:rPr>
+                        <a:t>en</a:t>
+                      </a:r>
+                      <a:r>
+                        <a:rPr sz="1200" b="0" dirty="0">
+                          <a:solidFill>
+                            <a:srgbClr val="262626"/>
+                          </a:solidFill>
+                          <a:latin typeface="Calibri"/>
+                        </a:rPr>
+                        <a:t> Java · sin </a:t>
+                      </a:r>
+                      <a:r>
+                        <a:rPr sz="1200" b="0" dirty="0" err="1">
+                          <a:solidFill>
+                            <a:srgbClr val="262626"/>
+                          </a:solidFill>
+                          <a:latin typeface="Calibri"/>
+                        </a:rPr>
+                        <a:t>servidor</a:t>
+                      </a:r>
+                      <a:endParaRPr sz="1200" b="0" dirty="0">
+                        <a:solidFill>
+                          <a:srgbClr val="262626"/>
+                        </a:solidFill>
+                        <a:latin typeface="Calibri"/>
+                      </a:endParaRPr>
                     </a:p>
                   </a:txBody>
                   <a:tcPr marL="54864" marR="54864" marT="18288" marB="18288" anchor="ctr">
@@ -9396,6 +8011,11 @@
                     </a:solidFill>
                   </a:tcPr>
                 </a:tc>
+                <a:extLst>
+                  <a:ext uri="{0D108BD9-81ED-4DB2-BD59-A6C34878D82A}">
+                    <a16:rowId xmlns:a16="http://schemas.microsoft.com/office/drawing/2014/main" val="10009"/>
+                  </a:ext>
+                </a:extLst>
               </a:tr>
               <a:tr h="438912">
                 <a:tc>
@@ -9427,13 +8047,166 @@
                     <a:p>
                       <a:pPr algn="l"/>
                       <a:r>
-                        <a:rPr sz="1200" b="0">
+                        <a:rPr sz="1200" b="0" dirty="0" err="1">
                           <a:solidFill>
                             <a:srgbClr val="262626"/>
                           </a:solidFill>
                           <a:latin typeface="Calibri"/>
                         </a:rPr>
-                        <a:t>Ajuste fino sin mejora suficiente · pérdida de exactitud al convertir · lectura lenta en gama media</a:t>
+                        <a:t>Ajuste</a:t>
+                      </a:r>
+                      <a:r>
+                        <a:rPr sz="1200" b="0" dirty="0">
+                          <a:solidFill>
+                            <a:srgbClr val="262626"/>
+                          </a:solidFill>
+                          <a:latin typeface="Calibri"/>
+                        </a:rPr>
+                        <a:t> </a:t>
+                      </a:r>
+                      <a:r>
+                        <a:rPr sz="1200" b="0" dirty="0" err="1">
+                          <a:solidFill>
+                            <a:srgbClr val="262626"/>
+                          </a:solidFill>
+                          <a:latin typeface="Calibri"/>
+                        </a:rPr>
+                        <a:t>fino</a:t>
+                      </a:r>
+                      <a:r>
+                        <a:rPr sz="1200" b="0" dirty="0">
+                          <a:solidFill>
+                            <a:srgbClr val="262626"/>
+                          </a:solidFill>
+                          <a:latin typeface="Calibri"/>
+                        </a:rPr>
+                        <a:t> sin </a:t>
+                      </a:r>
+                      <a:r>
+                        <a:rPr sz="1200" b="0" dirty="0" err="1">
+                          <a:solidFill>
+                            <a:srgbClr val="262626"/>
+                          </a:solidFill>
+                          <a:latin typeface="Calibri"/>
+                        </a:rPr>
+                        <a:t>mejora</a:t>
+                      </a:r>
+                      <a:r>
+                        <a:rPr sz="1200" b="0" dirty="0">
+                          <a:solidFill>
+                            <a:srgbClr val="262626"/>
+                          </a:solidFill>
+                          <a:latin typeface="Calibri"/>
+                        </a:rPr>
+                        <a:t> </a:t>
+                      </a:r>
+                      <a:r>
+                        <a:rPr sz="1200" b="0" dirty="0" err="1">
+                          <a:solidFill>
+                            <a:srgbClr val="262626"/>
+                          </a:solidFill>
+                          <a:latin typeface="Calibri"/>
+                        </a:rPr>
+                        <a:t>suficiente</a:t>
+                      </a:r>
+                      <a:r>
+                        <a:rPr sz="1200" b="0" dirty="0">
+                          <a:solidFill>
+                            <a:srgbClr val="262626"/>
+                          </a:solidFill>
+                          <a:latin typeface="Calibri"/>
+                        </a:rPr>
+                        <a:t> · </a:t>
+                      </a:r>
+                      <a:r>
+                        <a:rPr sz="1200" b="0" dirty="0" err="1">
+                          <a:solidFill>
+                            <a:srgbClr val="262626"/>
+                          </a:solidFill>
+                          <a:latin typeface="Calibri"/>
+                        </a:rPr>
+                        <a:t>pérdida</a:t>
+                      </a:r>
+                      <a:r>
+                        <a:rPr sz="1200" b="0" dirty="0">
+                          <a:solidFill>
+                            <a:srgbClr val="262626"/>
+                          </a:solidFill>
+                          <a:latin typeface="Calibri"/>
+                        </a:rPr>
+                        <a:t> de </a:t>
+                      </a:r>
+                      <a:r>
+                        <a:rPr sz="1200" b="0" dirty="0" err="1">
+                          <a:solidFill>
+                            <a:srgbClr val="262626"/>
+                          </a:solidFill>
+                          <a:latin typeface="Calibri"/>
+                        </a:rPr>
+                        <a:t>exactitud</a:t>
+                      </a:r>
+                      <a:r>
+                        <a:rPr sz="1200" b="0" dirty="0">
+                          <a:solidFill>
+                            <a:srgbClr val="262626"/>
+                          </a:solidFill>
+                          <a:latin typeface="Calibri"/>
+                        </a:rPr>
+                        <a:t> al </a:t>
+                      </a:r>
+                      <a:r>
+                        <a:rPr sz="1200" b="0" dirty="0" err="1">
+                          <a:solidFill>
+                            <a:srgbClr val="262626"/>
+                          </a:solidFill>
+                          <a:latin typeface="Calibri"/>
+                        </a:rPr>
+                        <a:t>convertir</a:t>
+                      </a:r>
+                      <a:r>
+                        <a:rPr sz="1200" b="0" dirty="0">
+                          <a:solidFill>
+                            <a:srgbClr val="262626"/>
+                          </a:solidFill>
+                          <a:latin typeface="Calibri"/>
+                        </a:rPr>
+                        <a:t> · </a:t>
+                      </a:r>
+                      <a:r>
+                        <a:rPr sz="1200" b="0" dirty="0" err="1">
+                          <a:solidFill>
+                            <a:srgbClr val="262626"/>
+                          </a:solidFill>
+                          <a:latin typeface="Calibri"/>
+                        </a:rPr>
+                        <a:t>lectura</a:t>
+                      </a:r>
+                      <a:r>
+                        <a:rPr sz="1200" b="0" dirty="0">
+                          <a:solidFill>
+                            <a:srgbClr val="262626"/>
+                          </a:solidFill>
+                          <a:latin typeface="Calibri"/>
+                        </a:rPr>
+                        <a:t> lenta </a:t>
+                      </a:r>
+                      <a:r>
+                        <a:rPr sz="1200" b="0" dirty="0" err="1">
+                          <a:solidFill>
+                            <a:srgbClr val="262626"/>
+                          </a:solidFill>
+                          <a:latin typeface="Calibri"/>
+                        </a:rPr>
+                        <a:t>en</a:t>
+                      </a:r>
+                      <a:r>
+                        <a:rPr sz="1200" b="0" dirty="0">
+                          <a:solidFill>
+                            <a:srgbClr val="262626"/>
+                          </a:solidFill>
+                          <a:latin typeface="Calibri"/>
+                        </a:rPr>
+                        <a:t> gama media</a:t>
                       </a:r>
                     </a:p>
                   </a:txBody>
@@ -9443,6 +8216,11 @@
                     </a:solidFill>
                   </a:tcPr>
                 </a:tc>
+                <a:extLst>
+                  <a:ext uri="{0D108BD9-81ED-4DB2-BD59-A6C34878D82A}">
+                    <a16:rowId xmlns:a16="http://schemas.microsoft.com/office/drawing/2014/main" val="10010"/>
+                  </a:ext>
+                </a:extLst>
               </a:tr>
             </a:tbl>
           </a:graphicData>
@@ -9457,7 +8235,7 @@
 </file>
 
 <file path=ppt/slides/slide3.xml><?xml version="1.0" encoding="utf-8"?>
-<p:sld xmlns:a="http://schemas.openxmlformats.org/drawingml/2006/main" xmlns:p="http://schemas.openxmlformats.org/presentationml/2006/main" xmlns:r="http://schemas.openxmlformats.org/officeDocument/2006/relationships">
+<p:sld xmlns:a="http://schemas.openxmlformats.org/drawingml/2006/main" xmlns:r="http://schemas.openxmlformats.org/officeDocument/2006/relationships" xmlns:p="http://schemas.openxmlformats.org/presentationml/2006/main">
   <p:cSld>
     <p:spTree>
       <p:nvGrpSpPr>
@@ -9465,7 +8243,14 @@
         <p:cNvGrpSpPr/>
         <p:nvPr/>
       </p:nvGrpSpPr>
-      <p:grpSpPr/>
+      <p:grpSpPr>
+        <a:xfrm>
+          <a:off x="0" y="0"/>
+          <a:ext cx="0" cy="0"/>
+          <a:chOff x="0" y="0"/>
+          <a:chExt cx="0" cy="0"/>
+        </a:xfrm>
+      </p:grpSpPr>
       <p:sp>
         <p:nvSpPr>
           <p:cNvPr id="2" name="TextBox 1"/>
@@ -9483,7 +8268,7 @@
           <a:noFill/>
         </p:spPr>
         <p:txBody>
-          <a:bodyPr wrap="square" lIns="45720" rIns="45720" tIns="18288" bIns="18288" anchor="t">
+          <a:bodyPr wrap="square" lIns="45720" tIns="18288" rIns="45720" bIns="18288" anchor="t">
             <a:spAutoFit/>
           </a:bodyPr>
           <a:lstStyle/>
@@ -9518,7 +8303,7 @@
           <a:noFill/>
         </p:spPr>
         <p:txBody>
-          <a:bodyPr wrap="square" lIns="45720" rIns="45720" tIns="18288" bIns="18288" anchor="t">
+          <a:bodyPr wrap="square" lIns="45720" tIns="18288" rIns="45720" bIns="18288" anchor="t">
             <a:spAutoFit/>
           </a:bodyPr>
           <a:lstStyle/>
@@ -9577,6 +8362,7 @@
           <a:lstStyle/>
           <a:p>
             <a:pPr algn="ctr"/>
+            <a:endParaRPr/>
           </a:p>
         </p:txBody>
       </p:sp>
@@ -9589,7 +8375,7 @@
           <p:nvPr/>
         </p:nvPicPr>
         <p:blipFill>
-          <a:blip r:embed="rId2"/>
+          <a:blip r:embed="rId3"/>
           <a:stretch>
             <a:fillRect/>
           </a:stretch>
@@ -9645,6 +8431,7 @@
           <a:lstStyle/>
           <a:p>
             <a:pPr algn="ctr"/>
+            <a:endParaRPr/>
           </a:p>
         </p:txBody>
       </p:sp>
@@ -9665,7 +8452,7 @@
           <a:noFill/>
         </p:spPr>
         <p:txBody>
-          <a:bodyPr wrap="square" lIns="45720" rIns="45720" tIns="18288" bIns="18288" anchor="ctr">
+          <a:bodyPr wrap="square" lIns="45720" tIns="18288" rIns="45720" bIns="18288" anchor="ctr">
             <a:spAutoFit/>
           </a:bodyPr>
           <a:lstStyle/>
@@ -9700,7 +8487,7 @@
           <a:noFill/>
         </p:spPr>
         <p:txBody>
-          <a:bodyPr wrap="square" lIns="45720" rIns="45720" tIns="18288" bIns="18288" anchor="ctr">
+          <a:bodyPr wrap="square" lIns="45720" tIns="18288" rIns="45720" bIns="18288" anchor="ctr">
             <a:spAutoFit/>
           </a:bodyPr>
           <a:lstStyle/>
@@ -9759,7 +8546,7 @@
           <a:noFill/>
         </p:spPr>
         <p:txBody>
-          <a:bodyPr wrap="square" lIns="45720" rIns="45720" tIns="18288" bIns="18288" anchor="t">
+          <a:bodyPr wrap="square" lIns="45720" tIns="18288" rIns="45720" bIns="18288" anchor="t">
             <a:spAutoFit/>
           </a:bodyPr>
           <a:lstStyle/>
@@ -9813,7 +8600,7 @@
 </file>
 
 <file path=ppt/slides/slide4.xml><?xml version="1.0" encoding="utf-8"?>
-<p:sld xmlns:a="http://schemas.openxmlformats.org/drawingml/2006/main" xmlns:p="http://schemas.openxmlformats.org/presentationml/2006/main" xmlns:r="http://schemas.openxmlformats.org/officeDocument/2006/relationships">
+<p:sld xmlns:a="http://schemas.openxmlformats.org/drawingml/2006/main" xmlns:r="http://schemas.openxmlformats.org/officeDocument/2006/relationships" xmlns:p="http://schemas.openxmlformats.org/presentationml/2006/main">
   <p:cSld>
     <p:spTree>
       <p:nvGrpSpPr>
@@ -9821,7 +8608,14 @@
         <p:cNvGrpSpPr/>
         <p:nvPr/>
       </p:nvGrpSpPr>
-      <p:grpSpPr/>
+      <p:grpSpPr>
+        <a:xfrm>
+          <a:off x="0" y="0"/>
+          <a:ext cx="0" cy="0"/>
+          <a:chOff x="0" y="0"/>
+          <a:chExt cx="0" cy="0"/>
+        </a:xfrm>
+      </p:grpSpPr>
       <p:sp>
         <p:nvSpPr>
           <p:cNvPr id="2" name="TextBox 1"/>
@@ -9839,7 +8633,7 @@
           <a:noFill/>
         </p:spPr>
         <p:txBody>
-          <a:bodyPr wrap="square" lIns="45720" rIns="45720" tIns="18288" bIns="18288" anchor="t">
+          <a:bodyPr wrap="square" lIns="45720" tIns="18288" rIns="45720" bIns="18288" anchor="t">
             <a:spAutoFit/>
           </a:bodyPr>
           <a:lstStyle/>
@@ -9874,7 +8668,7 @@
           <a:noFill/>
         </p:spPr>
         <p:txBody>
-          <a:bodyPr wrap="square" lIns="45720" rIns="45720" tIns="18288" bIns="18288" anchor="t">
+          <a:bodyPr wrap="square" lIns="45720" tIns="18288" rIns="45720" bIns="18288" anchor="t">
             <a:spAutoFit/>
           </a:bodyPr>
           <a:lstStyle/>
@@ -9933,6 +8727,7 @@
           <a:lstStyle/>
           <a:p>
             <a:pPr algn="ctr"/>
+            <a:endParaRPr/>
           </a:p>
         </p:txBody>
       </p:sp>
@@ -9945,7 +8740,7 @@
           <p:nvPr/>
         </p:nvPicPr>
         <p:blipFill>
-          <a:blip r:embed="rId2"/>
+          <a:blip r:embed="rId3"/>
           <a:stretch>
             <a:fillRect/>
           </a:stretch>
@@ -10001,6 +8796,7 @@
           <a:lstStyle/>
           <a:p>
             <a:pPr algn="ctr"/>
+            <a:endParaRPr/>
           </a:p>
         </p:txBody>
       </p:sp>
@@ -10021,7 +8817,7 @@
           <a:noFill/>
         </p:spPr>
         <p:txBody>
-          <a:bodyPr wrap="square" lIns="45720" rIns="45720" tIns="18288" bIns="18288" anchor="ctr">
+          <a:bodyPr wrap="square" lIns="45720" tIns="18288" rIns="45720" bIns="18288" anchor="ctr">
             <a:spAutoFit/>
           </a:bodyPr>
           <a:lstStyle/>
@@ -10056,7 +8852,7 @@
           <a:noFill/>
         </p:spPr>
         <p:txBody>
-          <a:bodyPr wrap="square" lIns="45720" rIns="45720" tIns="18288" bIns="18288" anchor="ctr">
+          <a:bodyPr wrap="square" lIns="45720" tIns="18288" rIns="45720" bIns="18288" anchor="ctr">
             <a:spAutoFit/>
           </a:bodyPr>
           <a:lstStyle/>
@@ -10141,6 +8937,7 @@
           <a:lstStyle/>
           <a:p>
             <a:pPr algn="ctr"/>
+            <a:endParaRPr/>
           </a:p>
         </p:txBody>
       </p:sp>
@@ -10185,6 +8982,7 @@
           <a:lstStyle/>
           <a:p>
             <a:pPr algn="ctr"/>
+            <a:endParaRPr/>
           </a:p>
         </p:txBody>
       </p:sp>
@@ -10205,7 +9003,7 @@
           <a:noFill/>
         </p:spPr>
         <p:txBody>
-          <a:bodyPr wrap="square" lIns="45720" rIns="45720" tIns="18288" bIns="18288" anchor="t">
+          <a:bodyPr wrap="square" lIns="45720" tIns="18288" rIns="45720" bIns="18288" anchor="t">
             <a:spAutoFit/>
           </a:bodyPr>
           <a:lstStyle/>
@@ -10357,6 +9155,7 @@
           <a:lstStyle/>
           <a:p>
             <a:pPr algn="ctr"/>
+            <a:endParaRPr/>
           </a:p>
         </p:txBody>
       </p:sp>
@@ -10401,6 +9200,7 @@
           <a:lstStyle/>
           <a:p>
             <a:pPr algn="ctr"/>
+            <a:endParaRPr/>
           </a:p>
         </p:txBody>
       </p:sp>
@@ -10421,7 +9221,7 @@
           <a:noFill/>
         </p:spPr>
         <p:txBody>
-          <a:bodyPr wrap="square" lIns="45720" rIns="45720" tIns="18288" bIns="18288" anchor="t">
+          <a:bodyPr wrap="square" lIns="45720" tIns="18288" rIns="45720" bIns="18288" anchor="t">
             <a:spAutoFit/>
           </a:bodyPr>
           <a:lstStyle/>
@@ -10539,7 +9339,7 @@
 </file>
 
 <file path=ppt/slides/slide5.xml><?xml version="1.0" encoding="utf-8"?>
-<p:sld xmlns:a="http://schemas.openxmlformats.org/drawingml/2006/main" xmlns:p="http://schemas.openxmlformats.org/presentationml/2006/main" xmlns:r="http://schemas.openxmlformats.org/officeDocument/2006/relationships">
+<p:sld xmlns:a="http://schemas.openxmlformats.org/drawingml/2006/main" xmlns:r="http://schemas.openxmlformats.org/officeDocument/2006/relationships" xmlns:p="http://schemas.openxmlformats.org/presentationml/2006/main">
   <p:cSld>
     <p:spTree>
       <p:nvGrpSpPr>
@@ -10547,7 +9347,14 @@
         <p:cNvGrpSpPr/>
         <p:nvPr/>
       </p:nvGrpSpPr>
-      <p:grpSpPr/>
+      <p:grpSpPr>
+        <a:xfrm>
+          <a:off x="0" y="0"/>
+          <a:ext cx="0" cy="0"/>
+          <a:chOff x="0" y="0"/>
+          <a:chExt cx="0" cy="0"/>
+        </a:xfrm>
+      </p:grpSpPr>
       <p:sp>
         <p:nvSpPr>
           <p:cNvPr id="2" name="TextBox 1"/>
@@ -10565,7 +9372,7 @@
           <a:noFill/>
         </p:spPr>
         <p:txBody>
-          <a:bodyPr wrap="square" lIns="45720" rIns="45720" tIns="18288" bIns="18288" anchor="t">
+          <a:bodyPr wrap="square" lIns="45720" tIns="18288" rIns="45720" bIns="18288" anchor="t">
             <a:spAutoFit/>
           </a:bodyPr>
           <a:lstStyle/>
@@ -10600,7 +9407,7 @@
           <a:noFill/>
         </p:spPr>
         <p:txBody>
-          <a:bodyPr wrap="square" lIns="45720" rIns="45720" tIns="18288" bIns="18288" anchor="t">
+          <a:bodyPr wrap="square" lIns="45720" tIns="18288" rIns="45720" bIns="18288" anchor="t">
             <a:spAutoFit/>
           </a:bodyPr>
           <a:lstStyle/>
@@ -10659,6 +9466,7 @@
           <a:lstStyle/>
           <a:p>
             <a:pPr algn="ctr"/>
+            <a:endParaRPr/>
           </a:p>
         </p:txBody>
       </p:sp>
@@ -10671,7 +9479,7 @@
           <p:nvPr/>
         </p:nvPicPr>
         <p:blipFill>
-          <a:blip r:embed="rId2"/>
+          <a:blip r:embed="rId3"/>
           <a:stretch>
             <a:fillRect/>
           </a:stretch>
@@ -10727,6 +9535,7 @@
           <a:lstStyle/>
           <a:p>
             <a:pPr algn="ctr"/>
+            <a:endParaRPr/>
           </a:p>
         </p:txBody>
       </p:sp>
@@ -10747,7 +9556,7 @@
           <a:noFill/>
         </p:spPr>
         <p:txBody>
-          <a:bodyPr wrap="square" lIns="45720" rIns="45720" tIns="18288" bIns="18288" anchor="ctr">
+          <a:bodyPr wrap="square" lIns="45720" tIns="18288" rIns="45720" bIns="18288" anchor="ctr">
             <a:spAutoFit/>
           </a:bodyPr>
           <a:lstStyle/>
@@ -10782,7 +9591,7 @@
           <a:noFill/>
         </p:spPr>
         <p:txBody>
-          <a:bodyPr wrap="square" lIns="45720" rIns="45720" tIns="18288" bIns="18288" anchor="ctr">
+          <a:bodyPr wrap="square" lIns="45720" tIns="18288" rIns="45720" bIns="18288" anchor="ctr">
             <a:spAutoFit/>
           </a:bodyPr>
           <a:lstStyle/>
@@ -10867,6 +9676,7 @@
           <a:lstStyle/>
           <a:p>
             <a:pPr algn="ctr"/>
+            <a:endParaRPr/>
           </a:p>
         </p:txBody>
       </p:sp>
@@ -10911,6 +9721,7 @@
           <a:lstStyle/>
           <a:p>
             <a:pPr algn="ctr"/>
+            <a:endParaRPr/>
           </a:p>
         </p:txBody>
       </p:sp>
@@ -10931,7 +9742,7 @@
           <a:noFill/>
         </p:spPr>
         <p:txBody>
-          <a:bodyPr wrap="square" lIns="45720" rIns="45720" tIns="18288" bIns="18288" anchor="t">
+          <a:bodyPr wrap="square" lIns="45720" tIns="18288" rIns="45720" bIns="18288" anchor="t">
             <a:spAutoFit/>
           </a:bodyPr>
           <a:lstStyle/>
@@ -11100,6 +9911,7 @@
           <a:lstStyle/>
           <a:p>
             <a:pPr algn="ctr"/>
+            <a:endParaRPr/>
           </a:p>
         </p:txBody>
       </p:sp>
@@ -11144,6 +9956,7 @@
           <a:lstStyle/>
           <a:p>
             <a:pPr algn="ctr"/>
+            <a:endParaRPr/>
           </a:p>
         </p:txBody>
       </p:sp>
@@ -11164,7 +9977,7 @@
           <a:noFill/>
         </p:spPr>
         <p:txBody>
-          <a:bodyPr wrap="square" lIns="45720" rIns="45720" tIns="18288" bIns="18288" anchor="t">
+          <a:bodyPr wrap="square" lIns="45720" tIns="18288" rIns="45720" bIns="18288" anchor="t">
             <a:spAutoFit/>
           </a:bodyPr>
           <a:lstStyle/>
@@ -11299,7 +10112,7 @@
 </file>
 
 <file path=ppt/slides/slide6.xml><?xml version="1.0" encoding="utf-8"?>
-<p:sld xmlns:a="http://schemas.openxmlformats.org/drawingml/2006/main" xmlns:p="http://schemas.openxmlformats.org/presentationml/2006/main" xmlns:r="http://schemas.openxmlformats.org/officeDocument/2006/relationships">
+<p:sld xmlns:a="http://schemas.openxmlformats.org/drawingml/2006/main" xmlns:r="http://schemas.openxmlformats.org/officeDocument/2006/relationships" xmlns:p="http://schemas.openxmlformats.org/presentationml/2006/main">
   <p:cSld>
     <p:spTree>
       <p:nvGrpSpPr>
@@ -11307,7 +10120,14 @@
         <p:cNvGrpSpPr/>
         <p:nvPr/>
       </p:nvGrpSpPr>
-      <p:grpSpPr/>
+      <p:grpSpPr>
+        <a:xfrm>
+          <a:off x="0" y="0"/>
+          <a:ext cx="0" cy="0"/>
+          <a:chOff x="0" y="0"/>
+          <a:chExt cx="0" cy="0"/>
+        </a:xfrm>
+      </p:grpSpPr>
       <p:sp>
         <p:nvSpPr>
           <p:cNvPr id="2" name="TextBox 1"/>
@@ -11325,7 +10145,7 @@
           <a:noFill/>
         </p:spPr>
         <p:txBody>
-          <a:bodyPr wrap="square" lIns="45720" rIns="45720" tIns="18288" bIns="18288" anchor="t">
+          <a:bodyPr wrap="square" lIns="45720" tIns="18288" rIns="45720" bIns="18288" anchor="t">
             <a:spAutoFit/>
           </a:bodyPr>
           <a:lstStyle/>
@@ -11338,7 +10158,7 @@
                 </a:solidFill>
                 <a:latin typeface="Calibri"/>
               </a:rPr>
-              <a:t>DIAGRAMAS DE PROCESOS</a:t>
+              <a:t>BASE DE DATOS</a:t>
             </a:r>
           </a:p>
         </p:txBody>
@@ -11360,7 +10180,7 @@
           <a:noFill/>
         </p:spPr>
         <p:txBody>
-          <a:bodyPr wrap="square" lIns="45720" rIns="45720" tIns="18288" bIns="18288" anchor="t">
+          <a:bodyPr wrap="square" lIns="45720" tIns="18288" rIns="45720" bIns="18288" anchor="t">
             <a:spAutoFit/>
           </a:bodyPr>
           <a:lstStyle/>
@@ -11373,7 +10193,7 @@
                 </a:solidFill>
                 <a:latin typeface="Calibri"/>
               </a:rPr>
-              <a:t>Subprocesos de cierre mensual y de publicación del modelo</a:t>
+              <a:t>Modelo lógico de la base de datos</a:t>
             </a:r>
           </a:p>
         </p:txBody>
@@ -11419,6 +10239,7 @@
           <a:lstStyle/>
           <a:p>
             <a:pPr algn="ctr"/>
+            <a:endParaRPr/>
           </a:p>
         </p:txBody>
       </p:sp>
@@ -11431,7 +10252,7 @@
           <p:nvPr/>
         </p:nvPicPr>
         <p:blipFill>
-          <a:blip r:embed="rId2"/>
+          <a:blip r:embed="rId3"/>
           <a:stretch>
             <a:fillRect/>
           </a:stretch>
@@ -11487,6 +10308,7 @@
           <a:lstStyle/>
           <a:p>
             <a:pPr algn="ctr"/>
+            <a:endParaRPr/>
           </a:p>
         </p:txBody>
       </p:sp>
@@ -11507,7 +10329,7 @@
           <a:noFill/>
         </p:spPr>
         <p:txBody>
-          <a:bodyPr wrap="square" lIns="45720" rIns="45720" tIns="18288" bIns="18288" anchor="ctr">
+          <a:bodyPr wrap="square" lIns="45720" tIns="18288" rIns="45720" bIns="18288" anchor="ctr">
             <a:spAutoFit/>
           </a:bodyPr>
           <a:lstStyle/>
@@ -11542,7 +10364,7 @@
           <a:noFill/>
         </p:spPr>
         <p:txBody>
-          <a:bodyPr wrap="square" lIns="45720" rIns="45720" tIns="18288" bIns="18288" anchor="ctr">
+          <a:bodyPr wrap="square" lIns="45720" tIns="18288" rIns="45720" bIns="18288" anchor="ctr">
             <a:spAutoFit/>
           </a:bodyPr>
           <a:lstStyle/>
@@ -11555,7 +10377,7 @@
                 </a:solidFill>
                 <a:latin typeface="Calibri"/>
               </a:rPr>
-              <a:t>6</a:t>
+              <a:t>8</a:t>
             </a:r>
           </a:p>
         </p:txBody>
@@ -11576,32 +10398,172 @@
         </p:blipFill>
         <p:spPr>
           <a:xfrm>
-            <a:off x="1162372" y="1234440"/>
-            <a:ext cx="6819254" cy="2514600"/>
+            <a:off x="1970531" y="1234440"/>
+            <a:ext cx="8266176" cy="5166360"/>
           </a:xfrm>
           <a:prstGeom prst="rect">
             <a:avLst/>
           </a:prstGeom>
         </p:spPr>
       </p:pic>
+    </p:spTree>
+  </p:cSld>
+  <p:clrMapOvr>
+    <a:masterClrMapping/>
+  </p:clrMapOvr>
+</p:sld>
+</file>
+
+<file path=ppt/slides/slide7.xml><?xml version="1.0" encoding="utf-8"?>
+<p:sld xmlns:a="http://schemas.openxmlformats.org/drawingml/2006/main" xmlns:r="http://schemas.openxmlformats.org/officeDocument/2006/relationships" xmlns:p="http://schemas.openxmlformats.org/presentationml/2006/main">
+  <p:cSld>
+    <p:spTree>
+      <p:nvGrpSpPr>
+        <p:cNvPr id="1" name=""/>
+        <p:cNvGrpSpPr/>
+        <p:nvPr/>
+      </p:nvGrpSpPr>
+      <p:grpSpPr>
+        <a:xfrm>
+          <a:off x="0" y="0"/>
+          <a:ext cx="0" cy="0"/>
+          <a:chOff x="0" y="0"/>
+          <a:chExt cx="0" cy="0"/>
+        </a:xfrm>
+      </p:grpSpPr>
+      <p:sp>
+        <p:nvSpPr>
+          <p:cNvPr id="2" name="TextBox 1"/>
+          <p:cNvSpPr txBox="1"/>
+          <p:nvPr/>
+        </p:nvSpPr>
+        <p:spPr>
+          <a:xfrm>
+            <a:off x="502920" y="201168"/>
+            <a:ext cx="7315200" cy="274320"/>
+          </a:xfrm>
+          <a:prstGeom prst="rect">
+            <a:avLst/>
+          </a:prstGeom>
+          <a:noFill/>
+        </p:spPr>
+        <p:txBody>
+          <a:bodyPr wrap="square" lIns="45720" tIns="18288" rIns="45720" bIns="18288" anchor="t">
+            <a:spAutoFit/>
+          </a:bodyPr>
+          <a:lstStyle/>
+          <a:p>
+            <a:pPr algn="l"/>
+            <a:r>
+              <a:rPr sz="1100" b="1" i="0">
+                <a:solidFill>
+                  <a:srgbClr val="C00000"/>
+                </a:solidFill>
+                <a:latin typeface="Calibri"/>
+              </a:rPr>
+              <a:t>BASE DE DATOS</a:t>
+            </a:r>
+          </a:p>
+        </p:txBody>
+      </p:sp>
+      <p:sp>
+        <p:nvSpPr>
+          <p:cNvPr id="3" name="TextBox 2"/>
+          <p:cNvSpPr txBox="1"/>
+          <p:nvPr/>
+        </p:nvSpPr>
+        <p:spPr>
+          <a:xfrm>
+            <a:off x="502920" y="457200"/>
+            <a:ext cx="9692640" cy="594360"/>
+          </a:xfrm>
+          <a:prstGeom prst="rect">
+            <a:avLst/>
+          </a:prstGeom>
+          <a:noFill/>
+        </p:spPr>
+        <p:txBody>
+          <a:bodyPr wrap="square" lIns="45720" tIns="18288" rIns="45720" bIns="18288" anchor="t">
+            <a:spAutoFit/>
+          </a:bodyPr>
+          <a:lstStyle/>
+          <a:p>
+            <a:pPr algn="l"/>
+            <a:r>
+              <a:rPr sz="2600" b="1" i="0">
+                <a:solidFill>
+                  <a:srgbClr val="1F4E79"/>
+                </a:solidFill>
+                <a:latin typeface="Calibri"/>
+              </a:rPr>
+              <a:t>Modelo físico (1/2): registro de facturas</a:t>
+            </a:r>
+          </a:p>
+        </p:txBody>
+      </p:sp>
+      <p:sp>
+        <p:nvSpPr>
+          <p:cNvPr id="4" name="Rectangle 3"/>
+          <p:cNvSpPr/>
+          <p:nvPr/>
+        </p:nvSpPr>
+        <p:spPr>
+          <a:xfrm>
+            <a:off x="502920" y="1051560"/>
+            <a:ext cx="1371600" cy="45720"/>
+          </a:xfrm>
+          <a:prstGeom prst="rect">
+            <a:avLst/>
+          </a:prstGeom>
+          <a:solidFill>
+            <a:srgbClr val="C00000"/>
+          </a:solidFill>
+          <a:ln>
+            <a:noFill/>
+          </a:ln>
+          <a:effectLst/>
+        </p:spPr>
+        <p:style>
+          <a:lnRef idx="1">
+            <a:schemeClr val="accent1"/>
+          </a:lnRef>
+          <a:fillRef idx="3">
+            <a:schemeClr val="accent1"/>
+          </a:fillRef>
+          <a:effectRef idx="2">
+            <a:schemeClr val="accent1"/>
+          </a:effectRef>
+          <a:fontRef idx="minor">
+            <a:schemeClr val="lt1"/>
+          </a:fontRef>
+        </p:style>
+        <p:txBody>
+          <a:bodyPr rtlCol="0" anchor="ctr"/>
+          <a:lstStyle/>
+          <a:p>
+            <a:pPr algn="ctr"/>
+            <a:endParaRPr/>
+          </a:p>
+        </p:txBody>
+      </p:sp>
       <p:pic>
         <p:nvPicPr>
-          <p:cNvPr id="10" name="Picture 9" descr="image.png"/>
+          <p:cNvPr id="5" name="Picture 4" descr="logo_utp.png"/>
           <p:cNvPicPr>
             <a:picLocks noChangeAspect="1"/>
           </p:cNvPicPr>
           <p:nvPr/>
         </p:nvPicPr>
         <p:blipFill>
-          <a:blip r:embed="rId5"/>
+          <a:blip r:embed="rId3"/>
           <a:stretch>
             <a:fillRect/>
           </a:stretch>
         </p:blipFill>
         <p:spPr>
           <a:xfrm>
-            <a:off x="1450916" y="3840480"/>
-            <a:ext cx="6242166" cy="2514600"/>
+            <a:off x="10607040" y="228600"/>
+            <a:ext cx="1188720" cy="316382"/>
           </a:xfrm>
           <a:prstGeom prst="rect">
             <a:avLst/>
@@ -11610,14 +10572,491 @@
       </p:pic>
       <p:sp>
         <p:nvSpPr>
-          <p:cNvPr id="11" name="Rectangle 10"/>
+          <p:cNvPr id="6" name="Rectangle 5"/>
           <p:cNvSpPr/>
           <p:nvPr/>
         </p:nvSpPr>
         <p:spPr>
           <a:xfrm>
-            <a:off x="8915400" y="1234440"/>
-            <a:ext cx="2834640" cy="1600200"/>
+            <a:off x="0" y="6492240"/>
+            <a:ext cx="12191695" cy="365760"/>
+          </a:xfrm>
+          <a:prstGeom prst="rect">
+            <a:avLst/>
+          </a:prstGeom>
+          <a:solidFill>
+            <a:srgbClr val="C00000"/>
+          </a:solidFill>
+          <a:ln>
+            <a:noFill/>
+          </a:ln>
+          <a:effectLst/>
+        </p:spPr>
+        <p:style>
+          <a:lnRef idx="1">
+            <a:schemeClr val="accent1"/>
+          </a:lnRef>
+          <a:fillRef idx="3">
+            <a:schemeClr val="accent1"/>
+          </a:fillRef>
+          <a:effectRef idx="2">
+            <a:schemeClr val="accent1"/>
+          </a:effectRef>
+          <a:fontRef idx="minor">
+            <a:schemeClr val="lt1"/>
+          </a:fontRef>
+        </p:style>
+        <p:txBody>
+          <a:bodyPr rtlCol="0" anchor="ctr"/>
+          <a:lstStyle/>
+          <a:p>
+            <a:pPr algn="ctr"/>
+            <a:endParaRPr/>
+          </a:p>
+        </p:txBody>
+      </p:sp>
+      <p:sp>
+        <p:nvSpPr>
+          <p:cNvPr id="7" name="TextBox 6"/>
+          <p:cNvSpPr txBox="1"/>
+          <p:nvPr/>
+        </p:nvSpPr>
+        <p:spPr>
+          <a:xfrm>
+            <a:off x="365760" y="6492240"/>
+            <a:ext cx="7315200" cy="365760"/>
+          </a:xfrm>
+          <a:prstGeom prst="rect">
+            <a:avLst/>
+          </a:prstGeom>
+          <a:noFill/>
+        </p:spPr>
+        <p:txBody>
+          <a:bodyPr wrap="square" lIns="45720" tIns="18288" rIns="45720" bIns="18288" anchor="ctr">
+            <a:spAutoFit/>
+          </a:bodyPr>
+          <a:lstStyle/>
+          <a:p>
+            <a:pPr algn="l"/>
+            <a:r>
+              <a:rPr sz="1100" b="0" i="0">
+                <a:solidFill>
+                  <a:srgbClr val="FFFFFF"/>
+                </a:solidFill>
+                <a:latin typeface="Calibri"/>
+              </a:rPr>
+              <a:t>Facturas S20  ·  Avance de Proyecto Final 3</a:t>
+            </a:r>
+          </a:p>
+        </p:txBody>
+      </p:sp>
+      <p:sp>
+        <p:nvSpPr>
+          <p:cNvPr id="8" name="TextBox 7"/>
+          <p:cNvSpPr txBox="1"/>
+          <p:nvPr/>
+        </p:nvSpPr>
+        <p:spPr>
+          <a:xfrm>
+            <a:off x="11247120" y="6492240"/>
+            <a:ext cx="548640" cy="365760"/>
+          </a:xfrm>
+          <a:prstGeom prst="rect">
+            <a:avLst/>
+          </a:prstGeom>
+          <a:noFill/>
+        </p:spPr>
+        <p:txBody>
+          <a:bodyPr wrap="square" lIns="45720" tIns="18288" rIns="45720" bIns="18288" anchor="ctr">
+            <a:spAutoFit/>
+          </a:bodyPr>
+          <a:lstStyle/>
+          <a:p>
+            <a:pPr algn="r"/>
+            <a:r>
+              <a:rPr sz="1100" b="0" i="0">
+                <a:solidFill>
+                  <a:srgbClr val="FFFFFF"/>
+                </a:solidFill>
+                <a:latin typeface="Calibri"/>
+              </a:rPr>
+              <a:t>9</a:t>
+            </a:r>
+          </a:p>
+        </p:txBody>
+      </p:sp>
+      <p:pic>
+        <p:nvPicPr>
+          <p:cNvPr id="9" name="Picture 8" descr="image.png"/>
+          <p:cNvPicPr>
+            <a:picLocks noChangeAspect="1"/>
+          </p:cNvPicPr>
+          <p:nvPr/>
+        </p:nvPicPr>
+        <p:blipFill>
+          <a:blip r:embed="rId4"/>
+          <a:stretch>
+            <a:fillRect/>
+          </a:stretch>
+        </p:blipFill>
+        <p:spPr>
+          <a:xfrm>
+            <a:off x="411480" y="1563510"/>
+            <a:ext cx="11384280" cy="3868139"/>
+          </a:xfrm>
+          <a:prstGeom prst="rect">
+            <a:avLst/>
+          </a:prstGeom>
+        </p:spPr>
+      </p:pic>
+      <p:sp>
+        <p:nvSpPr>
+          <p:cNvPr id="10" name="TextBox 9"/>
+          <p:cNvSpPr txBox="1"/>
+          <p:nvPr/>
+        </p:nvSpPr>
+        <p:spPr>
+          <a:xfrm>
+            <a:off x="502920" y="5806440"/>
+            <a:ext cx="11155680" cy="548640"/>
+          </a:xfrm>
+          <a:prstGeom prst="rect">
+            <a:avLst/>
+          </a:prstGeom>
+          <a:noFill/>
+        </p:spPr>
+        <p:txBody>
+          <a:bodyPr wrap="square" lIns="45720" tIns="18288" rIns="45720" bIns="18288" anchor="t">
+            <a:spAutoFit/>
+          </a:bodyPr>
+          <a:lstStyle/>
+          <a:p>
+            <a:pPr algn="l"/>
+            <a:r>
+              <a:rPr sz="1250" b="0" i="0">
+                <a:solidFill>
+                  <a:srgbClr val="404040"/>
+                </a:solidFill>
+                <a:latin typeface="Calibri"/>
+              </a:rPr>
+              <a:t>SQLite + Room 2.8 · base cifrada completa con SQLCipher 4 (AES-256); la clave la protege el Android Keystore · montos en céntimos (INTEGER) · fechas ISO-8601 (TEXT)</a:t>
+            </a:r>
+          </a:p>
+        </p:txBody>
+      </p:sp>
+    </p:spTree>
+  </p:cSld>
+  <p:clrMapOvr>
+    <a:masterClrMapping/>
+  </p:clrMapOvr>
+</p:sld>
+</file>
+
+<file path=ppt/slides/slide8.xml><?xml version="1.0" encoding="utf-8"?>
+<p:sld xmlns:a="http://schemas.openxmlformats.org/drawingml/2006/main" xmlns:r="http://schemas.openxmlformats.org/officeDocument/2006/relationships" xmlns:p="http://schemas.openxmlformats.org/presentationml/2006/main">
+  <p:cSld>
+    <p:spTree>
+      <p:nvGrpSpPr>
+        <p:cNvPr id="1" name=""/>
+        <p:cNvGrpSpPr/>
+        <p:nvPr/>
+      </p:nvGrpSpPr>
+      <p:grpSpPr>
+        <a:xfrm>
+          <a:off x="0" y="0"/>
+          <a:ext cx="0" cy="0"/>
+          <a:chOff x="0" y="0"/>
+          <a:chExt cx="0" cy="0"/>
+        </a:xfrm>
+      </p:grpSpPr>
+      <p:sp>
+        <p:nvSpPr>
+          <p:cNvPr id="2" name="TextBox 1"/>
+          <p:cNvSpPr txBox="1"/>
+          <p:nvPr/>
+        </p:nvSpPr>
+        <p:spPr>
+          <a:xfrm>
+            <a:off x="502920" y="201168"/>
+            <a:ext cx="7315200" cy="274320"/>
+          </a:xfrm>
+          <a:prstGeom prst="rect">
+            <a:avLst/>
+          </a:prstGeom>
+          <a:noFill/>
+        </p:spPr>
+        <p:txBody>
+          <a:bodyPr wrap="square" lIns="45720" tIns="18288" rIns="45720" bIns="18288" anchor="t">
+            <a:spAutoFit/>
+          </a:bodyPr>
+          <a:lstStyle/>
+          <a:p>
+            <a:pPr algn="l"/>
+            <a:r>
+              <a:rPr sz="1100" b="1" i="0">
+                <a:solidFill>
+                  <a:srgbClr val="C00000"/>
+                </a:solidFill>
+                <a:latin typeface="Calibri"/>
+              </a:rPr>
+              <a:t>BASE DE DATOS</a:t>
+            </a:r>
+          </a:p>
+        </p:txBody>
+      </p:sp>
+      <p:sp>
+        <p:nvSpPr>
+          <p:cNvPr id="3" name="TextBox 2"/>
+          <p:cNvSpPr txBox="1"/>
+          <p:nvPr/>
+        </p:nvSpPr>
+        <p:spPr>
+          <a:xfrm>
+            <a:off x="502920" y="457200"/>
+            <a:ext cx="9692640" cy="594360"/>
+          </a:xfrm>
+          <a:prstGeom prst="rect">
+            <a:avLst/>
+          </a:prstGeom>
+          <a:noFill/>
+        </p:spPr>
+        <p:txBody>
+          <a:bodyPr wrap="square" lIns="45720" tIns="18288" rIns="45720" bIns="18288" anchor="t">
+            <a:spAutoFit/>
+          </a:bodyPr>
+          <a:lstStyle/>
+          <a:p>
+            <a:pPr algn="l"/>
+            <a:r>
+              <a:rPr sz="2600" b="1" i="0">
+                <a:solidFill>
+                  <a:srgbClr val="1F4E79"/>
+                </a:solidFill>
+                <a:latin typeface="Calibri"/>
+              </a:rPr>
+              <a:t>Modelo físico (2/2): parámetros y determinación del NRUS</a:t>
+            </a:r>
+          </a:p>
+        </p:txBody>
+      </p:sp>
+      <p:sp>
+        <p:nvSpPr>
+          <p:cNvPr id="4" name="Rectangle 3"/>
+          <p:cNvSpPr/>
+          <p:nvPr/>
+        </p:nvSpPr>
+        <p:spPr>
+          <a:xfrm>
+            <a:off x="502920" y="1051560"/>
+            <a:ext cx="1371600" cy="45720"/>
+          </a:xfrm>
+          <a:prstGeom prst="rect">
+            <a:avLst/>
+          </a:prstGeom>
+          <a:solidFill>
+            <a:srgbClr val="C00000"/>
+          </a:solidFill>
+          <a:ln>
+            <a:noFill/>
+          </a:ln>
+          <a:effectLst/>
+        </p:spPr>
+        <p:style>
+          <a:lnRef idx="1">
+            <a:schemeClr val="accent1"/>
+          </a:lnRef>
+          <a:fillRef idx="3">
+            <a:schemeClr val="accent1"/>
+          </a:fillRef>
+          <a:effectRef idx="2">
+            <a:schemeClr val="accent1"/>
+          </a:effectRef>
+          <a:fontRef idx="minor">
+            <a:schemeClr val="lt1"/>
+          </a:fontRef>
+        </p:style>
+        <p:txBody>
+          <a:bodyPr rtlCol="0" anchor="ctr"/>
+          <a:lstStyle/>
+          <a:p>
+            <a:pPr algn="ctr"/>
+            <a:endParaRPr/>
+          </a:p>
+        </p:txBody>
+      </p:sp>
+      <p:pic>
+        <p:nvPicPr>
+          <p:cNvPr id="5" name="Picture 4" descr="logo_utp.png"/>
+          <p:cNvPicPr>
+            <a:picLocks noChangeAspect="1"/>
+          </p:cNvPicPr>
+          <p:nvPr/>
+        </p:nvPicPr>
+        <p:blipFill>
+          <a:blip r:embed="rId3"/>
+          <a:stretch>
+            <a:fillRect/>
+          </a:stretch>
+        </p:blipFill>
+        <p:spPr>
+          <a:xfrm>
+            <a:off x="10607040" y="228600"/>
+            <a:ext cx="1188720" cy="316382"/>
+          </a:xfrm>
+          <a:prstGeom prst="rect">
+            <a:avLst/>
+          </a:prstGeom>
+        </p:spPr>
+      </p:pic>
+      <p:sp>
+        <p:nvSpPr>
+          <p:cNvPr id="6" name="Rectangle 5"/>
+          <p:cNvSpPr/>
+          <p:nvPr/>
+        </p:nvSpPr>
+        <p:spPr>
+          <a:xfrm>
+            <a:off x="0" y="6492240"/>
+            <a:ext cx="12191695" cy="365760"/>
+          </a:xfrm>
+          <a:prstGeom prst="rect">
+            <a:avLst/>
+          </a:prstGeom>
+          <a:solidFill>
+            <a:srgbClr val="C00000"/>
+          </a:solidFill>
+          <a:ln>
+            <a:noFill/>
+          </a:ln>
+          <a:effectLst/>
+        </p:spPr>
+        <p:style>
+          <a:lnRef idx="1">
+            <a:schemeClr val="accent1"/>
+          </a:lnRef>
+          <a:fillRef idx="3">
+            <a:schemeClr val="accent1"/>
+          </a:fillRef>
+          <a:effectRef idx="2">
+            <a:schemeClr val="accent1"/>
+          </a:effectRef>
+          <a:fontRef idx="minor">
+            <a:schemeClr val="lt1"/>
+          </a:fontRef>
+        </p:style>
+        <p:txBody>
+          <a:bodyPr rtlCol="0" anchor="ctr"/>
+          <a:lstStyle/>
+          <a:p>
+            <a:pPr algn="ctr"/>
+            <a:endParaRPr/>
+          </a:p>
+        </p:txBody>
+      </p:sp>
+      <p:sp>
+        <p:nvSpPr>
+          <p:cNvPr id="7" name="TextBox 6"/>
+          <p:cNvSpPr txBox="1"/>
+          <p:nvPr/>
+        </p:nvSpPr>
+        <p:spPr>
+          <a:xfrm>
+            <a:off x="365760" y="6492240"/>
+            <a:ext cx="7315200" cy="365760"/>
+          </a:xfrm>
+          <a:prstGeom prst="rect">
+            <a:avLst/>
+          </a:prstGeom>
+          <a:noFill/>
+        </p:spPr>
+        <p:txBody>
+          <a:bodyPr wrap="square" lIns="45720" tIns="18288" rIns="45720" bIns="18288" anchor="ctr">
+            <a:spAutoFit/>
+          </a:bodyPr>
+          <a:lstStyle/>
+          <a:p>
+            <a:pPr algn="l"/>
+            <a:r>
+              <a:rPr sz="1100" b="0" i="0">
+                <a:solidFill>
+                  <a:srgbClr val="FFFFFF"/>
+                </a:solidFill>
+                <a:latin typeface="Calibri"/>
+              </a:rPr>
+              <a:t>Facturas S20  ·  Avance de Proyecto Final 3</a:t>
+            </a:r>
+          </a:p>
+        </p:txBody>
+      </p:sp>
+      <p:sp>
+        <p:nvSpPr>
+          <p:cNvPr id="8" name="TextBox 7"/>
+          <p:cNvSpPr txBox="1"/>
+          <p:nvPr/>
+        </p:nvSpPr>
+        <p:spPr>
+          <a:xfrm>
+            <a:off x="11247120" y="6492240"/>
+            <a:ext cx="548640" cy="365760"/>
+          </a:xfrm>
+          <a:prstGeom prst="rect">
+            <a:avLst/>
+          </a:prstGeom>
+          <a:noFill/>
+        </p:spPr>
+        <p:txBody>
+          <a:bodyPr wrap="square" lIns="45720" tIns="18288" rIns="45720" bIns="18288" anchor="ctr">
+            <a:spAutoFit/>
+          </a:bodyPr>
+          <a:lstStyle/>
+          <a:p>
+            <a:pPr algn="r"/>
+            <a:r>
+              <a:rPr sz="1100" b="0" i="0">
+                <a:solidFill>
+                  <a:srgbClr val="FFFFFF"/>
+                </a:solidFill>
+                <a:latin typeface="Calibri"/>
+              </a:rPr>
+              <a:t>10</a:t>
+            </a:r>
+          </a:p>
+        </p:txBody>
+      </p:sp>
+      <p:pic>
+        <p:nvPicPr>
+          <p:cNvPr id="9" name="Picture 8" descr="image.png"/>
+          <p:cNvPicPr>
+            <a:picLocks noChangeAspect="1"/>
+          </p:cNvPicPr>
+          <p:nvPr/>
+        </p:nvPicPr>
+        <p:blipFill>
+          <a:blip r:embed="rId4"/>
+          <a:stretch>
+            <a:fillRect/>
+          </a:stretch>
+        </p:blipFill>
+        <p:spPr>
+          <a:xfrm>
+            <a:off x="411480" y="2354312"/>
+            <a:ext cx="7863840" cy="2926615"/>
+          </a:xfrm>
+          <a:prstGeom prst="rect">
+            <a:avLst/>
+          </a:prstGeom>
+        </p:spPr>
+      </p:pic>
+      <p:sp>
+        <p:nvSpPr>
+          <p:cNvPr id="10" name="Rectangle 9"/>
+          <p:cNvSpPr/>
+          <p:nvPr/>
+        </p:nvSpPr>
+        <p:spPr>
+          <a:xfrm>
+            <a:off x="8503920" y="1325880"/>
+            <a:ext cx="3246120" cy="2240280"/>
           </a:xfrm>
           <a:prstGeom prst="rect">
             <a:avLst/>
@@ -11651,19 +11090,20 @@
           <a:lstStyle/>
           <a:p>
             <a:pPr algn="ctr"/>
-          </a:p>
-        </p:txBody>
-      </p:sp>
-      <p:sp>
-        <p:nvSpPr>
-          <p:cNvPr id="12" name="Rectangle 11"/>
+            <a:endParaRPr/>
+          </a:p>
+        </p:txBody>
+      </p:sp>
+      <p:sp>
+        <p:nvSpPr>
+          <p:cNvPr id="11" name="Rectangle 10"/>
           <p:cNvSpPr/>
           <p:nvPr/>
         </p:nvSpPr>
         <p:spPr>
           <a:xfrm>
-            <a:off x="8915400" y="1234440"/>
-            <a:ext cx="2834640" cy="64008"/>
+            <a:off x="8503920" y="1325880"/>
+            <a:ext cx="3246120" cy="64008"/>
           </a:xfrm>
           <a:prstGeom prst="rect">
             <a:avLst/>
@@ -11695,6 +11135,42 @@
           <a:lstStyle/>
           <a:p>
             <a:pPr algn="ctr"/>
+            <a:endParaRPr/>
+          </a:p>
+        </p:txBody>
+      </p:sp>
+      <p:sp>
+        <p:nvSpPr>
+          <p:cNvPr id="12" name="TextBox 11"/>
+          <p:cNvSpPr txBox="1"/>
+          <p:nvPr/>
+        </p:nvSpPr>
+        <p:spPr>
+          <a:xfrm>
+            <a:off x="8641080" y="1463039"/>
+            <a:ext cx="2971800" cy="320040"/>
+          </a:xfrm>
+          <a:prstGeom prst="rect">
+            <a:avLst/>
+          </a:prstGeom>
+          <a:noFill/>
+        </p:spPr>
+        <p:txBody>
+          <a:bodyPr wrap="square" lIns="45720" tIns="18288" rIns="45720" bIns="18288" anchor="t">
+            <a:spAutoFit/>
+          </a:bodyPr>
+          <a:lstStyle/>
+          <a:p>
+            <a:pPr algn="l"/>
+            <a:r>
+              <a:rPr sz="1300" b="1" i="0">
+                <a:solidFill>
+                  <a:srgbClr val="1E7B4F"/>
+                </a:solidFill>
+                <a:latin typeface="Calibri"/>
+              </a:rPr>
+              <a:t>Revisión en DBeaver</a:t>
+            </a:r>
           </a:p>
         </p:txBody>
       </p:sp>
@@ -11706,43 +11182,8 @@
         </p:nvSpPr>
         <p:spPr>
           <a:xfrm>
-            <a:off x="9052560" y="1371600"/>
-            <a:ext cx="2560320" cy="320040"/>
-          </a:xfrm>
-          <a:prstGeom prst="rect">
-            <a:avLst/>
-          </a:prstGeom>
-          <a:noFill/>
-        </p:spPr>
-        <p:txBody>
-          <a:bodyPr wrap="square" lIns="45720" rIns="45720" tIns="18288" bIns="18288" anchor="t">
-            <a:spAutoFit/>
-          </a:bodyPr>
-          <a:lstStyle/>
-          <a:p>
-            <a:pPr algn="l"/>
-            <a:r>
-              <a:rPr sz="1300" b="1" i="0">
-                <a:solidFill>
-                  <a:srgbClr val="1E7B4F"/>
-                </a:solidFill>
-                <a:latin typeface="Calibri"/>
-              </a:rPr>
-              <a:t>Cierre mensual</a:t>
-            </a:r>
-          </a:p>
-        </p:txBody>
-      </p:sp>
-      <p:sp>
-        <p:nvSpPr>
-          <p:cNvPr id="14" name="TextBox 13"/>
-          <p:cNvSpPr txBox="1"/>
-          <p:nvPr/>
-        </p:nvSpPr>
-        <p:spPr>
-          <a:xfrm>
-            <a:off x="9052560" y="1691640"/>
-            <a:ext cx="2560320" cy="1051560"/>
+            <a:off x="8641080" y="1783080"/>
+            <a:ext cx="2971800" cy="1691640"/>
           </a:xfrm>
           <a:prstGeom prst="rect">
             <a:avLst/>
@@ -11768,7 +11209,7 @@
                 </a:solidFill>
                 <a:latin typeface="Calibri"/>
               </a:rPr>
-              <a:t>RF-09 a RF-17, RF-21, RF-22</a:t>
+              <a:t>facturas_cifrada.db: el archivo del teléfono; sin la clave no abre</a:t>
             </a:r>
           </a:p>
           <a:p>
@@ -11785,7 +11226,7 @@
                 </a:solidFill>
                 <a:latin typeface="Calibri"/>
               </a:rPr>
-              <a:t>RNF-03 total exacto</a:t>
+              <a:t>facturas_legible.db: copia exportada dentro de la app</a:t>
             </a:r>
           </a:p>
           <a:p>
@@ -11802,38 +11243,21 @@
                 </a:solidFill>
                 <a:latin typeface="Calibri"/>
               </a:rPr>
-              <a:t>RNF-08 reporte PDF</a:t>
-            </a:r>
-          </a:p>
-          <a:p>
-            <a:pPr marL="182880" indent="-182880">
-              <a:spcAft>
-                <a:spcPts val="400"/>
-              </a:spcAft>
-              <a:buChar char="•"/>
-            </a:pPr>
-            <a:r>
-              <a:rPr sz="1150" b="0">
-                <a:solidFill>
-                  <a:srgbClr val="262626"/>
-                </a:solidFill>
-                <a:latin typeface="Calibri"/>
-              </a:rPr>
-              <a:t>RNF-17, 18 reglas del NRUS</a:t>
-            </a:r>
-          </a:p>
-        </p:txBody>
-      </p:sp>
-      <p:sp>
-        <p:nvSpPr>
-          <p:cNvPr id="15" name="Rectangle 14"/>
+              <a:t>Se genera con copiar_base.ps1</a:t>
+            </a:r>
+          </a:p>
+        </p:txBody>
+      </p:sp>
+      <p:sp>
+        <p:nvSpPr>
+          <p:cNvPr id="14" name="Rectangle 13"/>
           <p:cNvSpPr/>
           <p:nvPr/>
         </p:nvSpPr>
         <p:spPr>
           <a:xfrm>
-            <a:off x="8915400" y="3840480"/>
-            <a:ext cx="2834640" cy="1600200"/>
+            <a:off x="8503920" y="3749039"/>
+            <a:ext cx="3246120" cy="2606040"/>
           </a:xfrm>
           <a:prstGeom prst="rect">
             <a:avLst/>
@@ -11867,19 +11291,20 @@
           <a:lstStyle/>
           <a:p>
             <a:pPr algn="ctr"/>
-          </a:p>
-        </p:txBody>
-      </p:sp>
-      <p:sp>
-        <p:nvSpPr>
-          <p:cNvPr id="16" name="Rectangle 15"/>
+            <a:endParaRPr/>
+          </a:p>
+        </p:txBody>
+      </p:sp>
+      <p:sp>
+        <p:nvSpPr>
+          <p:cNvPr id="15" name="Rectangle 14"/>
           <p:cNvSpPr/>
           <p:nvPr/>
         </p:nvSpPr>
         <p:spPr>
           <a:xfrm>
-            <a:off x="8915400" y="3840480"/>
-            <a:ext cx="2834640" cy="64008"/>
+            <a:off x="8503920" y="3749039"/>
+            <a:ext cx="3246120" cy="64008"/>
           </a:xfrm>
           <a:prstGeom prst="rect">
             <a:avLst/>
@@ -11911,6 +11336,42 @@
           <a:lstStyle/>
           <a:p>
             <a:pPr algn="ctr"/>
+            <a:endParaRPr/>
+          </a:p>
+        </p:txBody>
+      </p:sp>
+      <p:sp>
+        <p:nvSpPr>
+          <p:cNvPr id="16" name="TextBox 15"/>
+          <p:cNvSpPr txBox="1"/>
+          <p:nvPr/>
+        </p:nvSpPr>
+        <p:spPr>
+          <a:xfrm>
+            <a:off x="8641080" y="3886200"/>
+            <a:ext cx="2971800" cy="320040"/>
+          </a:xfrm>
+          <a:prstGeom prst="rect">
+            <a:avLst/>
+          </a:prstGeom>
+          <a:noFill/>
+        </p:spPr>
+        <p:txBody>
+          <a:bodyPr wrap="square" lIns="45720" tIns="18288" rIns="45720" bIns="18288" anchor="t">
+            <a:spAutoFit/>
+          </a:bodyPr>
+          <a:lstStyle/>
+          <a:p>
+            <a:pPr algn="l"/>
+            <a:r>
+              <a:rPr sz="1300" b="1" i="0">
+                <a:solidFill>
+                  <a:srgbClr val="1F4E79"/>
+                </a:solidFill>
+                <a:latin typeface="Calibri"/>
+              </a:rPr>
+              <a:t>Seguridad</a:t>
+            </a:r>
           </a:p>
         </p:txBody>
       </p:sp>
@@ -11922,43 +11383,8 @@
         </p:nvSpPr>
         <p:spPr>
           <a:xfrm>
-            <a:off x="9052560" y="3977640"/>
-            <a:ext cx="2560320" cy="320040"/>
-          </a:xfrm>
-          <a:prstGeom prst="rect">
-            <a:avLst/>
-          </a:prstGeom>
-          <a:noFill/>
-        </p:spPr>
-        <p:txBody>
-          <a:bodyPr wrap="square" lIns="45720" rIns="45720" tIns="18288" bIns="18288" anchor="t">
-            <a:spAutoFit/>
-          </a:bodyPr>
-          <a:lstStyle/>
-          <a:p>
-            <a:pPr algn="l"/>
-            <a:r>
-              <a:rPr sz="1300" b="1" i="0">
-                <a:solidFill>
-                  <a:srgbClr val="1F4E79"/>
-                </a:solidFill>
-                <a:latin typeface="Calibri"/>
-              </a:rPr>
-              <a:t>Publicación del modelo</a:t>
-            </a:r>
-          </a:p>
-        </p:txBody>
-      </p:sp>
-      <p:sp>
-        <p:nvSpPr>
-          <p:cNvPr id="18" name="TextBox 17"/>
-          <p:cNvSpPr txBox="1"/>
-          <p:nvPr/>
-        </p:nvSpPr>
-        <p:spPr>
-          <a:xfrm>
-            <a:off x="9052560" y="4297680"/>
-            <a:ext cx="2560320" cy="1051560"/>
+            <a:off x="8641080" y="4206240"/>
+            <a:ext cx="2971800" cy="2057400"/>
           </a:xfrm>
           <a:prstGeom prst="rect">
             <a:avLst/>
@@ -11984,7 +11410,7 @@
                 </a:solidFill>
                 <a:latin typeface="Calibri"/>
               </a:rPr>
-              <a:t>RF-20 instalar y actualizar</a:t>
+              <a:t>Base cifrada con SQLCipher</a:t>
             </a:r>
           </a:p>
           <a:p>
@@ -12001,7 +11427,7 @@
                 </a:solidFill>
                 <a:latin typeface="Calibri"/>
               </a:rPr>
-              <a:t>RNF-06, 07 tamaño y equipo</a:t>
+              <a:t>Clave en el Android Keystore</a:t>
             </a:r>
           </a:p>
           <a:p>
@@ -12018,7 +11444,7 @@
                 </a:solidFill>
                 <a:latin typeface="Calibri"/>
               </a:rPr>
-              <a:t>RNF-16 descarga verificada</a:t>
+              <a:t>Fotos cifradas con AES-GCM</a:t>
             </a:r>
           </a:p>
           <a:p>
@@ -12035,1158 +11461,28 @@
                 </a:solidFill>
                 <a:latin typeface="Calibri"/>
               </a:rPr>
-              <a:t>RNF-19 cambiar el modelo</a:t>
-            </a:r>
-          </a:p>
-        </p:txBody>
-      </p:sp>
-    </p:spTree>
-  </p:cSld>
-  <p:clrMapOvr>
-    <a:masterClrMapping/>
-  </p:clrMapOvr>
-</p:sld>
-</file>
-
-<file path=ppt/slides/slide7.xml><?xml version="1.0" encoding="utf-8"?>
-<p:sld xmlns:a="http://schemas.openxmlformats.org/drawingml/2006/main" xmlns:p="http://schemas.openxmlformats.org/presentationml/2006/main" xmlns:r="http://schemas.openxmlformats.org/officeDocument/2006/relationships">
-  <p:cSld>
-    <p:spTree>
-      <p:nvGrpSpPr>
-        <p:cNvPr id="1" name=""/>
-        <p:cNvGrpSpPr/>
-        <p:nvPr/>
-      </p:nvGrpSpPr>
-      <p:grpSpPr/>
-      <p:sp>
-        <p:nvSpPr>
-          <p:cNvPr id="2" name="TextBox 1"/>
-          <p:cNvSpPr txBox="1"/>
-          <p:nvPr/>
-        </p:nvSpPr>
-        <p:spPr>
-          <a:xfrm>
-            <a:off x="502920" y="201168"/>
-            <a:ext cx="7315200" cy="274320"/>
-          </a:xfrm>
-          <a:prstGeom prst="rect">
-            <a:avLst/>
-          </a:prstGeom>
-          <a:noFill/>
-        </p:spPr>
-        <p:txBody>
-          <a:bodyPr wrap="square" lIns="45720" rIns="45720" tIns="18288" bIns="18288" anchor="t">
-            <a:spAutoFit/>
-          </a:bodyPr>
-          <a:lstStyle/>
-          <a:p>
-            <a:pPr algn="l"/>
-            <a:r>
-              <a:rPr sz="1100" b="1" i="0">
-                <a:solidFill>
-                  <a:srgbClr val="C00000"/>
+              <a:t>Sin copias automáticas a la nube</a:t>
+            </a:r>
+          </a:p>
+          <a:p>
+            <a:pPr marL="182880" indent="-182880">
+              <a:spcAft>
+                <a:spcPts val="400"/>
+              </a:spcAft>
+              <a:buChar char="•"/>
+            </a:pPr>
+            <a:r>
+              <a:rPr sz="1150" b="0">
+                <a:solidFill>
+                  <a:srgbClr val="262626"/>
                 </a:solidFill>
                 <a:latin typeface="Calibri"/>
               </a:rPr>
-              <a:t>DIAGRAMAS DE PROCESOS</a:t>
-            </a:r>
-          </a:p>
-        </p:txBody>
-      </p:sp>
-      <p:sp>
-        <p:nvSpPr>
-          <p:cNvPr id="3" name="TextBox 2"/>
-          <p:cNvSpPr txBox="1"/>
-          <p:nvPr/>
-        </p:nvSpPr>
-        <p:spPr>
-          <a:xfrm>
-            <a:off x="502920" y="457200"/>
-            <a:ext cx="9692640" cy="594360"/>
-          </a:xfrm>
-          <a:prstGeom prst="rect">
-            <a:avLst/>
-          </a:prstGeom>
-          <a:noFill/>
-        </p:spPr>
-        <p:txBody>
-          <a:bodyPr wrap="square" lIns="45720" rIns="45720" tIns="18288" bIns="18288" anchor="t">
-            <a:spAutoFit/>
-          </a:bodyPr>
-          <a:lstStyle/>
-          <a:p>
-            <a:pPr algn="l"/>
-            <a:r>
-              <a:rPr sz="2600" b="1" i="0">
-                <a:solidFill>
-                  <a:srgbClr val="1F4E79"/>
-                </a:solidFill>
-                <a:latin typeface="Calibri"/>
-              </a:rPr>
-              <a:t>Cobertura del alcance funcional y no funcional</a:t>
-            </a:r>
-          </a:p>
-        </p:txBody>
-      </p:sp>
-      <p:sp>
-        <p:nvSpPr>
-          <p:cNvPr id="4" name="Rectangle 3"/>
-          <p:cNvSpPr/>
-          <p:nvPr/>
-        </p:nvSpPr>
-        <p:spPr>
-          <a:xfrm>
-            <a:off x="502920" y="1051560"/>
-            <a:ext cx="1371600" cy="45720"/>
-          </a:xfrm>
-          <a:prstGeom prst="rect">
-            <a:avLst/>
-          </a:prstGeom>
-          <a:solidFill>
-            <a:srgbClr val="C00000"/>
-          </a:solidFill>
-          <a:ln>
-            <a:noFill/>
-          </a:ln>
-          <a:effectLst/>
-        </p:spPr>
-        <p:style>
-          <a:lnRef idx="1">
-            <a:schemeClr val="accent1"/>
-          </a:lnRef>
-          <a:fillRef idx="3">
-            <a:schemeClr val="accent1"/>
-          </a:fillRef>
-          <a:effectRef idx="2">
-            <a:schemeClr val="accent1"/>
-          </a:effectRef>
-          <a:fontRef idx="minor">
-            <a:schemeClr val="lt1"/>
-          </a:fontRef>
-        </p:style>
-        <p:txBody>
-          <a:bodyPr rtlCol="0" anchor="ctr"/>
-          <a:lstStyle/>
-          <a:p>
-            <a:pPr algn="ctr"/>
-          </a:p>
-        </p:txBody>
-      </p:sp>
-      <p:pic>
-        <p:nvPicPr>
-          <p:cNvPr id="5" name="Picture 4" descr="logo_utp.png"/>
-          <p:cNvPicPr>
-            <a:picLocks noChangeAspect="1"/>
-          </p:cNvPicPr>
-          <p:nvPr/>
-        </p:nvPicPr>
-        <p:blipFill>
-          <a:blip r:embed="rId2"/>
-          <a:stretch>
-            <a:fillRect/>
-          </a:stretch>
-        </p:blipFill>
-        <p:spPr>
-          <a:xfrm>
-            <a:off x="10607040" y="228600"/>
-            <a:ext cx="1188720" cy="316382"/>
-          </a:xfrm>
-          <a:prstGeom prst="rect">
-            <a:avLst/>
-          </a:prstGeom>
-        </p:spPr>
-      </p:pic>
-      <p:sp>
-        <p:nvSpPr>
-          <p:cNvPr id="6" name="Rectangle 5"/>
-          <p:cNvSpPr/>
-          <p:nvPr/>
-        </p:nvSpPr>
-        <p:spPr>
-          <a:xfrm>
-            <a:off x="0" y="6492240"/>
-            <a:ext cx="12191695" cy="365760"/>
-          </a:xfrm>
-          <a:prstGeom prst="rect">
-            <a:avLst/>
-          </a:prstGeom>
-          <a:solidFill>
-            <a:srgbClr val="C00000"/>
-          </a:solidFill>
-          <a:ln>
-            <a:noFill/>
-          </a:ln>
-          <a:effectLst/>
-        </p:spPr>
-        <p:style>
-          <a:lnRef idx="1">
-            <a:schemeClr val="accent1"/>
-          </a:lnRef>
-          <a:fillRef idx="3">
-            <a:schemeClr val="accent1"/>
-          </a:fillRef>
-          <a:effectRef idx="2">
-            <a:schemeClr val="accent1"/>
-          </a:effectRef>
-          <a:fontRef idx="minor">
-            <a:schemeClr val="lt1"/>
-          </a:fontRef>
-        </p:style>
-        <p:txBody>
-          <a:bodyPr rtlCol="0" anchor="ctr"/>
-          <a:lstStyle/>
-          <a:p>
-            <a:pPr algn="ctr"/>
-          </a:p>
-        </p:txBody>
-      </p:sp>
-      <p:sp>
-        <p:nvSpPr>
-          <p:cNvPr id="7" name="TextBox 6"/>
-          <p:cNvSpPr txBox="1"/>
-          <p:nvPr/>
-        </p:nvSpPr>
-        <p:spPr>
-          <a:xfrm>
-            <a:off x="365760" y="6492240"/>
-            <a:ext cx="7315200" cy="365760"/>
-          </a:xfrm>
-          <a:prstGeom prst="rect">
-            <a:avLst/>
-          </a:prstGeom>
-          <a:noFill/>
-        </p:spPr>
-        <p:txBody>
-          <a:bodyPr wrap="square" lIns="45720" rIns="45720" tIns="18288" bIns="18288" anchor="ctr">
-            <a:spAutoFit/>
-          </a:bodyPr>
-          <a:lstStyle/>
-          <a:p>
-            <a:pPr algn="l"/>
-            <a:r>
-              <a:rPr sz="1100" b="0" i="0">
-                <a:solidFill>
-                  <a:srgbClr val="FFFFFF"/>
-                </a:solidFill>
-                <a:latin typeface="Calibri"/>
-              </a:rPr>
-              <a:t>Facturas S20  ·  Avance de Proyecto Final 3</a:t>
-            </a:r>
-          </a:p>
-        </p:txBody>
-      </p:sp>
-      <p:sp>
-        <p:nvSpPr>
-          <p:cNvPr id="8" name="TextBox 7"/>
-          <p:cNvSpPr txBox="1"/>
-          <p:nvPr/>
-        </p:nvSpPr>
-        <p:spPr>
-          <a:xfrm>
-            <a:off x="11247120" y="6492240"/>
-            <a:ext cx="548640" cy="365760"/>
-          </a:xfrm>
-          <a:prstGeom prst="rect">
-            <a:avLst/>
-          </a:prstGeom>
-          <a:noFill/>
-        </p:spPr>
-        <p:txBody>
-          <a:bodyPr wrap="square" lIns="45720" rIns="45720" tIns="18288" bIns="18288" anchor="ctr">
-            <a:spAutoFit/>
-          </a:bodyPr>
-          <a:lstStyle/>
-          <a:p>
-            <a:pPr algn="r"/>
-            <a:r>
-              <a:rPr sz="1100" b="0" i="0">
-                <a:solidFill>
-                  <a:srgbClr val="FFFFFF"/>
-                </a:solidFill>
-                <a:latin typeface="Calibri"/>
-              </a:rPr>
-              <a:t>7</a:t>
-            </a:r>
-          </a:p>
-        </p:txBody>
-      </p:sp>
-      <p:graphicFrame>
-        <p:nvGraphicFramePr>
-          <p:cNvPr id="9" name="Table 8"/>
-          <p:cNvGraphicFramePr>
-            <a:graphicFrameLocks noGrp="1"/>
-          </p:cNvGraphicFramePr>
-          <p:nvPr/>
-        </p:nvGraphicFramePr>
-        <p:xfrm>
-          <a:off x="502920" y="1371600"/>
-          <a:ext cx="11155680" cy="3520440"/>
-        </p:xfrm>
-        <a:graphic>
-          <a:graphicData uri="http://schemas.openxmlformats.org/drawingml/2006/table">
-            <a:tbl>
-              <a:tblPr firstRow="1" bandRow="1">
-                <a:tableStyleId>{5C22544A-7EE6-4342-B048-85BDC9FD1C3A}</a:tableStyleId>
-              </a:tblPr>
-              <a:tblGrid>
-                <a:gridCol w="3657600"/>
-                <a:gridCol w="3657600"/>
-                <a:gridCol w="3840480"/>
-              </a:tblGrid>
-              <a:tr h="502920">
-                <a:tc>
-                  <a:txBody>
-                    <a:bodyPr/>
-                    <a:lstStyle/>
-                    <a:p>
-                      <a:pPr algn="ctr"/>
-                      <a:r>
-                        <a:rPr sz="1300" b="1">
-                          <a:solidFill>
-                            <a:srgbClr val="FFFFFF"/>
-                          </a:solidFill>
-                          <a:latin typeface="Calibri"/>
-                        </a:rPr>
-                        <a:t>Proceso</a:t>
-                      </a:r>
-                    </a:p>
-                  </a:txBody>
-                  <a:tcPr marL="54864" marR="54864" marT="18288" marB="18288" anchor="ctr">
-                    <a:solidFill>
-                      <a:srgbClr val="1F4E79"/>
-                    </a:solidFill>
-                  </a:tcPr>
-                </a:tc>
-                <a:tc>
-                  <a:txBody>
-                    <a:bodyPr/>
-                    <a:lstStyle/>
-                    <a:p>
-                      <a:pPr algn="ctr"/>
-                      <a:r>
-                        <a:rPr sz="1300" b="1">
-                          <a:solidFill>
-                            <a:srgbClr val="FFFFFF"/>
-                          </a:solidFill>
-                          <a:latin typeface="Calibri"/>
-                        </a:rPr>
-                        <a:t>Requerimientos funcionales</a:t>
-                      </a:r>
-                    </a:p>
-                  </a:txBody>
-                  <a:tcPr marL="54864" marR="54864" marT="18288" marB="18288" anchor="ctr">
-                    <a:solidFill>
-                      <a:srgbClr val="1F4E79"/>
-                    </a:solidFill>
-                  </a:tcPr>
-                </a:tc>
-                <a:tc>
-                  <a:txBody>
-                    <a:bodyPr/>
-                    <a:lstStyle/>
-                    <a:p>
-                      <a:pPr algn="ctr"/>
-                      <a:r>
-                        <a:rPr sz="1300" b="1">
-                          <a:solidFill>
-                            <a:srgbClr val="FFFFFF"/>
-                          </a:solidFill>
-                          <a:latin typeface="Calibri"/>
-                        </a:rPr>
-                        <a:t>Requerimientos no funcionales</a:t>
-                      </a:r>
-                    </a:p>
-                  </a:txBody>
-                  <a:tcPr marL="54864" marR="54864" marT="18288" marB="18288" anchor="ctr">
-                    <a:solidFill>
-                      <a:srgbClr val="1F4E79"/>
-                    </a:solidFill>
-                  </a:tcPr>
-                </a:tc>
-              </a:tr>
-              <a:tr h="502920">
-                <a:tc>
-                  <a:txBody>
-                    <a:bodyPr/>
-                    <a:lstStyle/>
-                    <a:p>
-                      <a:r>
-                        <a:rPr sz="1300" b="1">
-                          <a:solidFill>
-                            <a:srgbClr val="262626"/>
-                          </a:solidFill>
-                          <a:latin typeface="Calibri"/>
-                        </a:rPr>
-                        <a:t>Proceso propuesto (TO-BE)</a:t>
-                      </a:r>
-                    </a:p>
-                  </a:txBody>
-                  <a:tcPr marL="54864" marR="54864" marT="18288" marB="18288" anchor="ctr">
-                    <a:solidFill>
-                      <a:srgbClr val="FFFFFF"/>
-                    </a:solidFill>
-                  </a:tcPr>
-                </a:tc>
-                <a:tc>
-                  <a:txBody>
-                    <a:bodyPr/>
-                    <a:lstStyle/>
-                    <a:p>
-                      <a:pPr algn="ctr"/>
-                      <a:r>
-                        <a:rPr sz="1300" b="0">
-                          <a:solidFill>
-                            <a:srgbClr val="262626"/>
-                          </a:solidFill>
-                          <a:latin typeface="Calibri"/>
-                        </a:rPr>
-                        <a:t>RF-01 a RF-17, RF-21</a:t>
-                      </a:r>
-                    </a:p>
-                  </a:txBody>
-                  <a:tcPr marL="54864" marR="54864" marT="18288" marB="18288" anchor="ctr">
-                    <a:solidFill>
-                      <a:srgbClr val="FFFFFF"/>
-                    </a:solidFill>
-                  </a:tcPr>
-                </a:tc>
-                <a:tc>
-                  <a:txBody>
-                    <a:bodyPr/>
-                    <a:lstStyle/>
-                    <a:p>
-                      <a:pPr algn="ctr"/>
-                      <a:r>
-                        <a:rPr sz="1300" b="0">
-                          <a:solidFill>
-                            <a:srgbClr val="262626"/>
-                          </a:solidFill>
-                          <a:latin typeface="Calibri"/>
-                        </a:rPr>
-                        <a:t>RNF-03, RNF-09, RNF-12, RNF-14</a:t>
-                      </a:r>
-                    </a:p>
-                  </a:txBody>
-                  <a:tcPr marL="54864" marR="54864" marT="18288" marB="18288" anchor="ctr">
-                    <a:solidFill>
-                      <a:srgbClr val="FFFFFF"/>
-                    </a:solidFill>
-                  </a:tcPr>
-                </a:tc>
-              </a:tr>
-              <a:tr h="502920">
-                <a:tc>
-                  <a:txBody>
-                    <a:bodyPr/>
-                    <a:lstStyle/>
-                    <a:p>
-                      <a:r>
-                        <a:rPr sz="1300" b="1">
-                          <a:solidFill>
-                            <a:srgbClr val="262626"/>
-                          </a:solidFill>
-                          <a:latin typeface="Calibri"/>
-                        </a:rPr>
-                        <a:t>Registrar factura con IA</a:t>
-                      </a:r>
-                    </a:p>
-                  </a:txBody>
-                  <a:tcPr marL="54864" marR="54864" marT="18288" marB="18288" anchor="ctr">
-                    <a:solidFill>
-                      <a:srgbClr val="F6F8FA"/>
-                    </a:solidFill>
-                  </a:tcPr>
-                </a:tc>
-                <a:tc>
-                  <a:txBody>
-                    <a:bodyPr/>
-                    <a:lstStyle/>
-                    <a:p>
-                      <a:pPr algn="ctr"/>
-                      <a:r>
-                        <a:rPr sz="1300" b="0">
-                          <a:solidFill>
-                            <a:srgbClr val="262626"/>
-                          </a:solidFill>
-                          <a:latin typeface="Calibri"/>
-                        </a:rPr>
-                        <a:t>RF-01 a RF-08</a:t>
-                      </a:r>
-                    </a:p>
-                  </a:txBody>
-                  <a:tcPr marL="54864" marR="54864" marT="18288" marB="18288" anchor="ctr">
-                    <a:solidFill>
-                      <a:srgbClr val="F6F8FA"/>
-                    </a:solidFill>
-                  </a:tcPr>
-                </a:tc>
-                <a:tc>
-                  <a:txBody>
-                    <a:bodyPr/>
-                    <a:lstStyle/>
-                    <a:p>
-                      <a:pPr algn="ctr"/>
-                      <a:r>
-                        <a:rPr sz="1300" b="0">
-                          <a:solidFill>
-                            <a:srgbClr val="262626"/>
-                          </a:solidFill>
-                          <a:latin typeface="Calibri"/>
-                        </a:rPr>
-                        <a:t>RNF-01, 02, 04, 05, 09, 10, 12, 13, 14</a:t>
-                      </a:r>
-                    </a:p>
-                  </a:txBody>
-                  <a:tcPr marL="54864" marR="54864" marT="18288" marB="18288" anchor="ctr">
-                    <a:solidFill>
-                      <a:srgbClr val="F6F8FA"/>
-                    </a:solidFill>
-                  </a:tcPr>
-                </a:tc>
-              </a:tr>
-              <a:tr h="502920">
-                <a:tc>
-                  <a:txBody>
-                    <a:bodyPr/>
-                    <a:lstStyle/>
-                    <a:p>
-                      <a:r>
-                        <a:rPr sz="1300" b="1">
-                          <a:solidFill>
-                            <a:srgbClr val="262626"/>
-                          </a:solidFill>
-                          <a:latin typeface="Calibri"/>
-                        </a:rPr>
-                        <a:t>Cierre mensual y declaración</a:t>
-                      </a:r>
-                    </a:p>
-                  </a:txBody>
-                  <a:tcPr marL="54864" marR="54864" marT="18288" marB="18288" anchor="ctr">
-                    <a:solidFill>
-                      <a:srgbClr val="FFFFFF"/>
-                    </a:solidFill>
-                  </a:tcPr>
-                </a:tc>
-                <a:tc>
-                  <a:txBody>
-                    <a:bodyPr/>
-                    <a:lstStyle/>
-                    <a:p>
-                      <a:pPr algn="ctr"/>
-                      <a:r>
-                        <a:rPr sz="1300" b="0">
-                          <a:solidFill>
-                            <a:srgbClr val="262626"/>
-                          </a:solidFill>
-                          <a:latin typeface="Calibri"/>
-                        </a:rPr>
-                        <a:t>RF-09 a RF-17, RF-21, RF-22</a:t>
-                      </a:r>
-                    </a:p>
-                  </a:txBody>
-                  <a:tcPr marL="54864" marR="54864" marT="18288" marB="18288" anchor="ctr">
-                    <a:solidFill>
-                      <a:srgbClr val="FFFFFF"/>
-                    </a:solidFill>
-                  </a:tcPr>
-                </a:tc>
-                <a:tc>
-                  <a:txBody>
-                    <a:bodyPr/>
-                    <a:lstStyle/>
-                    <a:p>
-                      <a:pPr algn="ctr"/>
-                      <a:r>
-                        <a:rPr sz="1300" b="0">
-                          <a:solidFill>
-                            <a:srgbClr val="262626"/>
-                          </a:solidFill>
-                          <a:latin typeface="Calibri"/>
-                        </a:rPr>
-                        <a:t>RNF-03, 08, 13, 17, 18</a:t>
-                      </a:r>
-                    </a:p>
-                  </a:txBody>
-                  <a:tcPr marL="54864" marR="54864" marT="18288" marB="18288" anchor="ctr">
-                    <a:solidFill>
-                      <a:srgbClr val="FFFFFF"/>
-                    </a:solidFill>
-                  </a:tcPr>
-                </a:tc>
-              </a:tr>
-              <a:tr h="502920">
-                <a:tc>
-                  <a:txBody>
-                    <a:bodyPr/>
-                    <a:lstStyle/>
-                    <a:p>
-                      <a:r>
-                        <a:rPr sz="1300" b="1">
-                          <a:solidFill>
-                            <a:srgbClr val="262626"/>
-                          </a:solidFill>
-                          <a:latin typeface="Calibri"/>
-                        </a:rPr>
-                        <a:t>Publicar y actualizar el modelo</a:t>
-                      </a:r>
-                    </a:p>
-                  </a:txBody>
-                  <a:tcPr marL="54864" marR="54864" marT="18288" marB="18288" anchor="ctr">
-                    <a:solidFill>
-                      <a:srgbClr val="F6F8FA"/>
-                    </a:solidFill>
-                  </a:tcPr>
-                </a:tc>
-                <a:tc>
-                  <a:txBody>
-                    <a:bodyPr/>
-                    <a:lstStyle/>
-                    <a:p>
-                      <a:pPr algn="ctr"/>
-                      <a:r>
-                        <a:rPr sz="1300" b="0">
-                          <a:solidFill>
-                            <a:srgbClr val="262626"/>
-                          </a:solidFill>
-                          <a:latin typeface="Calibri"/>
-                        </a:rPr>
-                        <a:t>RF-20</a:t>
-                      </a:r>
-                    </a:p>
-                  </a:txBody>
-                  <a:tcPr marL="54864" marR="54864" marT="18288" marB="18288" anchor="ctr">
-                    <a:solidFill>
-                      <a:srgbClr val="F6F8FA"/>
-                    </a:solidFill>
-                  </a:tcPr>
-                </a:tc>
-                <a:tc>
-                  <a:txBody>
-                    <a:bodyPr/>
-                    <a:lstStyle/>
-                    <a:p>
-                      <a:pPr algn="ctr"/>
-                      <a:r>
-                        <a:rPr sz="1300" b="0">
-                          <a:solidFill>
-                            <a:srgbClr val="262626"/>
-                          </a:solidFill>
-                          <a:latin typeface="Calibri"/>
-                        </a:rPr>
-                        <a:t>RNF-01, 02, 06, 07, 16, 19</a:t>
-                      </a:r>
-                    </a:p>
-                  </a:txBody>
-                  <a:tcPr marL="54864" marR="54864" marT="18288" marB="18288" anchor="ctr">
-                    <a:solidFill>
-                      <a:srgbClr val="F6F8FA"/>
-                    </a:solidFill>
-                  </a:tcPr>
-                </a:tc>
-              </a:tr>
-              <a:tr h="502920">
-                <a:tc>
-                  <a:txBody>
-                    <a:bodyPr/>
-                    <a:lstStyle/>
-                    <a:p>
-                      <a:r>
-                        <a:rPr sz="1300" b="1">
-                          <a:solidFill>
-                            <a:srgbClr val="262626"/>
-                          </a:solidFill>
-                          <a:latin typeface="Calibri"/>
-                        </a:rPr>
-                        <a:t>Transversal: acceso y anulación (P01, P02, P12)</a:t>
-                      </a:r>
-                    </a:p>
-                  </a:txBody>
-                  <a:tcPr marL="54864" marR="54864" marT="18288" marB="18288" anchor="ctr">
-                    <a:solidFill>
-                      <a:srgbClr val="FFFFFF"/>
-                    </a:solidFill>
-                  </a:tcPr>
-                </a:tc>
-                <a:tc>
-                  <a:txBody>
-                    <a:bodyPr/>
-                    <a:lstStyle/>
-                    <a:p>
-                      <a:pPr algn="ctr"/>
-                      <a:r>
-                        <a:rPr sz="1300" b="0">
-                          <a:solidFill>
-                            <a:srgbClr val="262626"/>
-                          </a:solidFill>
-                          <a:latin typeface="Calibri"/>
-                        </a:rPr>
-                        <a:t>RF-18, RF-19</a:t>
-                      </a:r>
-                    </a:p>
-                  </a:txBody>
-                  <a:tcPr marL="54864" marR="54864" marT="18288" marB="18288" anchor="ctr">
-                    <a:solidFill>
-                      <a:srgbClr val="FFFFFF"/>
-                    </a:solidFill>
-                  </a:tcPr>
-                </a:tc>
-                <a:tc>
-                  <a:txBody>
-                    <a:bodyPr/>
-                    <a:lstStyle/>
-                    <a:p>
-                      <a:pPr algn="ctr"/>
-                      <a:r>
-                        <a:rPr sz="1300" b="0">
-                          <a:solidFill>
-                            <a:srgbClr val="262626"/>
-                          </a:solidFill>
-                          <a:latin typeface="Calibri"/>
-                        </a:rPr>
-                        <a:t>RNF-11, RNF-15</a:t>
-                      </a:r>
-                    </a:p>
-                  </a:txBody>
-                  <a:tcPr marL="54864" marR="54864" marT="18288" marB="18288" anchor="ctr">
-                    <a:solidFill>
-                      <a:srgbClr val="FFFFFF"/>
-                    </a:solidFill>
-                  </a:tcPr>
-                </a:tc>
-              </a:tr>
-              <a:tr h="502920">
-                <a:tc>
-                  <a:txBody>
-                    <a:bodyPr/>
-                    <a:lstStyle/>
-                    <a:p>
-                      <a:r>
-                        <a:rPr sz="1300" b="1">
-                          <a:solidFill>
-                            <a:srgbClr val="262626"/>
-                          </a:solidFill>
-                          <a:latin typeface="Calibri"/>
-                        </a:rPr>
-                        <a:t>Total cubierto</a:t>
-                      </a:r>
-                    </a:p>
-                  </a:txBody>
-                  <a:tcPr marL="54864" marR="54864" marT="18288" marB="18288" anchor="ctr">
-                    <a:solidFill>
-                      <a:srgbClr val="E3F1E8"/>
-                    </a:solidFill>
-                  </a:tcPr>
-                </a:tc>
-                <a:tc>
-                  <a:txBody>
-                    <a:bodyPr/>
-                    <a:lstStyle/>
-                    <a:p>
-                      <a:pPr algn="ctr"/>
-                      <a:r>
-                        <a:rPr sz="1300" b="1">
-                          <a:solidFill>
-                            <a:srgbClr val="262626"/>
-                          </a:solidFill>
-                          <a:latin typeface="Calibri"/>
-                        </a:rPr>
-                        <a:t>22 de 22 (100 %)</a:t>
-                      </a:r>
-                    </a:p>
-                  </a:txBody>
-                  <a:tcPr marL="54864" marR="54864" marT="18288" marB="18288" anchor="ctr">
-                    <a:solidFill>
-                      <a:srgbClr val="E3F1E8"/>
-                    </a:solidFill>
-                  </a:tcPr>
-                </a:tc>
-                <a:tc>
-                  <a:txBody>
-                    <a:bodyPr/>
-                    <a:lstStyle/>
-                    <a:p>
-                      <a:pPr algn="ctr"/>
-                      <a:r>
-                        <a:rPr sz="1300" b="1">
-                          <a:solidFill>
-                            <a:srgbClr val="262626"/>
-                          </a:solidFill>
-                          <a:latin typeface="Calibri"/>
-                        </a:rPr>
-                        <a:t>19 de 19 (100 %)</a:t>
-                      </a:r>
-                    </a:p>
-                  </a:txBody>
-                  <a:tcPr marL="54864" marR="54864" marT="18288" marB="18288" anchor="ctr">
-                    <a:solidFill>
-                      <a:srgbClr val="E3F1E8"/>
-                    </a:solidFill>
-                  </a:tcPr>
-                </a:tc>
-              </a:tr>
-            </a:tbl>
-          </a:graphicData>
-        </a:graphic>
-      </p:graphicFrame>
-      <p:sp>
-        <p:nvSpPr>
-          <p:cNvPr id="10" name="TextBox 9"/>
-          <p:cNvSpPr txBox="1"/>
-          <p:nvPr/>
-        </p:nvSpPr>
-        <p:spPr>
-          <a:xfrm>
-            <a:off x="502920" y="5120640"/>
-            <a:ext cx="11155680" cy="1097280"/>
-          </a:xfrm>
-          <a:prstGeom prst="rect">
-            <a:avLst/>
-          </a:prstGeom>
-          <a:noFill/>
-        </p:spPr>
-        <p:txBody>
-          <a:bodyPr wrap="square" lIns="45720" rIns="45720" tIns="18288" bIns="18288" anchor="t">
-            <a:spAutoFit/>
-          </a:bodyPr>
-          <a:lstStyle/>
-          <a:p>
-            <a:pPr algn="l"/>
-            <a:r>
-              <a:rPr sz="1300" b="1" i="0">
-                <a:solidFill>
-                  <a:srgbClr val="404040"/>
-                </a:solidFill>
-                <a:latin typeface="Calibri"/>
-              </a:rPr>
-              <a:t>Funcional: </a:t>
-            </a:r>
-            <a:r>
-              <a:rPr sz="1300" b="0" i="0">
-                <a:solidFill>
-                  <a:srgbClr val="404040"/>
-                </a:solidFill>
-                <a:latin typeface="Calibri"/>
-              </a:rPr>
-              <a:t>lo que hace la app (registrar, calcular, avisar, reportar, exportar).</a:t>
-            </a:r>
-          </a:p>
-          <a:p>
-            <a:pPr algn="l"/>
-            <a:r>
-              <a:rPr sz="1300" b="1" i="0">
-                <a:solidFill>
-                  <a:srgbClr val="404040"/>
-                </a:solidFill>
-                <a:latin typeface="Calibri"/>
-              </a:rPr>
-              <a:t>No funcional: </a:t>
-            </a:r>
-            <a:r>
-              <a:rPr sz="1300" b="0" i="0">
-                <a:solidFill>
-                  <a:srgbClr val="404040"/>
-                </a:solidFill>
-                <a:latin typeface="Calibri"/>
-              </a:rPr>
-              <a:t>cómo lo hace: exactitud, tiempo, memoria, sin conexión, cifrado y reglas mantenibles.</a:t>
-            </a:r>
-          </a:p>
-        </p:txBody>
-      </p:sp>
-    </p:spTree>
-  </p:cSld>
-  <p:clrMapOvr>
-    <a:masterClrMapping/>
-  </p:clrMapOvr>
-</p:sld>
-</file>
-
-<file path=ppt/slides/slide8.xml><?xml version="1.0" encoding="utf-8"?>
-<p:sld xmlns:a="http://schemas.openxmlformats.org/drawingml/2006/main" xmlns:p="http://schemas.openxmlformats.org/presentationml/2006/main" xmlns:r="http://schemas.openxmlformats.org/officeDocument/2006/relationships">
-  <p:cSld>
-    <p:spTree>
-      <p:nvGrpSpPr>
-        <p:cNvPr id="1" name=""/>
-        <p:cNvGrpSpPr/>
-        <p:nvPr/>
-      </p:nvGrpSpPr>
-      <p:grpSpPr/>
-      <p:sp>
-        <p:nvSpPr>
-          <p:cNvPr id="2" name="TextBox 1"/>
-          <p:cNvSpPr txBox="1"/>
-          <p:nvPr/>
-        </p:nvSpPr>
-        <p:spPr>
-          <a:xfrm>
-            <a:off x="502920" y="201168"/>
-            <a:ext cx="7315200" cy="274320"/>
-          </a:xfrm>
-          <a:prstGeom prst="rect">
-            <a:avLst/>
-          </a:prstGeom>
-          <a:noFill/>
-        </p:spPr>
-        <p:txBody>
-          <a:bodyPr wrap="square" lIns="45720" rIns="45720" tIns="18288" bIns="18288" anchor="t">
-            <a:spAutoFit/>
-          </a:bodyPr>
-          <a:lstStyle/>
-          <a:p>
-            <a:pPr algn="l"/>
-            <a:r>
-              <a:rPr sz="1100" b="1" i="0">
-                <a:solidFill>
-                  <a:srgbClr val="C00000"/>
-                </a:solidFill>
-                <a:latin typeface="Calibri"/>
-              </a:rPr>
-              <a:t>BASE DE DATOS</a:t>
-            </a:r>
-          </a:p>
-        </p:txBody>
-      </p:sp>
-      <p:sp>
-        <p:nvSpPr>
-          <p:cNvPr id="3" name="TextBox 2"/>
-          <p:cNvSpPr txBox="1"/>
-          <p:nvPr/>
-        </p:nvSpPr>
-        <p:spPr>
-          <a:xfrm>
-            <a:off x="502920" y="457200"/>
-            <a:ext cx="9692640" cy="594360"/>
-          </a:xfrm>
-          <a:prstGeom prst="rect">
-            <a:avLst/>
-          </a:prstGeom>
-          <a:noFill/>
-        </p:spPr>
-        <p:txBody>
-          <a:bodyPr wrap="square" lIns="45720" rIns="45720" tIns="18288" bIns="18288" anchor="t">
-            <a:spAutoFit/>
-          </a:bodyPr>
-          <a:lstStyle/>
-          <a:p>
-            <a:pPr algn="l"/>
-            <a:r>
-              <a:rPr sz="2600" b="1" i="0">
-                <a:solidFill>
-                  <a:srgbClr val="1F4E79"/>
-                </a:solidFill>
-                <a:latin typeface="Calibri"/>
-              </a:rPr>
-              <a:t>Modelo lógico de la base de datos</a:t>
-            </a:r>
-          </a:p>
-        </p:txBody>
-      </p:sp>
-      <p:sp>
-        <p:nvSpPr>
-          <p:cNvPr id="4" name="Rectangle 3"/>
-          <p:cNvSpPr/>
-          <p:nvPr/>
-        </p:nvSpPr>
-        <p:spPr>
-          <a:xfrm>
-            <a:off x="502920" y="1051560"/>
-            <a:ext cx="1371600" cy="45720"/>
-          </a:xfrm>
-          <a:prstGeom prst="rect">
-            <a:avLst/>
-          </a:prstGeom>
-          <a:solidFill>
-            <a:srgbClr val="C00000"/>
-          </a:solidFill>
-          <a:ln>
-            <a:noFill/>
-          </a:ln>
-          <a:effectLst/>
-        </p:spPr>
-        <p:style>
-          <a:lnRef idx="1">
-            <a:schemeClr val="accent1"/>
-          </a:lnRef>
-          <a:fillRef idx="3">
-            <a:schemeClr val="accent1"/>
-          </a:fillRef>
-          <a:effectRef idx="2">
-            <a:schemeClr val="accent1"/>
-          </a:effectRef>
-          <a:fontRef idx="minor">
-            <a:schemeClr val="lt1"/>
-          </a:fontRef>
-        </p:style>
-        <p:txBody>
-          <a:bodyPr rtlCol="0" anchor="ctr"/>
-          <a:lstStyle/>
-          <a:p>
-            <a:pPr algn="ctr"/>
-          </a:p>
-        </p:txBody>
-      </p:sp>
-      <p:pic>
-        <p:nvPicPr>
-          <p:cNvPr id="5" name="Picture 4" descr="logo_utp.png"/>
-          <p:cNvPicPr>
-            <a:picLocks noChangeAspect="1"/>
-          </p:cNvPicPr>
-          <p:nvPr/>
-        </p:nvPicPr>
-        <p:blipFill>
-          <a:blip r:embed="rId2"/>
-          <a:stretch>
-            <a:fillRect/>
-          </a:stretch>
-        </p:blipFill>
-        <p:spPr>
-          <a:xfrm>
-            <a:off x="10607040" y="228600"/>
-            <a:ext cx="1188720" cy="316382"/>
-          </a:xfrm>
-          <a:prstGeom prst="rect">
-            <a:avLst/>
-          </a:prstGeom>
-        </p:spPr>
-      </p:pic>
-      <p:sp>
-        <p:nvSpPr>
-          <p:cNvPr id="6" name="Rectangle 5"/>
-          <p:cNvSpPr/>
-          <p:nvPr/>
-        </p:nvSpPr>
-        <p:spPr>
-          <a:xfrm>
-            <a:off x="0" y="6492240"/>
-            <a:ext cx="12191695" cy="365760"/>
-          </a:xfrm>
-          <a:prstGeom prst="rect">
-            <a:avLst/>
-          </a:prstGeom>
-          <a:solidFill>
-            <a:srgbClr val="C00000"/>
-          </a:solidFill>
-          <a:ln>
-            <a:noFill/>
-          </a:ln>
-          <a:effectLst/>
-        </p:spPr>
-        <p:style>
-          <a:lnRef idx="1">
-            <a:schemeClr val="accent1"/>
-          </a:lnRef>
-          <a:fillRef idx="3">
-            <a:schemeClr val="accent1"/>
-          </a:fillRef>
-          <a:effectRef idx="2">
-            <a:schemeClr val="accent1"/>
-          </a:effectRef>
-          <a:fontRef idx="minor">
-            <a:schemeClr val="lt1"/>
-          </a:fontRef>
-        </p:style>
-        <p:txBody>
-          <a:bodyPr rtlCol="0" anchor="ctr"/>
-          <a:lstStyle/>
-          <a:p>
-            <a:pPr algn="ctr"/>
-          </a:p>
-        </p:txBody>
-      </p:sp>
-      <p:sp>
-        <p:nvSpPr>
-          <p:cNvPr id="7" name="TextBox 6"/>
-          <p:cNvSpPr txBox="1"/>
-          <p:nvPr/>
-        </p:nvSpPr>
-        <p:spPr>
-          <a:xfrm>
-            <a:off x="365760" y="6492240"/>
-            <a:ext cx="7315200" cy="365760"/>
-          </a:xfrm>
-          <a:prstGeom prst="rect">
-            <a:avLst/>
-          </a:prstGeom>
-          <a:noFill/>
-        </p:spPr>
-        <p:txBody>
-          <a:bodyPr wrap="square" lIns="45720" rIns="45720" tIns="18288" bIns="18288" anchor="ctr">
-            <a:spAutoFit/>
-          </a:bodyPr>
-          <a:lstStyle/>
-          <a:p>
-            <a:pPr algn="l"/>
-            <a:r>
-              <a:rPr sz="1100" b="0" i="0">
-                <a:solidFill>
-                  <a:srgbClr val="FFFFFF"/>
-                </a:solidFill>
-                <a:latin typeface="Calibri"/>
-              </a:rPr>
-              <a:t>Facturas S20  ·  Avance de Proyecto Final 3</a:t>
-            </a:r>
-          </a:p>
-        </p:txBody>
-      </p:sp>
-      <p:sp>
-        <p:nvSpPr>
-          <p:cNvPr id="8" name="TextBox 7"/>
-          <p:cNvSpPr txBox="1"/>
-          <p:nvPr/>
-        </p:nvSpPr>
-        <p:spPr>
-          <a:xfrm>
-            <a:off x="11247120" y="6492240"/>
-            <a:ext cx="548640" cy="365760"/>
-          </a:xfrm>
-          <a:prstGeom prst="rect">
-            <a:avLst/>
-          </a:prstGeom>
-          <a:noFill/>
-        </p:spPr>
-        <p:txBody>
-          <a:bodyPr wrap="square" lIns="45720" rIns="45720" tIns="18288" bIns="18288" anchor="ctr">
-            <a:spAutoFit/>
-          </a:bodyPr>
-          <a:lstStyle/>
-          <a:p>
-            <a:pPr algn="r"/>
-            <a:r>
-              <a:rPr sz="1100" b="0" i="0">
-                <a:solidFill>
-                  <a:srgbClr val="FFFFFF"/>
-                </a:solidFill>
-                <a:latin typeface="Calibri"/>
-              </a:rPr>
-              <a:t>8</a:t>
-            </a:r>
-          </a:p>
-        </p:txBody>
-      </p:sp>
-      <p:pic>
-        <p:nvPicPr>
-          <p:cNvPr id="9" name="Picture 8" descr="image.png"/>
-          <p:cNvPicPr>
-            <a:picLocks noChangeAspect="1"/>
-          </p:cNvPicPr>
-          <p:nvPr/>
-        </p:nvPicPr>
-        <p:blipFill>
-          <a:blip r:embed="rId4"/>
-          <a:stretch>
-            <a:fillRect/>
-          </a:stretch>
-        </p:blipFill>
-        <p:spPr>
-          <a:xfrm>
-            <a:off x="1970531" y="1234440"/>
-            <a:ext cx="8266176" cy="5166360"/>
-          </a:xfrm>
-          <a:prstGeom prst="rect">
-            <a:avLst/>
-          </a:prstGeom>
-        </p:spPr>
-      </p:pic>
+              <a:t>Acceso con PIN o huella</a:t>
+            </a:r>
+          </a:p>
+        </p:txBody>
+      </p:sp>
     </p:spTree>
   </p:cSld>
   <p:clrMapOvr>
@@ -13196,7 +11492,7 @@
 </file>
 
 <file path=ppt/slides/slide9.xml><?xml version="1.0" encoding="utf-8"?>
-<p:sld xmlns:a="http://schemas.openxmlformats.org/drawingml/2006/main" xmlns:p="http://schemas.openxmlformats.org/presentationml/2006/main" xmlns:r="http://schemas.openxmlformats.org/officeDocument/2006/relationships">
+<p:sld xmlns:a="http://schemas.openxmlformats.org/drawingml/2006/main" xmlns:r="http://schemas.openxmlformats.org/officeDocument/2006/relationships" xmlns:p="http://schemas.openxmlformats.org/presentationml/2006/main">
   <p:cSld>
     <p:spTree>
       <p:nvGrpSpPr>
@@ -13204,7 +11500,14 @@
         <p:cNvGrpSpPr/>
         <p:nvPr/>
       </p:nvGrpSpPr>
-      <p:grpSpPr/>
+      <p:grpSpPr>
+        <a:xfrm>
+          <a:off x="0" y="0"/>
+          <a:ext cx="0" cy="0"/>
+          <a:chOff x="0" y="0"/>
+          <a:chExt cx="0" cy="0"/>
+        </a:xfrm>
+      </p:grpSpPr>
       <p:sp>
         <p:nvSpPr>
           <p:cNvPr id="2" name="TextBox 1"/>
@@ -13222,7 +11525,7 @@
           <a:noFill/>
         </p:spPr>
         <p:txBody>
-          <a:bodyPr wrap="square" lIns="45720" rIns="45720" tIns="18288" bIns="18288" anchor="t">
+          <a:bodyPr wrap="square" lIns="45720" tIns="18288" rIns="45720" bIns="18288" anchor="t">
             <a:spAutoFit/>
           </a:bodyPr>
           <a:lstStyle/>
@@ -13235,7 +11538,7 @@
                 </a:solidFill>
                 <a:latin typeface="Calibri"/>
               </a:rPr>
-              <a:t>BASE DE DATOS</a:t>
+              <a:t>LA APP EN EL TELÉFONO</a:t>
             </a:r>
           </a:p>
         </p:txBody>
@@ -13257,7 +11560,7 @@
           <a:noFill/>
         </p:spPr>
         <p:txBody>
-          <a:bodyPr wrap="square" lIns="45720" rIns="45720" tIns="18288" bIns="18288" anchor="t">
+          <a:bodyPr wrap="square" lIns="45720" tIns="18288" rIns="45720" bIns="18288" anchor="t">
             <a:spAutoFit/>
           </a:bodyPr>
           <a:lstStyle/>
@@ -13270,7 +11573,7 @@
                 </a:solidFill>
                 <a:latin typeface="Calibri"/>
               </a:rPr>
-              <a:t>Modelo físico (1/2): registro de facturas</a:t>
+              <a:t>Acceso y preparación del lector</a:t>
             </a:r>
           </a:p>
         </p:txBody>
@@ -13316,6 +11619,7 @@
           <a:lstStyle/>
           <a:p>
             <a:pPr algn="ctr"/>
+            <a:endParaRPr/>
           </a:p>
         </p:txBody>
       </p:sp>
@@ -13328,7 +11632,7 @@
           <p:nvPr/>
         </p:nvPicPr>
         <p:blipFill>
-          <a:blip r:embed="rId2"/>
+          <a:blip r:embed="rId3"/>
           <a:stretch>
             <a:fillRect/>
           </a:stretch>
@@ -13384,6 +11688,7 @@
           <a:lstStyle/>
           <a:p>
             <a:pPr algn="ctr"/>
+            <a:endParaRPr/>
           </a:p>
         </p:txBody>
       </p:sp>
@@ -13404,7 +11709,7 @@
           <a:noFill/>
         </p:spPr>
         <p:txBody>
-          <a:bodyPr wrap="square" lIns="45720" rIns="45720" tIns="18288" bIns="18288" anchor="ctr">
+          <a:bodyPr wrap="square" lIns="45720" tIns="18288" rIns="45720" bIns="18288" anchor="ctr">
             <a:spAutoFit/>
           </a:bodyPr>
           <a:lstStyle/>
@@ -13439,7 +11744,7 @@
           <a:noFill/>
         </p:spPr>
         <p:txBody>
-          <a:bodyPr wrap="square" lIns="45720" rIns="45720" tIns="18288" bIns="18288" anchor="ctr">
+          <a:bodyPr wrap="square" lIns="45720" tIns="18288" rIns="45720" bIns="18288" anchor="ctr">
             <a:spAutoFit/>
           </a:bodyPr>
           <a:lstStyle/>
@@ -13452,14 +11757,61 @@
                 </a:solidFill>
                 <a:latin typeface="Calibri"/>
               </a:rPr>
-              <a:t>9</a:t>
-            </a:r>
+              <a:t>11</a:t>
+            </a:r>
+          </a:p>
+        </p:txBody>
+      </p:sp>
+      <p:sp>
+        <p:nvSpPr>
+          <p:cNvPr id="9" name="Rectangle 8"/>
+          <p:cNvSpPr/>
+          <p:nvPr/>
+        </p:nvSpPr>
+        <p:spPr>
+          <a:xfrm>
+            <a:off x="842390" y="1289304"/>
+            <a:ext cx="2109978" cy="4599432"/>
+          </a:xfrm>
+          <a:prstGeom prst="rect">
+            <a:avLst/>
+          </a:prstGeom>
+          <a:solidFill>
+            <a:srgbClr val="FFFFFF"/>
+          </a:solidFill>
+          <a:ln w="12700">
+            <a:solidFill>
+              <a:srgbClr val="404040"/>
+            </a:solidFill>
+          </a:ln>
+          <a:effectLst/>
+        </p:spPr>
+        <p:style>
+          <a:lnRef idx="1">
+            <a:schemeClr val="accent1"/>
+          </a:lnRef>
+          <a:fillRef idx="3">
+            <a:schemeClr val="accent1"/>
+          </a:fillRef>
+          <a:effectRef idx="2">
+            <a:schemeClr val="accent1"/>
+          </a:effectRef>
+          <a:fontRef idx="minor">
+            <a:schemeClr val="lt1"/>
+          </a:fontRef>
+        </p:style>
+        <p:txBody>
+          <a:bodyPr rtlCol="0" anchor="ctr"/>
+          <a:lstStyle/>
+          <a:p>
+            <a:pPr algn="ctr"/>
+            <a:endParaRPr/>
           </a:p>
         </p:txBody>
       </p:sp>
       <p:pic>
         <p:nvPicPr>
-          <p:cNvPr id="9" name="Picture 8" descr="image.png"/>
+          <p:cNvPr id="10" name="Picture 9" descr="image.png"/>
           <p:cNvPicPr>
             <a:picLocks noChangeAspect="1"/>
           </p:cNvPicPr>
@@ -13473,8 +11825,8 @@
         </p:blipFill>
         <p:spPr>
           <a:xfrm>
-            <a:off x="411480" y="1563510"/>
-            <a:ext cx="11384280" cy="3868139"/>
+            <a:off x="878966" y="1325880"/>
+            <a:ext cx="2036826" cy="4526280"/>
           </a:xfrm>
           <a:prstGeom prst="rect">
             <a:avLst/>
@@ -13483,14 +11835,14 @@
       </p:pic>
       <p:sp>
         <p:nvSpPr>
-          <p:cNvPr id="10" name="TextBox 9"/>
+          <p:cNvPr id="11" name="TextBox 10"/>
           <p:cNvSpPr txBox="1"/>
           <p:nvPr/>
         </p:nvSpPr>
         <p:spPr>
           <a:xfrm>
-            <a:off x="502920" y="5806440"/>
-            <a:ext cx="11155680" cy="548640"/>
+            <a:off x="502920" y="5943600"/>
+            <a:ext cx="2788920" cy="457200"/>
           </a:xfrm>
           <a:prstGeom prst="rect">
             <a:avLst/>
@@ -13498,20 +11850,338 @@
           <a:noFill/>
         </p:spPr>
         <p:txBody>
-          <a:bodyPr wrap="square" lIns="45720" rIns="45720" tIns="18288" bIns="18288" anchor="t">
+          <a:bodyPr wrap="square" lIns="45720" tIns="18288" rIns="45720" bIns="18288" anchor="t">
             <a:spAutoFit/>
           </a:bodyPr>
           <a:lstStyle/>
           <a:p>
-            <a:pPr algn="l"/>
-            <a:r>
-              <a:rPr sz="1250" b="0" i="0">
-                <a:solidFill>
-                  <a:srgbClr val="404040"/>
+            <a:pPr algn="ctr"/>
+            <a:r>
+              <a:rPr sz="1200" b="1" i="0">
+                <a:solidFill>
+                  <a:srgbClr val="1F4E79"/>
                 </a:solidFill>
                 <a:latin typeface="Calibri"/>
               </a:rPr>
-              <a:t>SQLite + Room 2.8 · base cifrada completa con SQLCipher 4 (AES-256); la clave la protege el Android Keystore · montos en céntimos (INTEGER) · fechas ISO-8601 (TEXT)</a:t>
+              <a:t>P01 Configuración</a:t>
+            </a:r>
+          </a:p>
+        </p:txBody>
+      </p:sp>
+      <p:sp>
+        <p:nvSpPr>
+          <p:cNvPr id="12" name="Rectangle 11"/>
+          <p:cNvSpPr/>
+          <p:nvPr/>
+        </p:nvSpPr>
+        <p:spPr>
+          <a:xfrm>
+            <a:off x="3631310" y="1289304"/>
+            <a:ext cx="2109978" cy="4599432"/>
+          </a:xfrm>
+          <a:prstGeom prst="rect">
+            <a:avLst/>
+          </a:prstGeom>
+          <a:solidFill>
+            <a:srgbClr val="FFFFFF"/>
+          </a:solidFill>
+          <a:ln w="12700">
+            <a:solidFill>
+              <a:srgbClr val="404040"/>
+            </a:solidFill>
+          </a:ln>
+          <a:effectLst/>
+        </p:spPr>
+        <p:style>
+          <a:lnRef idx="1">
+            <a:schemeClr val="accent1"/>
+          </a:lnRef>
+          <a:fillRef idx="3">
+            <a:schemeClr val="accent1"/>
+          </a:fillRef>
+          <a:effectRef idx="2">
+            <a:schemeClr val="accent1"/>
+          </a:effectRef>
+          <a:fontRef idx="minor">
+            <a:schemeClr val="lt1"/>
+          </a:fontRef>
+        </p:style>
+        <p:txBody>
+          <a:bodyPr rtlCol="0" anchor="ctr"/>
+          <a:lstStyle/>
+          <a:p>
+            <a:pPr algn="ctr"/>
+            <a:endParaRPr/>
+          </a:p>
+        </p:txBody>
+      </p:sp>
+      <p:pic>
+        <p:nvPicPr>
+          <p:cNvPr id="13" name="Picture 12" descr="image.png"/>
+          <p:cNvPicPr>
+            <a:picLocks noChangeAspect="1"/>
+          </p:cNvPicPr>
+          <p:nvPr/>
+        </p:nvPicPr>
+        <p:blipFill>
+          <a:blip r:embed="rId5"/>
+          <a:stretch>
+            <a:fillRect/>
+          </a:stretch>
+        </p:blipFill>
+        <p:spPr>
+          <a:xfrm>
+            <a:off x="3667886" y="1325880"/>
+            <a:ext cx="2036826" cy="4526280"/>
+          </a:xfrm>
+          <a:prstGeom prst="rect">
+            <a:avLst/>
+          </a:prstGeom>
+        </p:spPr>
+      </p:pic>
+      <p:sp>
+        <p:nvSpPr>
+          <p:cNvPr id="14" name="TextBox 13"/>
+          <p:cNvSpPr txBox="1"/>
+          <p:nvPr/>
+        </p:nvSpPr>
+        <p:spPr>
+          <a:xfrm>
+            <a:off x="3291839" y="5943600"/>
+            <a:ext cx="2788920" cy="457200"/>
+          </a:xfrm>
+          <a:prstGeom prst="rect">
+            <a:avLst/>
+          </a:prstGeom>
+          <a:noFill/>
+        </p:spPr>
+        <p:txBody>
+          <a:bodyPr wrap="square" lIns="45720" tIns="18288" rIns="45720" bIns="18288" anchor="t">
+            <a:spAutoFit/>
+          </a:bodyPr>
+          <a:lstStyle/>
+          <a:p>
+            <a:pPr algn="ctr"/>
+            <a:r>
+              <a:rPr sz="1200" b="1" i="0">
+                <a:solidFill>
+                  <a:srgbClr val="1F4E79"/>
+                </a:solidFill>
+                <a:latin typeface="Calibri"/>
+              </a:rPr>
+              <a:t>P02 Acceso</a:t>
+            </a:r>
+          </a:p>
+        </p:txBody>
+      </p:sp>
+      <p:sp>
+        <p:nvSpPr>
+          <p:cNvPr id="15" name="Rectangle 14"/>
+          <p:cNvSpPr/>
+          <p:nvPr/>
+        </p:nvSpPr>
+        <p:spPr>
+          <a:xfrm>
+            <a:off x="6420230" y="1289304"/>
+            <a:ext cx="2109978" cy="4599432"/>
+          </a:xfrm>
+          <a:prstGeom prst="rect">
+            <a:avLst/>
+          </a:prstGeom>
+          <a:solidFill>
+            <a:srgbClr val="FFFFFF"/>
+          </a:solidFill>
+          <a:ln w="12700">
+            <a:solidFill>
+              <a:srgbClr val="404040"/>
+            </a:solidFill>
+          </a:ln>
+          <a:effectLst/>
+        </p:spPr>
+        <p:style>
+          <a:lnRef idx="1">
+            <a:schemeClr val="accent1"/>
+          </a:lnRef>
+          <a:fillRef idx="3">
+            <a:schemeClr val="accent1"/>
+          </a:fillRef>
+          <a:effectRef idx="2">
+            <a:schemeClr val="accent1"/>
+          </a:effectRef>
+          <a:fontRef idx="minor">
+            <a:schemeClr val="lt1"/>
+          </a:fontRef>
+        </p:style>
+        <p:txBody>
+          <a:bodyPr rtlCol="0" anchor="ctr"/>
+          <a:lstStyle/>
+          <a:p>
+            <a:pPr algn="ctr"/>
+            <a:endParaRPr/>
+          </a:p>
+        </p:txBody>
+      </p:sp>
+      <p:pic>
+        <p:nvPicPr>
+          <p:cNvPr id="16" name="Picture 15" descr="image.png"/>
+          <p:cNvPicPr>
+            <a:picLocks noChangeAspect="1"/>
+          </p:cNvPicPr>
+          <p:nvPr/>
+        </p:nvPicPr>
+        <p:blipFill>
+          <a:blip r:embed="rId6"/>
+          <a:stretch>
+            <a:fillRect/>
+          </a:stretch>
+        </p:blipFill>
+        <p:spPr>
+          <a:xfrm>
+            <a:off x="6456806" y="1325880"/>
+            <a:ext cx="2036826" cy="4526280"/>
+          </a:xfrm>
+          <a:prstGeom prst="rect">
+            <a:avLst/>
+          </a:prstGeom>
+        </p:spPr>
+      </p:pic>
+      <p:sp>
+        <p:nvSpPr>
+          <p:cNvPr id="17" name="TextBox 16"/>
+          <p:cNvSpPr txBox="1"/>
+          <p:nvPr/>
+        </p:nvSpPr>
+        <p:spPr>
+          <a:xfrm>
+            <a:off x="6080759" y="5943600"/>
+            <a:ext cx="2788920" cy="457200"/>
+          </a:xfrm>
+          <a:prstGeom prst="rect">
+            <a:avLst/>
+          </a:prstGeom>
+          <a:noFill/>
+        </p:spPr>
+        <p:txBody>
+          <a:bodyPr wrap="square" lIns="45720" tIns="18288" rIns="45720" bIns="18288" anchor="t">
+            <a:spAutoFit/>
+          </a:bodyPr>
+          <a:lstStyle/>
+          <a:p>
+            <a:pPr algn="ctr"/>
+            <a:r>
+              <a:rPr sz="1200" b="1" i="0">
+                <a:solidFill>
+                  <a:srgbClr val="1F4E79"/>
+                </a:solidFill>
+                <a:latin typeface="Calibri"/>
+              </a:rPr>
+              <a:t>P03 Modelo instalado</a:t>
+            </a:r>
+          </a:p>
+        </p:txBody>
+      </p:sp>
+      <p:sp>
+        <p:nvSpPr>
+          <p:cNvPr id="18" name="Rectangle 17"/>
+          <p:cNvSpPr/>
+          <p:nvPr/>
+        </p:nvSpPr>
+        <p:spPr>
+          <a:xfrm>
+            <a:off x="9209151" y="1289304"/>
+            <a:ext cx="2109978" cy="4599432"/>
+          </a:xfrm>
+          <a:prstGeom prst="rect">
+            <a:avLst/>
+          </a:prstGeom>
+          <a:solidFill>
+            <a:srgbClr val="FFFFFF"/>
+          </a:solidFill>
+          <a:ln w="12700">
+            <a:solidFill>
+              <a:srgbClr val="404040"/>
+            </a:solidFill>
+          </a:ln>
+          <a:effectLst/>
+        </p:spPr>
+        <p:style>
+          <a:lnRef idx="1">
+            <a:schemeClr val="accent1"/>
+          </a:lnRef>
+          <a:fillRef idx="3">
+            <a:schemeClr val="accent1"/>
+          </a:fillRef>
+          <a:effectRef idx="2">
+            <a:schemeClr val="accent1"/>
+          </a:effectRef>
+          <a:fontRef idx="minor">
+            <a:schemeClr val="lt1"/>
+          </a:fontRef>
+        </p:style>
+        <p:txBody>
+          <a:bodyPr rtlCol="0" anchor="ctr"/>
+          <a:lstStyle/>
+          <a:p>
+            <a:pPr algn="ctr"/>
+            <a:endParaRPr/>
+          </a:p>
+        </p:txBody>
+      </p:sp>
+      <p:pic>
+        <p:nvPicPr>
+          <p:cNvPr id="19" name="Picture 18" descr="image.png"/>
+          <p:cNvPicPr>
+            <a:picLocks noChangeAspect="1"/>
+          </p:cNvPicPr>
+          <p:nvPr/>
+        </p:nvPicPr>
+        <p:blipFill>
+          <a:blip r:embed="rId7"/>
+          <a:stretch>
+            <a:fillRect/>
+          </a:stretch>
+        </p:blipFill>
+        <p:spPr>
+          <a:xfrm>
+            <a:off x="9245726" y="1325880"/>
+            <a:ext cx="2036826" cy="4526280"/>
+          </a:xfrm>
+          <a:prstGeom prst="rect">
+            <a:avLst/>
+          </a:prstGeom>
+        </p:spPr>
+      </p:pic>
+      <p:sp>
+        <p:nvSpPr>
+          <p:cNvPr id="20" name="TextBox 19"/>
+          <p:cNvSpPr txBox="1"/>
+          <p:nvPr/>
+        </p:nvSpPr>
+        <p:spPr>
+          <a:xfrm>
+            <a:off x="8869680" y="5943600"/>
+            <a:ext cx="2788920" cy="457200"/>
+          </a:xfrm>
+          <a:prstGeom prst="rect">
+            <a:avLst/>
+          </a:prstGeom>
+          <a:noFill/>
+        </p:spPr>
+        <p:txBody>
+          <a:bodyPr wrap="square" lIns="45720" tIns="18288" rIns="45720" bIns="18288" anchor="t">
+            <a:spAutoFit/>
+          </a:bodyPr>
+          <a:lstStyle/>
+          <a:p>
+            <a:pPr algn="ctr"/>
+            <a:r>
+              <a:rPr sz="1200" b="1" i="0">
+                <a:solidFill>
+                  <a:srgbClr val="1F4E79"/>
+                </a:solidFill>
+                <a:latin typeface="Calibri"/>
+              </a:rPr>
+              <a:t>P04 Inicio</a:t>
             </a:r>
           </a:p>
         </p:txBody>
@@ -13845,7 +12515,7 @@
 </file>
 
 <file path=ppt/theme/theme2.xml><?xml version="1.0" encoding="utf-8"?>
-<a:theme xmlns:a="http://schemas.openxmlformats.org/drawingml/2006/main" name="Office Theme">
+<a:theme xmlns:a="http://schemas.openxmlformats.org/drawingml/2006/main" name="Tema de Office">
   <a:themeElements>
     <a:clrScheme name="Office">
       <a:dk1>
@@ -13855,44 +12525,44 @@
         <a:sysClr val="window" lastClr="FFFFFF"/>
       </a:lt1>
       <a:dk2>
-        <a:srgbClr val="1F497D"/>
+        <a:srgbClr val="0E2841"/>
       </a:dk2>
       <a:lt2>
-        <a:srgbClr val="EEECE1"/>
+        <a:srgbClr val="E8E8E8"/>
       </a:lt2>
       <a:accent1>
-        <a:srgbClr val="4F81BD"/>
+        <a:srgbClr val="156082"/>
       </a:accent1>
       <a:accent2>
-        <a:srgbClr val="C0504D"/>
+        <a:srgbClr val="E97132"/>
       </a:accent2>
       <a:accent3>
-        <a:srgbClr val="9BBB59"/>
+        <a:srgbClr val="196B24"/>
       </a:accent3>
       <a:accent4>
-        <a:srgbClr val="8064A2"/>
+        <a:srgbClr val="0F9ED5"/>
       </a:accent4>
       <a:accent5>
-        <a:srgbClr val="4BACC6"/>
+        <a:srgbClr val="A02B93"/>
       </a:accent5>
       <a:accent6>
-        <a:srgbClr val="F79646"/>
+        <a:srgbClr val="4EA72E"/>
       </a:accent6>
       <a:hlink>
-        <a:srgbClr val="0000FF"/>
+        <a:srgbClr val="467886"/>
       </a:hlink>
       <a:folHlink>
-        <a:srgbClr val="800080"/>
+        <a:srgbClr val="96607D"/>
       </a:folHlink>
     </a:clrScheme>
     <a:fontScheme name="Office">
       <a:majorFont>
-        <a:latin typeface="Calibri"/>
+        <a:latin typeface="Aptos Display" panose="02110004020202020204"/>
         <a:ea typeface=""/>
         <a:cs typeface=""/>
-        <a:font script="Jpan" typeface="ＭＳ Ｐゴシック"/>
+        <a:font script="Jpan" typeface="游ゴシック Light"/>
         <a:font script="Hang" typeface="맑은 고딕"/>
-        <a:font script="Hans" typeface="宋体"/>
+        <a:font script="Hans" typeface="等线 Light"/>
         <a:font script="Hant" typeface="新細明體"/>
         <a:font script="Arab" typeface="Times New Roman"/>
         <a:font script="Hebr" typeface="Times New Roman"/>
@@ -13920,14 +12590,31 @@
         <a:font script="Viet" typeface="Times New Roman"/>
         <a:font script="Uigh" typeface="Microsoft Uighur"/>
         <a:font script="Geor" typeface="Sylfaen"/>
+        <a:font script="Armn" typeface="Arial"/>
+        <a:font script="Bugi" typeface="Leelawadee UI"/>
+        <a:font script="Bopo" typeface="Microsoft JhengHei"/>
+        <a:font script="Java" typeface="Javanese Text"/>
+        <a:font script="Lisu" typeface="Segoe UI"/>
+        <a:font script="Mymr" typeface="Myanmar Text"/>
+        <a:font script="Nkoo" typeface="Ebrima"/>
+        <a:font script="Olck" typeface="Nirmala UI"/>
+        <a:font script="Osma" typeface="Ebrima"/>
+        <a:font script="Phag" typeface="Phagspa"/>
+        <a:font script="Syrn" typeface="Estrangelo Edessa"/>
+        <a:font script="Syrj" typeface="Estrangelo Edessa"/>
+        <a:font script="Syre" typeface="Estrangelo Edessa"/>
+        <a:font script="Sora" typeface="Nirmala UI"/>
+        <a:font script="Tale" typeface="Microsoft Tai Le"/>
+        <a:font script="Talu" typeface="Microsoft New Tai Lue"/>
+        <a:font script="Tfng" typeface="Ebrima"/>
       </a:majorFont>
       <a:minorFont>
-        <a:latin typeface="Calibri"/>
+        <a:latin typeface="Aptos" panose="02110004020202020204"/>
         <a:ea typeface=""/>
         <a:cs typeface=""/>
-        <a:font script="Jpan" typeface="ＭＳ Ｐゴシック"/>
+        <a:font script="Jpan" typeface="游ゴシック"/>
         <a:font script="Hang" typeface="맑은 고딕"/>
-        <a:font script="Hans" typeface="宋体"/>
+        <a:font script="Hans" typeface="等线"/>
         <a:font script="Hant" typeface="新細明體"/>
         <a:font script="Arab" typeface="Arial"/>
         <a:font script="Hebr" typeface="Arial"/>
@@ -13955,6 +12642,23 @@
         <a:font script="Viet" typeface="Arial"/>
         <a:font script="Uigh" typeface="Microsoft Uighur"/>
         <a:font script="Geor" typeface="Sylfaen"/>
+        <a:font script="Armn" typeface="Arial"/>
+        <a:font script="Bugi" typeface="Leelawadee UI"/>
+        <a:font script="Bopo" typeface="Microsoft JhengHei"/>
+        <a:font script="Java" typeface="Javanese Text"/>
+        <a:font script="Lisu" typeface="Segoe UI"/>
+        <a:font script="Mymr" typeface="Myanmar Text"/>
+        <a:font script="Nkoo" typeface="Ebrima"/>
+        <a:font script="Olck" typeface="Nirmala UI"/>
+        <a:font script="Osma" typeface="Ebrima"/>
+        <a:font script="Phag" typeface="Phagspa"/>
+        <a:font script="Syrn" typeface="Estrangelo Edessa"/>
+        <a:font script="Syrj" typeface="Estrangelo Edessa"/>
+        <a:font script="Syre" typeface="Estrangelo Edessa"/>
+        <a:font script="Sora" typeface="Nirmala UI"/>
+        <a:font script="Tale" typeface="Microsoft Tai Le"/>
+        <a:font script="Talu" typeface="Microsoft New Tai Lue"/>
+        <a:font script="Tfng" typeface="Ebrima"/>
       </a:minorFont>
     </a:fontScheme>
     <a:fmtScheme name="Office">
@@ -13966,180 +12670,136 @@
           <a:gsLst>
             <a:gs pos="0">
               <a:schemeClr val="phClr">
-                <a:tint val="50000"/>
-                <a:satMod val="300000"/>
+                <a:lumMod val="110000"/>
+                <a:satMod val="105000"/>
+                <a:tint val="67000"/>
               </a:schemeClr>
             </a:gs>
-            <a:gs pos="35000">
+            <a:gs pos="50000">
               <a:schemeClr val="phClr">
-                <a:tint val="37000"/>
-                <a:satMod val="300000"/>
+                <a:lumMod val="105000"/>
+                <a:satMod val="103000"/>
+                <a:tint val="73000"/>
               </a:schemeClr>
             </a:gs>
             <a:gs pos="100000">
               <a:schemeClr val="phClr">
-                <a:tint val="15000"/>
-                <a:satMod val="350000"/>
+                <a:lumMod val="105000"/>
+                <a:satMod val="109000"/>
+                <a:tint val="81000"/>
               </a:schemeClr>
             </a:gs>
           </a:gsLst>
-          <a:lin ang="16200000" scaled="1"/>
+          <a:lin ang="5400000" scaled="0"/>
         </a:gradFill>
         <a:gradFill rotWithShape="1">
           <a:gsLst>
             <a:gs pos="0">
               <a:schemeClr val="phClr">
-                <a:tint val="100000"/>
+                <a:satMod val="103000"/>
+                <a:lumMod val="102000"/>
+                <a:tint val="94000"/>
+              </a:schemeClr>
+            </a:gs>
+            <a:gs pos="50000">
+              <a:schemeClr val="phClr">
+                <a:satMod val="110000"/>
+                <a:lumMod val="100000"/>
                 <a:shade val="100000"/>
-                <a:satMod val="130000"/>
               </a:schemeClr>
             </a:gs>
             <a:gs pos="100000">
               <a:schemeClr val="phClr">
-                <a:tint val="50000"/>
-                <a:shade val="100000"/>
-                <a:satMod val="350000"/>
+                <a:lumMod val="99000"/>
+                <a:satMod val="120000"/>
+                <a:shade val="78000"/>
               </a:schemeClr>
             </a:gs>
           </a:gsLst>
-          <a:lin ang="16200000" scaled="0"/>
+          <a:lin ang="5400000" scaled="0"/>
         </a:gradFill>
       </a:fillStyleLst>
       <a:lnStyleLst>
-        <a:ln w="9525" cap="flat" cmpd="sng" algn="ctr">
+        <a:ln w="12700" cap="flat" cmpd="sng" algn="ctr">
           <a:solidFill>
-            <a:schemeClr val="phClr">
-              <a:shade val="95000"/>
-              <a:satMod val="105000"/>
-            </a:schemeClr>
+            <a:schemeClr val="phClr"/>
           </a:solidFill>
           <a:prstDash val="solid"/>
+          <a:miter lim="800000"/>
+        </a:ln>
+        <a:ln w="19050" cap="flat" cmpd="sng" algn="ctr">
+          <a:solidFill>
+            <a:schemeClr val="phClr"/>
+          </a:solidFill>
+          <a:prstDash val="solid"/>
+          <a:miter lim="800000"/>
         </a:ln>
         <a:ln w="25400" cap="flat" cmpd="sng" algn="ctr">
           <a:solidFill>
             <a:schemeClr val="phClr"/>
           </a:solidFill>
           <a:prstDash val="solid"/>
-        </a:ln>
-        <a:ln w="38100" cap="flat" cmpd="sng" algn="ctr">
-          <a:solidFill>
-            <a:schemeClr val="phClr"/>
-          </a:solidFill>
-          <a:prstDash val="solid"/>
+          <a:miter lim="800000"/>
         </a:ln>
       </a:lnStyleLst>
       <a:effectStyleLst>
         <a:effectStyle>
+          <a:effectLst/>
+        </a:effectStyle>
+        <a:effectStyle>
+          <a:effectLst/>
+        </a:effectStyle>
+        <a:effectStyle>
           <a:effectLst>
-            <a:outerShdw blurRad="40000" dist="20000" dir="5400000" rotWithShape="0">
+            <a:outerShdw blurRad="57150" dist="19050" dir="5400000" algn="ctr" rotWithShape="0">
               <a:srgbClr val="000000">
-                <a:alpha val="38000"/>
+                <a:alpha val="63000"/>
               </a:srgbClr>
             </a:outerShdw>
           </a:effectLst>
-        </a:effectStyle>
-        <a:effectStyle>
-          <a:effectLst>
-            <a:outerShdw blurRad="40000" dist="23000" dir="5400000" rotWithShape="0">
-              <a:srgbClr val="000000">
-                <a:alpha val="35000"/>
-              </a:srgbClr>
-            </a:outerShdw>
-          </a:effectLst>
-        </a:effectStyle>
-        <a:effectStyle>
-          <a:effectLst>
-            <a:outerShdw blurRad="40000" dist="23000" dir="5400000" rotWithShape="0">
-              <a:srgbClr val="000000">
-                <a:alpha val="35000"/>
-              </a:srgbClr>
-            </a:outerShdw>
-          </a:effectLst>
-          <a:scene3d>
-            <a:camera prst="orthographicFront">
-              <a:rot lat="0" lon="0" rev="0"/>
-            </a:camera>
-            <a:lightRig rig="threePt" dir="t">
-              <a:rot lat="0" lon="0" rev="1200000"/>
-            </a:lightRig>
-          </a:scene3d>
-          <a:sp3d>
-            <a:bevelT w="63500" h="25400"/>
-          </a:sp3d>
         </a:effectStyle>
       </a:effectStyleLst>
       <a:bgFillStyleLst>
         <a:solidFill>
           <a:schemeClr val="phClr"/>
         </a:solidFill>
+        <a:solidFill>
+          <a:schemeClr val="phClr">
+            <a:tint val="95000"/>
+            <a:satMod val="170000"/>
+          </a:schemeClr>
+        </a:solidFill>
         <a:gradFill rotWithShape="1">
           <a:gsLst>
             <a:gs pos="0">
               <a:schemeClr val="phClr">
-                <a:tint val="40000"/>
-                <a:satMod val="350000"/>
+                <a:tint val="93000"/>
+                <a:satMod val="150000"/>
+                <a:shade val="98000"/>
+                <a:lumMod val="102000"/>
               </a:schemeClr>
             </a:gs>
-            <a:gs pos="40000">
+            <a:gs pos="50000">
               <a:schemeClr val="phClr">
-                <a:tint val="45000"/>
-                <a:shade val="99000"/>
-                <a:satMod val="350000"/>
+                <a:tint val="98000"/>
+                <a:satMod val="130000"/>
+                <a:shade val="90000"/>
+                <a:lumMod val="103000"/>
               </a:schemeClr>
             </a:gs>
             <a:gs pos="100000">
               <a:schemeClr val="phClr">
-                <a:shade val="20000"/>
-                <a:satMod val="255000"/>
+                <a:shade val="63000"/>
+                <a:satMod val="120000"/>
               </a:schemeClr>
             </a:gs>
           </a:gsLst>
-          <a:path path="circle">
-            <a:fillToRect l="50000" t="-80000" r="50000" b="180000"/>
-          </a:path>
-        </a:gradFill>
-        <a:gradFill rotWithShape="1">
-          <a:gsLst>
-            <a:gs pos="0">
-              <a:schemeClr val="phClr">
-                <a:tint val="80000"/>
-                <a:satMod val="300000"/>
-              </a:schemeClr>
-            </a:gs>
-            <a:gs pos="100000">
-              <a:schemeClr val="phClr">
-                <a:shade val="30000"/>
-                <a:satMod val="200000"/>
-              </a:schemeClr>
-            </a:gs>
-          </a:gsLst>
-          <a:path path="circle">
-            <a:fillToRect l="50000" t="50000" r="50000" b="50000"/>
-          </a:path>
+          <a:lin ang="5400000" scaled="0"/>
         </a:gradFill>
       </a:bgFillStyleLst>
     </a:fmtScheme>
   </a:themeElements>
   <a:objectDefaults>
-    <a:spDef>
-      <a:spPr/>
-      <a:bodyPr/>
-      <a:lstStyle/>
-      <a:style>
-        <a:lnRef idx="1">
-          <a:schemeClr val="accent1"/>
-        </a:lnRef>
-        <a:fillRef idx="3">
-          <a:schemeClr val="accent1"/>
-        </a:fillRef>
-        <a:effectRef idx="2">
-          <a:schemeClr val="accent1"/>
-        </a:effectRef>
-        <a:fontRef idx="minor">
-          <a:schemeClr val="lt1"/>
-        </a:fontRef>
-      </a:style>
-    </a:spDef>
     <a:lnDef>
       <a:spPr/>
       <a:bodyPr/>
@@ -14161,5 +12821,10 @@
     </a:lnDef>
   </a:objectDefaults>
   <a:extraClrSchemeLst/>
+  <a:extLst>
+    <a:ext uri="{05A4C25C-085E-4340-85A3-A5531E510DB2}">
+      <thm15:themeFamily xmlns:thm15="http://schemas.microsoft.com/office/thememl/2012/main" name="Office Theme" id="{2E142A2C-CD16-42D6-873A-C26D2A0506FA}" vid="{1BDDFF52-6CD6-40A5-AB3C-68EB2F1E4D0A}"/>
+    </a:ext>
+  </a:extLst>
 </a:theme>
 </file>